--- a/lecons/F3/01_FORM4_LESSON01_Our_Planet_the_Earth.pptx
+++ b/lecons/F3/01_FORM4_LESSON01_Our_Planet_the_Earth.pptx
@@ -50,9 +50,16 @@
     <p:sldId id="298" r:id="rId44"/>
     <p:sldId id="299" r:id="rId45"/>
     <p:sldId id="300" r:id="rId46"/>
+    <p:sldId id="301" r:id="rId47"/>
+    <p:sldId id="302" r:id="rId48"/>
+    <p:sldId id="303" r:id="rId49"/>
+    <p:sldId id="304" r:id="rId50"/>
+    <p:sldId id="305" r:id="rId51"/>
+    <p:sldId id="306" r:id="rId52"/>
+    <p:sldId id="307" r:id="rId53"/>
   </p:sldIdLst>
   <p:notesMasterIdLst>
-    <p:notesMasterId r:id="rId47"/>
+    <p:notesMasterId r:id="rId54"/>
   </p:notesMasterIdLst>
   <p:sldSz cx="12192000" cy="6858000"/>
   <p:notesSz cx="6858000" cy="12192000"/>
@@ -634,7 +641,7 @@
           <a:p>
             <a:r>
               <a:rPr lang="en-US" dirty="0"/>
-              <a:t>Good. Aïcha cannot explain why she saw the top of the lorry first.</a:t>
+              <a:t>Good. Aïcha cannot explain why she saw the top of the lorry first, and her brother thinks that the Earth is flat.</a:t>
             </a:r>
             <a:endParaRPr lang="en-US" dirty="0"/>
           </a:p>
@@ -898,7 +905,7 @@
           <a:p>
             <a:r>
               <a:rPr lang="en-US" dirty="0"/>
-              <a:t>Question 3: How can she show her brother that the Earth is round? Think for a moment, then raise your hand to answer.</a:t>
+              <a:t>Question 3: What does this show about the shape of the Earth? Think for a moment, then raise your hand to answer.</a:t>
             </a:r>
             <a:endParaRPr lang="en-US" dirty="0"/>
           </a:p>
@@ -986,7 +993,7 @@
           <a:p>
             <a:r>
               <a:rPr lang="en-US" dirty="0"/>
-              <a:t>Good. She can show him a globe and photos of the Earth from space.</a:t>
+              <a:t>Good. It shows that the surface of the Earth is curved: the Earth is round.</a:t>
             </a:r>
             <a:endParaRPr lang="en-US" dirty="0"/>
           </a:p>
@@ -1338,7 +1345,7 @@
           <a:p>
             <a:r>
               <a:rPr lang="en-US" dirty="0"/>
-              <a:t>Here is the question for Activity 1: Look at the photo. What is the shape of the Earth? Take one minute to think and write your answer in your rough notebook.</a:t>
+              <a:t>Here is the question for Activity 1: What is the shape of the Earth on this photo? Take one minute to think and write your answer in your rough notebook.</a:t>
             </a:r>
             <a:endParaRPr lang="en-US" dirty="0"/>
           </a:p>
@@ -1426,7 +1433,7 @@
           <a:p>
             <a:r>
               <a:rPr lang="en-US" dirty="0"/>
-              <a:t>Let us check the answer together. The Earth is round, like a ball.</a:t>
+              <a:t>Let us check the answer together. It is round, like a ball.</a:t>
             </a:r>
             <a:endParaRPr lang="en-US" dirty="0"/>
           </a:p>
@@ -1690,7 +1697,7 @@
           <a:p>
             <a:r>
               <a:rPr lang="en-US" dirty="0"/>
-              <a:t>Here is the question for Activity 2: Which part of the ship disappears first? Why? Take one minute to think and write your answer in your rough notebook.</a:t>
+              <a:t>Here is the question for Activity 2: Which part of the ship disappears first? Take one minute to think and write your answer in your rough notebook.</a:t>
             </a:r>
             <a:endParaRPr lang="en-US" dirty="0"/>
           </a:p>
@@ -1778,7 +1785,7 @@
           <a:p>
             <a:r>
               <a:rPr lang="en-US" dirty="0"/>
-              <a:t>Let us check the answer together. The bottom of the ship disappears first, because the ship goes over the curve of the Earth.</a:t>
+              <a:t>Let us check the answer together. The bottom of the ship.</a:t>
             </a:r>
             <a:endParaRPr lang="en-US" dirty="0"/>
           </a:p>
@@ -1866,7 +1873,7 @@
           <a:p>
             <a:r>
               <a:rPr lang="en-US" dirty="0"/>
-              <a:t>Activity 3. Look carefully at this picture: an eclipse of the Moon: the Moon is inside the shadow of the Earth. Observe every detail before I ask the question.</a:t>
+              <a:t>Here is the next question: Why does it disappear first? Take one minute to think and write your answer in your rough notebook.</a:t>
             </a:r>
             <a:endParaRPr lang="en-US" dirty="0"/>
           </a:p>
@@ -1954,7 +1961,7 @@
           <a:p>
             <a:r>
               <a:rPr lang="en-US" dirty="0"/>
-              <a:t>Here is the question for Activity 3: During an eclipse, the edge of the shadow of the Earth on the Moon is always curved. What does this prove? Take one minute to think and write your answer in your rough notebook.</a:t>
+              <a:t>Let us check the answer together. The ship goes down behind the curve of the Earth.</a:t>
             </a:r>
             <a:endParaRPr lang="en-US" dirty="0"/>
           </a:p>
@@ -2042,7 +2049,7 @@
           <a:p>
             <a:r>
               <a:rPr lang="en-US" dirty="0"/>
-              <a:t>Let us check the answer together. The Earth is round. Only a round object gives a round shadow.</a:t>
+              <a:t>Activity 3. Look carefully at this picture: an eclipse of the Moon. Observe every detail before I ask the question.</a:t>
             </a:r>
             <a:endParaRPr lang="en-US" dirty="0"/>
           </a:p>
@@ -2130,7 +2137,7 @@
           <a:p>
             <a:r>
               <a:rPr lang="en-US" dirty="0"/>
-              <a:t>Now we are going to copy the board summary. Write the title and the headings neatly in your notebooks. I will give you enough time for each slide, so do not rush.</a:t>
+              <a:t>Here is the question for Activity 3: The shadow of the Earth on the Moon is always curved. What does this prove? Take one minute to think and write your answer in your rough notebook.</a:t>
             </a:r>
             <a:endParaRPr lang="en-US" dirty="0"/>
           </a:p>
@@ -2218,7 +2225,7 @@
           <a:p>
             <a:r>
               <a:rPr lang="en-US" dirty="0"/>
-              <a:t>Let us copy the definitions. The key terms of this lesson are defined as follows. On this slide we have Planet and Oblate spheroid. Write each point on a new line, with the key term first, and explain it in your own words when we revise.</a:t>
+              <a:t>Let us check the answer together. The Earth is round: only a round object always gives a round shadow.</a:t>
             </a:r>
             <a:endParaRPr lang="en-US" dirty="0"/>
           </a:p>
@@ -2306,7 +2313,7 @@
           <a:p>
             <a:r>
               <a:rPr lang="en-US" dirty="0"/>
-              <a:t>Let us copy Size of the Earth. The main measurements of the Earth are the following. On this slide we have Equatorial circumference. Write each point on a new line, with the key term first, and explain it in your own words when we revise. When you finish, we go to the next slide.</a:t>
+              <a:t>Now we are going to copy the board summary. Write the title and the headings neatly in your notebooks. I will give you enough time for each slide, so do not rush.</a:t>
             </a:r>
             <a:endParaRPr lang="en-US" dirty="0"/>
           </a:p>
@@ -2394,7 +2401,7 @@
           <a:p>
             <a:r>
               <a:rPr lang="en-US" dirty="0"/>
-              <a:t>We continue with Size of the Earth. On this slide we have Polar circumference and Equatorial diameter. Write each point on a new line, with the key term first, and explain it in your own words when we revise.</a:t>
+              <a:t>Let us copy the definitions. The key terms of this lesson are defined as follows. On this slide we have Planet and Circumference. Write each point on a new line, with the key term first, and explain it in your own words when we revise. When you finish, we go to the next slide.</a:t>
             </a:r>
             <a:endParaRPr lang="en-US" dirty="0"/>
           </a:p>
@@ -2570,7 +2577,7 @@
           <a:p>
             <a:r>
               <a:rPr lang="en-US" dirty="0"/>
-              <a:t>Let us copy Shape of the Earth. The true shape of the Earth is described as follows. On this slide we have Oblate spheroid. Write each point on a new line, with the key term first, and explain it in your own words when we revise.</a:t>
+              <a:t>We continue with the definitions. On this slide we have Diameter and Oblate spheroid. Write each point on a new line, with the key term first, and explain it in your own words when we revise.</a:t>
             </a:r>
             <a:endParaRPr lang="en-US" dirty="0"/>
           </a:p>
@@ -2658,7 +2665,7 @@
           <a:p>
             <a:r>
               <a:rPr lang="en-US" dirty="0"/>
-              <a:t>Now draw this illustration in your notebook: the shape of the Earth. Give it a title and label it clearly.</a:t>
+              <a:t>Let us copy The Size of the Earth. The main measurements of the Earth are the following. Copy the point on Equatorial circumference on the left, then draw the diagram on the right: the Earth. Give it a title and label it clearly.</a:t>
             </a:r>
             <a:endParaRPr lang="en-US" dirty="0"/>
           </a:p>
@@ -2746,7 +2753,7 @@
           <a:p>
             <a:r>
               <a:rPr lang="en-US" dirty="0"/>
-              <a:t>Let us copy Proofs of the Shape of the Earth. The following observations prove that the Earth is round. On this slide we have The ship at sea and The eclipse of the Moon. Write each point on a new line, with the key term first, and explain it in your own words when we revise. When you finish, we go to the next slide.</a:t>
+              <a:t>We continue with The Size of the Earth. On this slide we have Polar circumference, Equatorial diameter and Polar diameter. Write each point on a new line, with the key term first, and explain it in your own words when we revise. When you finish, we go to the next slide.</a:t>
             </a:r>
             <a:endParaRPr lang="en-US" dirty="0"/>
           </a:p>
@@ -2834,7 +2841,7 @@
           <a:p>
             <a:r>
               <a:rPr lang="en-US" dirty="0"/>
-              <a:t>We continue with Proofs of the Shape of the Earth. On this slide we have Photos from space and Travel around the world. Write each point on a new line, with the key term first, and explain it in your own words when we revise.</a:t>
+              <a:t>We continue with The Size of the Earth. On this slide we have Surface area. Write each point on a new line, with the key term first, and explain it in your own words when we revise.</a:t>
             </a:r>
             <a:endParaRPr lang="en-US" dirty="0"/>
           </a:p>
@@ -2922,7 +2929,7 @@
           <a:p>
             <a:r>
               <a:rPr lang="en-US" dirty="0"/>
-              <a:t>Now let us check what you have understood. Question 1: What is the shape of the Earth? Answer in your exercise book.</a:t>
+              <a:t>Let us copy The Shape of the Earth. The shape of the Earth is described as follows. Copy the point on Oblate spheroid on the left, then draw the diagram on the right: the shape of the Earth. Give it a title and label it clearly.</a:t>
             </a:r>
             <a:endParaRPr lang="en-US" dirty="0"/>
           </a:p>
@@ -3010,7 +3017,7 @@
           <a:p>
             <a:r>
               <a:rPr lang="en-US" dirty="0"/>
-              <a:t>The expected answer is: it is an oblate spheroid. If you got it right, well done.</a:t>
+              <a:t>We continue with The Shape of the Earth. On this slide we have Evidence from the measurements. Write each point on a new line, with the key term first, and explain it in your own words when we revise.</a:t>
             </a:r>
             <a:endParaRPr lang="en-US" dirty="0"/>
           </a:p>
@@ -3098,7 +3105,7 @@
           <a:p>
             <a:r>
               <a:rPr lang="en-US" dirty="0"/>
-              <a:t>Now let us check what you have understood. Question 2: Give two proofs that the Earth is round. Answer in your exercise book.</a:t>
+              <a:t>Let us copy Proofs that the Earth Is Spherical. The following observations prove that the Earth is round. Copy the point on The ship at sea on the left, then draw the diagram on the right: the ship at sea. Give it a title and label it clearly.</a:t>
             </a:r>
             <a:endParaRPr lang="en-US" dirty="0"/>
           </a:p>
@@ -3186,7 +3193,7 @@
           <a:p>
             <a:r>
               <a:rPr lang="en-US" dirty="0"/>
-              <a:t>The expected answer is: the ship at sea and the round shadow of the Earth on the Moon. If you got it right, well done.</a:t>
+              <a:t>Copy the point on The eclipse of the Moon on the left, then draw the diagram on the right: an eclipse of the Moon. Give it a title and label it clearly.</a:t>
             </a:r>
             <a:endParaRPr lang="en-US" dirty="0"/>
           </a:p>
@@ -3274,7 +3281,7 @@
           <a:p>
             <a:r>
               <a:rPr lang="en-US" dirty="0"/>
-              <a:t>For those who need more practice, fill in the blanks in your exercise book. The answers are: number 1, poles; number 2, Equator; number 3, round.</a:t>
+              <a:t>Copy the point on Photos from space on the left, then draw the diagram on the right: the Earth seen from space. Give it a title and label it clearly.</a:t>
             </a:r>
             <a:endParaRPr lang="en-US" dirty="0"/>
           </a:p>
@@ -3362,7 +3369,7 @@
           <a:p>
             <a:r>
               <a:rPr lang="en-US" dirty="0"/>
-              <a:t>For your homework: Look at the Moon on three different evenings this week. Draw its shape each time and write the date under each drawing. We shall correct it at the beginning of our next lesson.</a:t>
+              <a:t>We continue with Proofs that the Earth Is Spherical. On this slide we have Travel around the world and The circular horizon. Write each point on a new line, with the key term first, and explain it in your own words when we revise. When you finish, we go to the next slide.</a:t>
             </a:r>
             <a:endParaRPr lang="en-US" dirty="0"/>
           </a:p>
@@ -3538,7 +3545,7 @@
           <a:p>
             <a:r>
               <a:rPr lang="en-US" dirty="0"/>
-              <a:t>Our next lesson will be on Further Study 1: The Universe and the Moon. Thank you for your attention, and see you next time.</a:t>
+              <a:t>We continue with Proofs that the Earth Is Spherical. On this slide we have Sunrise at different times. Write each point on a new line, with the key term first, and explain it in your own words when we revise.</a:t>
             </a:r>
             <a:endParaRPr lang="en-US" dirty="0"/>
           </a:p>
@@ -3626,7 +3633,7 @@
           <a:p>
             <a:r>
               <a:rPr lang="en-US" dirty="0"/>
-              <a:t>Let us play the bilingual game. I say a word in English, and you give me the French word. Then we do the reverse.</a:t>
+              <a:t>Now let us check what you have understood. Question 1: What is the shape of the Earth? Answer in your exercise book.</a:t>
             </a:r>
             <a:endParaRPr lang="en-US" dirty="0"/>
           </a:p>
@@ -3714,7 +3721,7 @@
           <a:p>
             <a:r>
               <a:rPr lang="en-US" dirty="0"/>
-              <a:t>I record this information in the official logbook of the class after the lesson.</a:t>
+              <a:t>The expected answer is: it is an oblate spheroid. If you got it right, well done.</a:t>
             </a:r>
             <a:endParaRPr lang="en-US" dirty="0"/>
           </a:p>
@@ -3802,7 +3809,7 @@
           <a:p>
             <a:r>
               <a:rPr lang="en-US" dirty="0"/>
-              <a:t>I complete the second page of the logbook: the matter taught, the evaluation, the homework and the attendance.</a:t>
+              <a:t>Now let us check what you have understood. Question 2: Give two proofs that the Earth is round. Answer in your exercise book.</a:t>
             </a:r>
             <a:endParaRPr lang="en-US" dirty="0"/>
           </a:p>
@@ -3890,7 +3897,7 @@
           <a:p>
             <a:r>
               <a:rPr lang="en-US" dirty="0"/>
-              <a:t>This slide is for me, the teacher: it gives the timing of the lesson and what to do if the projector is not available.</a:t>
+              <a:t>The expected answer is: the ship at sea and the round shadow of the Earth on the Moon. If you got it right, well done.</a:t>
             </a:r>
             <a:endParaRPr lang="en-US" dirty="0"/>
           </a:p>
@@ -3978,7 +3985,7 @@
           <a:p>
             <a:r>
               <a:rPr lang="en-US" dirty="0"/>
-              <a:t>These are the references and picture credits used to prepare this lesson.</a:t>
+              <a:t>For those who need more practice, fill in the blanks in your exercise book. The answers are: number 1, poles; number 2, Equator; number 3, round.</a:t>
             </a:r>
             <a:endParaRPr lang="en-US" dirty="0"/>
           </a:p>
@@ -4002,6 +4009,358 @@
             <a:fld id="{F7021451-1387-4CA6-816F-3879F97B5CBC}" type="slidenum">
               <a:rPr lang="en-US"/>
               <a:t>45</a:t>
+            </a:fld>
+            <a:endParaRPr lang="en-US"/>
+          </a:p>
+        </p:txBody>
+      </p:sp>
+    </p:spTree>
+    <p:extLst>
+      <p:ext uri="{BB962C8B-B14F-4D97-AF65-F5344CB8AC3E}">
+        <p14:creationId xmlns:p14="http://schemas.microsoft.com/office/powerpoint/2010/main" val="1024086991"/>
+      </p:ext>
+    </p:extLst>
+  </p:cSld>
+  <p:clrMapOvr>
+    <a:masterClrMapping/>
+  </p:clrMapOvr>
+</p:notes>
+</file>
+
+<file path=ppt/notesSlides/notesSlide46.xml><?xml version="1.0" encoding="utf-8"?>
+<p:notes xmlns:a="http://schemas.openxmlformats.org/drawingml/2006/main" xmlns:r="http://schemas.openxmlformats.org/officeDocument/2006/relationships" xmlns:p="http://schemas.openxmlformats.org/presentationml/2006/main">
+  <p:cSld>
+    <p:spTree>
+      <p:nvGrpSpPr>
+        <p:cNvPr id="1" name=""/>
+        <p:cNvGrpSpPr/>
+        <p:nvPr/>
+      </p:nvGrpSpPr>
+      <p:grpSpPr>
+        <a:xfrm>
+          <a:off x="0" y="0"/>
+          <a:ext cx="0" cy="0"/>
+          <a:chOff x="0" y="0"/>
+          <a:chExt cx="0" cy="0"/>
+        </a:xfrm>
+      </p:grpSpPr>
+      <p:sp>
+        <p:nvSpPr>
+          <p:cNvPr id="2" name="Slide Image Placeholder 1"/>
+          <p:cNvSpPr>
+            <a:spLocks noGrp="1" noRot="1" noChangeAspect="1"/>
+          </p:cNvSpPr>
+          <p:nvPr>
+            <p:ph type="sldImg"/>
+          </p:nvPr>
+        </p:nvSpPr>
+        <p:spPr/>
+      </p:sp>
+      <p:sp>
+        <p:nvSpPr>
+          <p:cNvPr id="3" name="Notes Placeholder 2"/>
+          <p:cNvSpPr>
+            <a:spLocks noGrp="1"/>
+          </p:cNvSpPr>
+          <p:nvPr>
+            <p:ph type="body" idx="1"/>
+          </p:nvPr>
+        </p:nvSpPr>
+        <p:spPr/>
+        <p:txBody>
+          <a:bodyPr/>
+          <a:lstStyle/>
+          <a:p>
+            <a:r>
+              <a:rPr lang="en-US" dirty="0"/>
+              <a:t>For your homework: Look at the Moon on three different evenings this week. Draw its shape each time and write the date under each drawing. We shall correct it at the beginning of our next lesson.</a:t>
+            </a:r>
+            <a:endParaRPr lang="en-US" dirty="0"/>
+          </a:p>
+        </p:txBody>
+      </p:sp>
+      <p:sp>
+        <p:nvSpPr>
+          <p:cNvPr id="4" name="Slide Number Placeholder 3"/>
+          <p:cNvSpPr>
+            <a:spLocks noGrp="1"/>
+          </p:cNvSpPr>
+          <p:nvPr>
+            <p:ph type="sldNum" sz="quarter" idx="10"/>
+          </p:nvPr>
+        </p:nvSpPr>
+        <p:spPr/>
+        <p:txBody>
+          <a:bodyPr/>
+          <a:lstStyle/>
+          <a:p>
+            <a:fld id="{F7021451-1387-4CA6-816F-3879F97B5CBC}" type="slidenum">
+              <a:rPr lang="en-US"/>
+              <a:t>46</a:t>
+            </a:fld>
+            <a:endParaRPr lang="en-US"/>
+          </a:p>
+        </p:txBody>
+      </p:sp>
+    </p:spTree>
+    <p:extLst>
+      <p:ext uri="{BB962C8B-B14F-4D97-AF65-F5344CB8AC3E}">
+        <p14:creationId xmlns:p14="http://schemas.microsoft.com/office/powerpoint/2010/main" val="1024086991"/>
+      </p:ext>
+    </p:extLst>
+  </p:cSld>
+  <p:clrMapOvr>
+    <a:masterClrMapping/>
+  </p:clrMapOvr>
+</p:notes>
+</file>
+
+<file path=ppt/notesSlides/notesSlide47.xml><?xml version="1.0" encoding="utf-8"?>
+<p:notes xmlns:a="http://schemas.openxmlformats.org/drawingml/2006/main" xmlns:r="http://schemas.openxmlformats.org/officeDocument/2006/relationships" xmlns:p="http://schemas.openxmlformats.org/presentationml/2006/main">
+  <p:cSld>
+    <p:spTree>
+      <p:nvGrpSpPr>
+        <p:cNvPr id="1" name=""/>
+        <p:cNvGrpSpPr/>
+        <p:nvPr/>
+      </p:nvGrpSpPr>
+      <p:grpSpPr>
+        <a:xfrm>
+          <a:off x="0" y="0"/>
+          <a:ext cx="0" cy="0"/>
+          <a:chOff x="0" y="0"/>
+          <a:chExt cx="0" cy="0"/>
+        </a:xfrm>
+      </p:grpSpPr>
+      <p:sp>
+        <p:nvSpPr>
+          <p:cNvPr id="2" name="Slide Image Placeholder 1"/>
+          <p:cNvSpPr>
+            <a:spLocks noGrp="1" noRot="1" noChangeAspect="1"/>
+          </p:cNvSpPr>
+          <p:nvPr>
+            <p:ph type="sldImg"/>
+          </p:nvPr>
+        </p:nvSpPr>
+        <p:spPr/>
+      </p:sp>
+      <p:sp>
+        <p:nvSpPr>
+          <p:cNvPr id="3" name="Notes Placeholder 2"/>
+          <p:cNvSpPr>
+            <a:spLocks noGrp="1"/>
+          </p:cNvSpPr>
+          <p:nvPr>
+            <p:ph type="body" idx="1"/>
+          </p:nvPr>
+        </p:nvSpPr>
+        <p:spPr/>
+        <p:txBody>
+          <a:bodyPr/>
+          <a:lstStyle/>
+          <a:p>
+            <a:r>
+              <a:rPr lang="en-US" dirty="0"/>
+              <a:t>Our next lesson will be on Further Study 1: The Universe and the Moon. Thank you for your attention, and see you next time.</a:t>
+            </a:r>
+            <a:endParaRPr lang="en-US" dirty="0"/>
+          </a:p>
+        </p:txBody>
+      </p:sp>
+      <p:sp>
+        <p:nvSpPr>
+          <p:cNvPr id="4" name="Slide Number Placeholder 3"/>
+          <p:cNvSpPr>
+            <a:spLocks noGrp="1"/>
+          </p:cNvSpPr>
+          <p:nvPr>
+            <p:ph type="sldNum" sz="quarter" idx="10"/>
+          </p:nvPr>
+        </p:nvSpPr>
+        <p:spPr/>
+        <p:txBody>
+          <a:bodyPr/>
+          <a:lstStyle/>
+          <a:p>
+            <a:fld id="{F7021451-1387-4CA6-816F-3879F97B5CBC}" type="slidenum">
+              <a:rPr lang="en-US"/>
+              <a:t>47</a:t>
+            </a:fld>
+            <a:endParaRPr lang="en-US"/>
+          </a:p>
+        </p:txBody>
+      </p:sp>
+    </p:spTree>
+    <p:extLst>
+      <p:ext uri="{BB962C8B-B14F-4D97-AF65-F5344CB8AC3E}">
+        <p14:creationId xmlns:p14="http://schemas.microsoft.com/office/powerpoint/2010/main" val="1024086991"/>
+      </p:ext>
+    </p:extLst>
+  </p:cSld>
+  <p:clrMapOvr>
+    <a:masterClrMapping/>
+  </p:clrMapOvr>
+</p:notes>
+</file>
+
+<file path=ppt/notesSlides/notesSlide48.xml><?xml version="1.0" encoding="utf-8"?>
+<p:notes xmlns:a="http://schemas.openxmlformats.org/drawingml/2006/main" xmlns:r="http://schemas.openxmlformats.org/officeDocument/2006/relationships" xmlns:p="http://schemas.openxmlformats.org/presentationml/2006/main">
+  <p:cSld>
+    <p:spTree>
+      <p:nvGrpSpPr>
+        <p:cNvPr id="1" name=""/>
+        <p:cNvGrpSpPr/>
+        <p:nvPr/>
+      </p:nvGrpSpPr>
+      <p:grpSpPr>
+        <a:xfrm>
+          <a:off x="0" y="0"/>
+          <a:ext cx="0" cy="0"/>
+          <a:chOff x="0" y="0"/>
+          <a:chExt cx="0" cy="0"/>
+        </a:xfrm>
+      </p:grpSpPr>
+      <p:sp>
+        <p:nvSpPr>
+          <p:cNvPr id="2" name="Slide Image Placeholder 1"/>
+          <p:cNvSpPr>
+            <a:spLocks noGrp="1" noRot="1" noChangeAspect="1"/>
+          </p:cNvSpPr>
+          <p:nvPr>
+            <p:ph type="sldImg"/>
+          </p:nvPr>
+        </p:nvSpPr>
+        <p:spPr/>
+      </p:sp>
+      <p:sp>
+        <p:nvSpPr>
+          <p:cNvPr id="3" name="Notes Placeholder 2"/>
+          <p:cNvSpPr>
+            <a:spLocks noGrp="1"/>
+          </p:cNvSpPr>
+          <p:nvPr>
+            <p:ph type="body" idx="1"/>
+          </p:nvPr>
+        </p:nvSpPr>
+        <p:spPr/>
+        <p:txBody>
+          <a:bodyPr/>
+          <a:lstStyle/>
+          <a:p>
+            <a:r>
+              <a:rPr lang="en-US" dirty="0"/>
+              <a:t>Let us play the bilingual game. I say a word in English, and you give me the French word. Then we do the reverse.</a:t>
+            </a:r>
+            <a:endParaRPr lang="en-US" dirty="0"/>
+          </a:p>
+        </p:txBody>
+      </p:sp>
+      <p:sp>
+        <p:nvSpPr>
+          <p:cNvPr id="4" name="Slide Number Placeholder 3"/>
+          <p:cNvSpPr>
+            <a:spLocks noGrp="1"/>
+          </p:cNvSpPr>
+          <p:nvPr>
+            <p:ph type="sldNum" sz="quarter" idx="10"/>
+          </p:nvPr>
+        </p:nvSpPr>
+        <p:spPr/>
+        <p:txBody>
+          <a:bodyPr/>
+          <a:lstStyle/>
+          <a:p>
+            <a:fld id="{F7021451-1387-4CA6-816F-3879F97B5CBC}" type="slidenum">
+              <a:rPr lang="en-US"/>
+              <a:t>48</a:t>
+            </a:fld>
+            <a:endParaRPr lang="en-US"/>
+          </a:p>
+        </p:txBody>
+      </p:sp>
+    </p:spTree>
+    <p:extLst>
+      <p:ext uri="{BB962C8B-B14F-4D97-AF65-F5344CB8AC3E}">
+        <p14:creationId xmlns:p14="http://schemas.microsoft.com/office/powerpoint/2010/main" val="1024086991"/>
+      </p:ext>
+    </p:extLst>
+  </p:cSld>
+  <p:clrMapOvr>
+    <a:masterClrMapping/>
+  </p:clrMapOvr>
+</p:notes>
+</file>
+
+<file path=ppt/notesSlides/notesSlide49.xml><?xml version="1.0" encoding="utf-8"?>
+<p:notes xmlns:a="http://schemas.openxmlformats.org/drawingml/2006/main" xmlns:r="http://schemas.openxmlformats.org/officeDocument/2006/relationships" xmlns:p="http://schemas.openxmlformats.org/presentationml/2006/main">
+  <p:cSld>
+    <p:spTree>
+      <p:nvGrpSpPr>
+        <p:cNvPr id="1" name=""/>
+        <p:cNvGrpSpPr/>
+        <p:nvPr/>
+      </p:nvGrpSpPr>
+      <p:grpSpPr>
+        <a:xfrm>
+          <a:off x="0" y="0"/>
+          <a:ext cx="0" cy="0"/>
+          <a:chOff x="0" y="0"/>
+          <a:chExt cx="0" cy="0"/>
+        </a:xfrm>
+      </p:grpSpPr>
+      <p:sp>
+        <p:nvSpPr>
+          <p:cNvPr id="2" name="Slide Image Placeholder 1"/>
+          <p:cNvSpPr>
+            <a:spLocks noGrp="1" noRot="1" noChangeAspect="1"/>
+          </p:cNvSpPr>
+          <p:nvPr>
+            <p:ph type="sldImg"/>
+          </p:nvPr>
+        </p:nvSpPr>
+        <p:spPr/>
+      </p:sp>
+      <p:sp>
+        <p:nvSpPr>
+          <p:cNvPr id="3" name="Notes Placeholder 2"/>
+          <p:cNvSpPr>
+            <a:spLocks noGrp="1"/>
+          </p:cNvSpPr>
+          <p:nvPr>
+            <p:ph type="body" idx="1"/>
+          </p:nvPr>
+        </p:nvSpPr>
+        <p:spPr/>
+        <p:txBody>
+          <a:bodyPr/>
+          <a:lstStyle/>
+          <a:p>
+            <a:r>
+              <a:rPr lang="en-US" dirty="0"/>
+              <a:t>I record this information in the official logbook of the class after the lesson.</a:t>
+            </a:r>
+            <a:endParaRPr lang="en-US" dirty="0"/>
+          </a:p>
+        </p:txBody>
+      </p:sp>
+      <p:sp>
+        <p:nvSpPr>
+          <p:cNvPr id="4" name="Slide Number Placeholder 3"/>
+          <p:cNvSpPr>
+            <a:spLocks noGrp="1"/>
+          </p:cNvSpPr>
+          <p:nvPr>
+            <p:ph type="sldNum" sz="quarter" idx="10"/>
+          </p:nvPr>
+        </p:nvSpPr>
+        <p:spPr/>
+        <p:txBody>
+          <a:bodyPr/>
+          <a:lstStyle/>
+          <a:p>
+            <a:fld id="{F7021451-1387-4CA6-816F-3879F97B5CBC}" type="slidenum">
+              <a:rPr lang="en-US"/>
+              <a:t>49</a:t>
             </a:fld>
             <a:endParaRPr lang="en-US"/>
           </a:p>
@@ -4108,6 +4467,270 @@
 </p:notes>
 </file>
 
+<file path=ppt/notesSlides/notesSlide50.xml><?xml version="1.0" encoding="utf-8"?>
+<p:notes xmlns:a="http://schemas.openxmlformats.org/drawingml/2006/main" xmlns:r="http://schemas.openxmlformats.org/officeDocument/2006/relationships" xmlns:p="http://schemas.openxmlformats.org/presentationml/2006/main">
+  <p:cSld>
+    <p:spTree>
+      <p:nvGrpSpPr>
+        <p:cNvPr id="1" name=""/>
+        <p:cNvGrpSpPr/>
+        <p:nvPr/>
+      </p:nvGrpSpPr>
+      <p:grpSpPr>
+        <a:xfrm>
+          <a:off x="0" y="0"/>
+          <a:ext cx="0" cy="0"/>
+          <a:chOff x="0" y="0"/>
+          <a:chExt cx="0" cy="0"/>
+        </a:xfrm>
+      </p:grpSpPr>
+      <p:sp>
+        <p:nvSpPr>
+          <p:cNvPr id="2" name="Slide Image Placeholder 1"/>
+          <p:cNvSpPr>
+            <a:spLocks noGrp="1" noRot="1" noChangeAspect="1"/>
+          </p:cNvSpPr>
+          <p:nvPr>
+            <p:ph type="sldImg"/>
+          </p:nvPr>
+        </p:nvSpPr>
+        <p:spPr/>
+      </p:sp>
+      <p:sp>
+        <p:nvSpPr>
+          <p:cNvPr id="3" name="Notes Placeholder 2"/>
+          <p:cNvSpPr>
+            <a:spLocks noGrp="1"/>
+          </p:cNvSpPr>
+          <p:nvPr>
+            <p:ph type="body" idx="1"/>
+          </p:nvPr>
+        </p:nvSpPr>
+        <p:spPr/>
+        <p:txBody>
+          <a:bodyPr/>
+          <a:lstStyle/>
+          <a:p>
+            <a:r>
+              <a:rPr lang="en-US" dirty="0"/>
+              <a:t>I complete the second page of the logbook: the matter taught, the evaluation, the homework and the attendance.</a:t>
+            </a:r>
+            <a:endParaRPr lang="en-US" dirty="0"/>
+          </a:p>
+        </p:txBody>
+      </p:sp>
+      <p:sp>
+        <p:nvSpPr>
+          <p:cNvPr id="4" name="Slide Number Placeholder 3"/>
+          <p:cNvSpPr>
+            <a:spLocks noGrp="1"/>
+          </p:cNvSpPr>
+          <p:nvPr>
+            <p:ph type="sldNum" sz="quarter" idx="10"/>
+          </p:nvPr>
+        </p:nvSpPr>
+        <p:spPr/>
+        <p:txBody>
+          <a:bodyPr/>
+          <a:lstStyle/>
+          <a:p>
+            <a:fld id="{F7021451-1387-4CA6-816F-3879F97B5CBC}" type="slidenum">
+              <a:rPr lang="en-US"/>
+              <a:t>50</a:t>
+            </a:fld>
+            <a:endParaRPr lang="en-US"/>
+          </a:p>
+        </p:txBody>
+      </p:sp>
+    </p:spTree>
+    <p:extLst>
+      <p:ext uri="{BB962C8B-B14F-4D97-AF65-F5344CB8AC3E}">
+        <p14:creationId xmlns:p14="http://schemas.microsoft.com/office/powerpoint/2010/main" val="1024086991"/>
+      </p:ext>
+    </p:extLst>
+  </p:cSld>
+  <p:clrMapOvr>
+    <a:masterClrMapping/>
+  </p:clrMapOvr>
+</p:notes>
+</file>
+
+<file path=ppt/notesSlides/notesSlide51.xml><?xml version="1.0" encoding="utf-8"?>
+<p:notes xmlns:a="http://schemas.openxmlformats.org/drawingml/2006/main" xmlns:r="http://schemas.openxmlformats.org/officeDocument/2006/relationships" xmlns:p="http://schemas.openxmlformats.org/presentationml/2006/main">
+  <p:cSld>
+    <p:spTree>
+      <p:nvGrpSpPr>
+        <p:cNvPr id="1" name=""/>
+        <p:cNvGrpSpPr/>
+        <p:nvPr/>
+      </p:nvGrpSpPr>
+      <p:grpSpPr>
+        <a:xfrm>
+          <a:off x="0" y="0"/>
+          <a:ext cx="0" cy="0"/>
+          <a:chOff x="0" y="0"/>
+          <a:chExt cx="0" cy="0"/>
+        </a:xfrm>
+      </p:grpSpPr>
+      <p:sp>
+        <p:nvSpPr>
+          <p:cNvPr id="2" name="Slide Image Placeholder 1"/>
+          <p:cNvSpPr>
+            <a:spLocks noGrp="1" noRot="1" noChangeAspect="1"/>
+          </p:cNvSpPr>
+          <p:nvPr>
+            <p:ph type="sldImg"/>
+          </p:nvPr>
+        </p:nvSpPr>
+        <p:spPr/>
+      </p:sp>
+      <p:sp>
+        <p:nvSpPr>
+          <p:cNvPr id="3" name="Notes Placeholder 2"/>
+          <p:cNvSpPr>
+            <a:spLocks noGrp="1"/>
+          </p:cNvSpPr>
+          <p:nvPr>
+            <p:ph type="body" idx="1"/>
+          </p:nvPr>
+        </p:nvSpPr>
+        <p:spPr/>
+        <p:txBody>
+          <a:bodyPr/>
+          <a:lstStyle/>
+          <a:p>
+            <a:r>
+              <a:rPr lang="en-US" dirty="0"/>
+              <a:t>This slide is for me, the teacher: it gives the timing of the lesson and what to do if the projector is not available.</a:t>
+            </a:r>
+            <a:endParaRPr lang="en-US" dirty="0"/>
+          </a:p>
+        </p:txBody>
+      </p:sp>
+      <p:sp>
+        <p:nvSpPr>
+          <p:cNvPr id="4" name="Slide Number Placeholder 3"/>
+          <p:cNvSpPr>
+            <a:spLocks noGrp="1"/>
+          </p:cNvSpPr>
+          <p:nvPr>
+            <p:ph type="sldNum" sz="quarter" idx="10"/>
+          </p:nvPr>
+        </p:nvSpPr>
+        <p:spPr/>
+        <p:txBody>
+          <a:bodyPr/>
+          <a:lstStyle/>
+          <a:p>
+            <a:fld id="{F7021451-1387-4CA6-816F-3879F97B5CBC}" type="slidenum">
+              <a:rPr lang="en-US"/>
+              <a:t>51</a:t>
+            </a:fld>
+            <a:endParaRPr lang="en-US"/>
+          </a:p>
+        </p:txBody>
+      </p:sp>
+    </p:spTree>
+    <p:extLst>
+      <p:ext uri="{BB962C8B-B14F-4D97-AF65-F5344CB8AC3E}">
+        <p14:creationId xmlns:p14="http://schemas.microsoft.com/office/powerpoint/2010/main" val="1024086991"/>
+      </p:ext>
+    </p:extLst>
+  </p:cSld>
+  <p:clrMapOvr>
+    <a:masterClrMapping/>
+  </p:clrMapOvr>
+</p:notes>
+</file>
+
+<file path=ppt/notesSlides/notesSlide52.xml><?xml version="1.0" encoding="utf-8"?>
+<p:notes xmlns:a="http://schemas.openxmlformats.org/drawingml/2006/main" xmlns:r="http://schemas.openxmlformats.org/officeDocument/2006/relationships" xmlns:p="http://schemas.openxmlformats.org/presentationml/2006/main">
+  <p:cSld>
+    <p:spTree>
+      <p:nvGrpSpPr>
+        <p:cNvPr id="1" name=""/>
+        <p:cNvGrpSpPr/>
+        <p:nvPr/>
+      </p:nvGrpSpPr>
+      <p:grpSpPr>
+        <a:xfrm>
+          <a:off x="0" y="0"/>
+          <a:ext cx="0" cy="0"/>
+          <a:chOff x="0" y="0"/>
+          <a:chExt cx="0" cy="0"/>
+        </a:xfrm>
+      </p:grpSpPr>
+      <p:sp>
+        <p:nvSpPr>
+          <p:cNvPr id="2" name="Slide Image Placeholder 1"/>
+          <p:cNvSpPr>
+            <a:spLocks noGrp="1" noRot="1" noChangeAspect="1"/>
+          </p:cNvSpPr>
+          <p:nvPr>
+            <p:ph type="sldImg"/>
+          </p:nvPr>
+        </p:nvSpPr>
+        <p:spPr/>
+      </p:sp>
+      <p:sp>
+        <p:nvSpPr>
+          <p:cNvPr id="3" name="Notes Placeholder 2"/>
+          <p:cNvSpPr>
+            <a:spLocks noGrp="1"/>
+          </p:cNvSpPr>
+          <p:nvPr>
+            <p:ph type="body" idx="1"/>
+          </p:nvPr>
+        </p:nvSpPr>
+        <p:spPr/>
+        <p:txBody>
+          <a:bodyPr/>
+          <a:lstStyle/>
+          <a:p>
+            <a:r>
+              <a:rPr lang="en-US" dirty="0"/>
+              <a:t>These are the references and picture credits used to prepare this lesson.</a:t>
+            </a:r>
+            <a:endParaRPr lang="en-US" dirty="0"/>
+          </a:p>
+        </p:txBody>
+      </p:sp>
+      <p:sp>
+        <p:nvSpPr>
+          <p:cNvPr id="4" name="Slide Number Placeholder 3"/>
+          <p:cNvSpPr>
+            <a:spLocks noGrp="1"/>
+          </p:cNvSpPr>
+          <p:nvPr>
+            <p:ph type="sldNum" sz="quarter" idx="10"/>
+          </p:nvPr>
+        </p:nvSpPr>
+        <p:spPr/>
+        <p:txBody>
+          <a:bodyPr/>
+          <a:lstStyle/>
+          <a:p>
+            <a:fld id="{F7021451-1387-4CA6-816F-3879F97B5CBC}" type="slidenum">
+              <a:rPr lang="en-US"/>
+              <a:t>52</a:t>
+            </a:fld>
+            <a:endParaRPr lang="en-US"/>
+          </a:p>
+        </p:txBody>
+      </p:sp>
+    </p:spTree>
+    <p:extLst>
+      <p:ext uri="{BB962C8B-B14F-4D97-AF65-F5344CB8AC3E}">
+        <p14:creationId xmlns:p14="http://schemas.microsoft.com/office/powerpoint/2010/main" val="1024086991"/>
+      </p:ext>
+    </p:extLst>
+  </p:cSld>
+  <p:clrMapOvr>
+    <a:masterClrMapping/>
+  </p:clrMapOvr>
+</p:notes>
+</file>
+
 <file path=ppt/notesSlides/notesSlide6.xml><?xml version="1.0" encoding="utf-8"?>
 <p:notes xmlns:a="http://schemas.openxmlformats.org/drawingml/2006/main" xmlns:r="http://schemas.openxmlformats.org/officeDocument/2006/relationships" xmlns:p="http://schemas.openxmlformats.org/presentationml/2006/main">
   <p:cSld>
@@ -4330,7 +4953,7 @@
           <a:p>
             <a:r>
               <a:rPr lang="en-US" dirty="0"/>
-              <a:t>Listen carefully to this situation from real life. On a long, straight road, Aïcha sees a lorry coming from far away. First, she sees only the top of the lorry. Then she sees the whole lorry. Her brother says, "The Earth is flat." Think about it, because I am going to ask you some questions.</a:t>
+              <a:t>Listen carefully to this situation from real life. On a long, straight road, Aïcha sees a lorry coming from far away: first she sees only its top, then the whole lorry. Her brother says that the Earth is flat. Aïcha asks: "If the Earth is flat, why did I see the top of the lorry first?" Think about it, because I am going to ask you some questions.</a:t>
             </a:r>
             <a:endParaRPr lang="en-US" dirty="0"/>
           </a:p>
@@ -5882,7 +6505,7 @@
                 <a:ea typeface="Times New Roman" pitchFamily="34" charset="-122"/>
                 <a:cs typeface="Times New Roman" pitchFamily="34" charset="-120"/>
               </a:rPr>
-              <a:t>Aïcha cannot explain why she saw the top of the lorry first.</a:t>
+              <a:t>Aïcha cannot explain why she saw the top of the lorry first, and her brother thinks that the Earth is flat.</a:t>
             </a:r>
             <a:endParaRPr lang="en-US" sz="4000" dirty="0"/>
           </a:p>
@@ -6539,7 +7162,7 @@
                 <a:ea typeface="Times New Roman" pitchFamily="34" charset="-122"/>
                 <a:cs typeface="Times New Roman" pitchFamily="34" charset="-120"/>
               </a:rPr>
-              <a:t>How can she show her brother that the Earth is round?</a:t>
+              <a:t>What does this show about the shape of the Earth?</a:t>
             </a:r>
             <a:endParaRPr lang="en-US" sz="4000" dirty="0"/>
           </a:p>
@@ -6758,7 +7381,7 @@
                 <a:ea typeface="Times New Roman" pitchFamily="34" charset="-122"/>
                 <a:cs typeface="Times New Roman" pitchFamily="34" charset="-120"/>
               </a:rPr>
-              <a:t>She can show him a globe and photos of the Earth from space.</a:t>
+              <a:t>It shows that the surface of the Earth is curved: the Earth is round.</a:t>
             </a:r>
             <a:endParaRPr lang="en-US" sz="4000" dirty="0"/>
           </a:p>
@@ -7629,7 +8252,7 @@
                 <a:ea typeface="Times New Roman" pitchFamily="34" charset="-122"/>
                 <a:cs typeface="Times New Roman" pitchFamily="34" charset="-120"/>
               </a:rPr>
-              <a:t>Look at the photo. What is the shape of the Earth?</a:t>
+              <a:t>What is the shape of the Earth on this photo?</a:t>
             </a:r>
             <a:endParaRPr lang="en-US" sz="4000" dirty="0"/>
           </a:p>
@@ -7848,7 +8471,7 @@
                 <a:ea typeface="Times New Roman" pitchFamily="34" charset="-122"/>
                 <a:cs typeface="Times New Roman" pitchFamily="34" charset="-120"/>
               </a:rPr>
-              <a:t>The Earth is round, like a ball.</a:t>
+              <a:t>It is round, like a ball.</a:t>
             </a:r>
             <a:endParaRPr lang="en-US" sz="4000" dirty="0"/>
           </a:p>
@@ -8834,7 +9457,7 @@
                 <a:ea typeface="Times New Roman" pitchFamily="34" charset="-122"/>
                 <a:cs typeface="Times New Roman" pitchFamily="34" charset="-120"/>
               </a:rPr>
-              <a:t>Activity 2: Question</a:t>
+              <a:t>Activity 2: Question 1</a:t>
             </a:r>
             <a:endParaRPr lang="en-US" sz="3600" dirty="0"/>
           </a:p>
@@ -8876,7 +9499,7 @@
                 <a:ea typeface="Times New Roman" pitchFamily="34" charset="-122"/>
                 <a:cs typeface="Times New Roman" pitchFamily="34" charset="-120"/>
               </a:rPr>
-              <a:t>Which part of the ship disappears first? Why?</a:t>
+              <a:t>Which part of the ship disappears first?</a:t>
             </a:r>
             <a:endParaRPr lang="en-US" sz="4000" dirty="0"/>
           </a:p>
@@ -9053,7 +9676,7 @@
                 <a:ea typeface="Times New Roman" pitchFamily="34" charset="-122"/>
                 <a:cs typeface="Times New Roman" pitchFamily="34" charset="-120"/>
               </a:rPr>
-              <a:t>Activity 2: Answer</a:t>
+              <a:t>Activity 2: Answer 1</a:t>
             </a:r>
             <a:endParaRPr lang="en-US" sz="3600" dirty="0"/>
           </a:p>
@@ -9095,7 +9718,7 @@
                 <a:ea typeface="Times New Roman" pitchFamily="34" charset="-122"/>
                 <a:cs typeface="Times New Roman" pitchFamily="34" charset="-120"/>
               </a:rPr>
-              <a:t>The bottom of the ship disappears first, because the ship goes over the curve of the Earth.</a:t>
+              <a:t>The bottom of the ship.</a:t>
             </a:r>
             <a:endParaRPr lang="en-US" sz="4000" dirty="0"/>
           </a:p>
@@ -9213,48 +9836,9 @@
           </a:p>
         </p:txBody>
       </p:sp>
-      <p:sp>
-        <p:nvSpPr>
-          <p:cNvPr id="3" name="Text 1"/>
-          <p:cNvSpPr/>
-          <p:nvPr/>
-        </p:nvSpPr>
-        <p:spPr>
-          <a:xfrm>
-            <a:off x="457200" y="1005840"/>
-            <a:ext cx="11277295" cy="731520"/>
-          </a:xfrm>
-          <a:prstGeom prst="rect">
-            <a:avLst/>
-          </a:prstGeom>
-          <a:noFill/>
-          <a:ln/>
-        </p:spPr>
-        <p:txBody>
-          <a:bodyPr wrap="square" lIns="0" tIns="0" rIns="0" bIns="0" rtlCol="0" anchor="ctr"/>
-          <a:lstStyle/>
-          <a:p>
-            <a:pPr algn="ctr" indent="0" marL="0">
-              <a:buNone/>
-            </a:pPr>
-            <a:r>
-              <a:rPr lang="en-US" sz="3600" b="1" dirty="0">
-                <a:solidFill>
-                  <a:srgbClr val="990011"/>
-                </a:solidFill>
-                <a:latin typeface="Times New Roman" pitchFamily="34" charset="0"/>
-                <a:ea typeface="Times New Roman" pitchFamily="34" charset="-122"/>
-                <a:cs typeface="Times New Roman" pitchFamily="34" charset="-120"/>
-              </a:rPr>
-              <a:t>Activity 3</a:t>
-            </a:r>
-            <a:endParaRPr lang="en-US" sz="3600" dirty="0"/>
-          </a:p>
-        </p:txBody>
-      </p:sp>
       <p:pic>
         <p:nvPicPr>
-          <p:cNvPr id="4" name="Image 0" descr="/home/claude/f4/img/v2/f4_lunar_eclipse.jpg">    </p:cNvPr>
+          <p:cNvPr id="3" name="Image 0" descr="/home/claude/f4/img/minesec_sheet.png">    </p:cNvPr>
           <p:cNvPicPr>
             <a:picLocks noChangeAspect="1"/>
           </p:cNvPicPr>
@@ -9268,8 +9852,8 @@
         </p:blipFill>
         <p:spPr>
           <a:xfrm>
-            <a:off x="2246610" y="1783080"/>
-            <a:ext cx="7698475" cy="4270248"/>
+            <a:off x="0" y="658368"/>
+            <a:ext cx="5120640" cy="5833872"/>
           </a:xfrm>
           <a:prstGeom prst="rect">
             <a:avLst/>
@@ -9278,14 +9862,14 @@
       </p:pic>
       <p:sp>
         <p:nvSpPr>
-          <p:cNvPr id="5" name="Text 2"/>
+          <p:cNvPr id="4" name="Text 1"/>
           <p:cNvSpPr/>
           <p:nvPr/>
         </p:nvSpPr>
         <p:spPr>
           <a:xfrm>
-            <a:off x="457200" y="6089904"/>
-            <a:ext cx="11277295" cy="347472"/>
+            <a:off x="5349240" y="1005840"/>
+            <a:ext cx="6522415" cy="731520"/>
           </a:xfrm>
           <a:prstGeom prst="rect">
             <a:avLst/>
@@ -9294,24 +9878,68 @@
           <a:ln/>
         </p:spPr>
         <p:txBody>
-          <a:bodyPr wrap="square" lIns="0" tIns="0" rIns="0" bIns="0" rtlCol="0" anchor="ctr"/>
+          <a:bodyPr wrap="square" lIns="0" tIns="0" rIns="0" bIns="0" rtlCol="0" anchor="ctr">
+            <a:normAutofit/>
+          </a:bodyPr>
           <a:lstStyle/>
           <a:p>
             <a:pPr algn="ctr" indent="0" marL="0">
               <a:buNone/>
             </a:pPr>
             <a:r>
-              <a:rPr lang="en-US" sz="1800" i="1" dirty="0">
-                <a:solidFill>
-                  <a:srgbClr val="555555"/>
+              <a:rPr lang="en-US" sz="3600" b="1" dirty="0">
+                <a:solidFill>
+                  <a:srgbClr val="990011"/>
                 </a:solidFill>
                 <a:latin typeface="Times New Roman" pitchFamily="34" charset="0"/>
                 <a:ea typeface="Times New Roman" pitchFamily="34" charset="-122"/>
                 <a:cs typeface="Times New Roman" pitchFamily="34" charset="-120"/>
               </a:rPr>
-              <a:t>An eclipse of the Moon: the Moon is inside the shadow of the Earth.</a:t>
-            </a:r>
-            <a:endParaRPr lang="en-US" sz="1800" dirty="0"/>
+              <a:t>Activity 2: Question 2</a:t>
+            </a:r>
+            <a:endParaRPr lang="en-US" sz="3600" dirty="0"/>
+          </a:p>
+        </p:txBody>
+      </p:sp>
+      <p:sp>
+        <p:nvSpPr>
+          <p:cNvPr id="5" name="Text 2"/>
+          <p:cNvSpPr/>
+          <p:nvPr/>
+        </p:nvSpPr>
+        <p:spPr>
+          <a:xfrm>
+            <a:off x="5349240" y="1783080"/>
+            <a:ext cx="6522415" cy="4663440"/>
+          </a:xfrm>
+          <a:prstGeom prst="rect">
+            <a:avLst/>
+          </a:prstGeom>
+          <a:noFill/>
+          <a:ln/>
+        </p:spPr>
+        <p:txBody>
+          <a:bodyPr wrap="square" lIns="0" tIns="0" rIns="0" bIns="0" rtlCol="0" anchor="t"/>
+          <a:lstStyle/>
+          <a:p>
+            <a:pPr algn="l" indent="0" marL="0">
+              <a:spcAft>
+                <a:spcPts val="800"/>
+              </a:spcAft>
+              <a:buNone/>
+            </a:pPr>
+            <a:r>
+              <a:rPr lang="en-US" sz="4000" dirty="0">
+                <a:solidFill>
+                  <a:srgbClr val="111111"/>
+                </a:solidFill>
+                <a:latin typeface="Times New Roman" pitchFamily="34" charset="0"/>
+                <a:ea typeface="Times New Roman" pitchFamily="34" charset="-122"/>
+                <a:cs typeface="Times New Roman" pitchFamily="34" charset="-120"/>
+              </a:rPr>
+              <a:t>Why does it disappear first?</a:t>
+            </a:r>
+            <a:endParaRPr lang="en-US" sz="4000" dirty="0"/>
           </a:p>
         </p:txBody>
       </p:sp>
@@ -9486,7 +10114,7 @@
                 <a:ea typeface="Times New Roman" pitchFamily="34" charset="-122"/>
                 <a:cs typeface="Times New Roman" pitchFamily="34" charset="-120"/>
               </a:rPr>
-              <a:t>Activity 3: Question</a:t>
+              <a:t>Activity 2: Answer 2</a:t>
             </a:r>
             <a:endParaRPr lang="en-US" sz="3600" dirty="0"/>
           </a:p>
@@ -9528,7 +10156,7 @@
                 <a:ea typeface="Times New Roman" pitchFamily="34" charset="-122"/>
                 <a:cs typeface="Times New Roman" pitchFamily="34" charset="-120"/>
               </a:rPr>
-              <a:t>During an eclipse, the edge of the shadow of the Earth on the Moon is always curved. What does this prove?</a:t>
+              <a:t>The ship goes down behind the curve of the Earth.</a:t>
             </a:r>
             <a:endParaRPr lang="en-US" sz="4000" dirty="0"/>
           </a:p>
@@ -9646,9 +10274,48 @@
           </a:p>
         </p:txBody>
       </p:sp>
+      <p:sp>
+        <p:nvSpPr>
+          <p:cNvPr id="3" name="Text 1"/>
+          <p:cNvSpPr/>
+          <p:nvPr/>
+        </p:nvSpPr>
+        <p:spPr>
+          <a:xfrm>
+            <a:off x="457200" y="1005840"/>
+            <a:ext cx="11277295" cy="731520"/>
+          </a:xfrm>
+          <a:prstGeom prst="rect">
+            <a:avLst/>
+          </a:prstGeom>
+          <a:noFill/>
+          <a:ln/>
+        </p:spPr>
+        <p:txBody>
+          <a:bodyPr wrap="square" lIns="0" tIns="0" rIns="0" bIns="0" rtlCol="0" anchor="ctr"/>
+          <a:lstStyle/>
+          <a:p>
+            <a:pPr algn="ctr" indent="0" marL="0">
+              <a:buNone/>
+            </a:pPr>
+            <a:r>
+              <a:rPr lang="en-US" sz="3600" b="1" dirty="0">
+                <a:solidFill>
+                  <a:srgbClr val="990011"/>
+                </a:solidFill>
+                <a:latin typeface="Times New Roman" pitchFamily="34" charset="0"/>
+                <a:ea typeface="Times New Roman" pitchFamily="34" charset="-122"/>
+                <a:cs typeface="Times New Roman" pitchFamily="34" charset="-120"/>
+              </a:rPr>
+              <a:t>Activity 3</a:t>
+            </a:r>
+            <a:endParaRPr lang="en-US" sz="3600" dirty="0"/>
+          </a:p>
+        </p:txBody>
+      </p:sp>
       <p:pic>
         <p:nvPicPr>
-          <p:cNvPr id="3" name="Image 0" descr="/home/claude/f4/img/minesec_sheet.png">    </p:cNvPr>
+          <p:cNvPr id="4" name="Image 0" descr="/home/claude/f4/img/v2/f4_lunar_eclipse.jpg">    </p:cNvPr>
           <p:cNvPicPr>
             <a:picLocks noChangeAspect="1"/>
           </p:cNvPicPr>
@@ -9662,8 +10329,8 @@
         </p:blipFill>
         <p:spPr>
           <a:xfrm>
-            <a:off x="0" y="658368"/>
-            <a:ext cx="5120640" cy="5833872"/>
+            <a:off x="2246610" y="1783080"/>
+            <a:ext cx="7698475" cy="4270248"/>
           </a:xfrm>
           <a:prstGeom prst="rect">
             <a:avLst/>
@@ -9672,14 +10339,14 @@
       </p:pic>
       <p:sp>
         <p:nvSpPr>
-          <p:cNvPr id="4" name="Text 1"/>
+          <p:cNvPr id="5" name="Text 2"/>
           <p:cNvSpPr/>
           <p:nvPr/>
         </p:nvSpPr>
         <p:spPr>
           <a:xfrm>
-            <a:off x="5349240" y="1005840"/>
-            <a:ext cx="6522415" cy="731520"/>
+            <a:off x="457200" y="6089904"/>
+            <a:ext cx="11277295" cy="347472"/>
           </a:xfrm>
           <a:prstGeom prst="rect">
             <a:avLst/>
@@ -9688,68 +10355,24 @@
           <a:ln/>
         </p:spPr>
         <p:txBody>
-          <a:bodyPr wrap="square" lIns="0" tIns="0" rIns="0" bIns="0" rtlCol="0" anchor="ctr">
-            <a:normAutofit/>
-          </a:bodyPr>
+          <a:bodyPr wrap="square" lIns="0" tIns="0" rIns="0" bIns="0" rtlCol="0" anchor="ctr"/>
           <a:lstStyle/>
           <a:p>
             <a:pPr algn="ctr" indent="0" marL="0">
               <a:buNone/>
             </a:pPr>
             <a:r>
-              <a:rPr lang="en-US" sz="3600" b="1" dirty="0">
-                <a:solidFill>
-                  <a:srgbClr val="990011"/>
+              <a:rPr lang="en-US" sz="1800" i="1" dirty="0">
+                <a:solidFill>
+                  <a:srgbClr val="555555"/>
                 </a:solidFill>
                 <a:latin typeface="Times New Roman" pitchFamily="34" charset="0"/>
                 <a:ea typeface="Times New Roman" pitchFamily="34" charset="-122"/>
                 <a:cs typeface="Times New Roman" pitchFamily="34" charset="-120"/>
               </a:rPr>
-              <a:t>Activity 3: Answer</a:t>
-            </a:r>
-            <a:endParaRPr lang="en-US" sz="3600" dirty="0"/>
-          </a:p>
-        </p:txBody>
-      </p:sp>
-      <p:sp>
-        <p:nvSpPr>
-          <p:cNvPr id="5" name="Text 2"/>
-          <p:cNvSpPr/>
-          <p:nvPr/>
-        </p:nvSpPr>
-        <p:spPr>
-          <a:xfrm>
-            <a:off x="5349240" y="1783080"/>
-            <a:ext cx="6522415" cy="4663440"/>
-          </a:xfrm>
-          <a:prstGeom prst="rect">
-            <a:avLst/>
-          </a:prstGeom>
-          <a:noFill/>
-          <a:ln/>
-        </p:spPr>
-        <p:txBody>
-          <a:bodyPr wrap="square" lIns="0" tIns="0" rIns="0" bIns="0" rtlCol="0" anchor="t"/>
-          <a:lstStyle/>
-          <a:p>
-            <a:pPr algn="l" indent="0" marL="0">
-              <a:spcAft>
-                <a:spcPts val="800"/>
-              </a:spcAft>
-              <a:buNone/>
-            </a:pPr>
-            <a:r>
-              <a:rPr lang="en-US" sz="4000" dirty="0">
-                <a:solidFill>
-                  <a:srgbClr val="111111"/>
-                </a:solidFill>
-                <a:latin typeface="Times New Roman" pitchFamily="34" charset="0"/>
-                <a:ea typeface="Times New Roman" pitchFamily="34" charset="-122"/>
-                <a:cs typeface="Times New Roman" pitchFamily="34" charset="-120"/>
-              </a:rPr>
-              <a:t>The Earth is round. Only a round object gives a round shadow.</a:t>
-            </a:r>
-            <a:endParaRPr lang="en-US" sz="4000" dirty="0"/>
+              <a:t>An eclipse of the Moon.</a:t>
+            </a:r>
+            <a:endParaRPr lang="en-US" sz="1800" dirty="0"/>
           </a:p>
         </p:txBody>
       </p:sp>
@@ -9859,7 +10482,7 @@
                 <a:ea typeface="Calibri" pitchFamily="34" charset="-122"/>
                 <a:cs typeface="Calibri" pitchFamily="34" charset="-120"/>
               </a:rPr>
-              <a:t>BOARD SUMMARY</a:t>
+              <a:t>3. PROOFS OF THE SHAPE</a:t>
             </a:r>
             <a:endParaRPr lang="en-US" sz="1400" dirty="0"/>
           </a:p>
@@ -9924,7 +10547,7 @@
                 <a:ea typeface="Times New Roman" pitchFamily="34" charset="-122"/>
                 <a:cs typeface="Times New Roman" pitchFamily="34" charset="-120"/>
               </a:rPr>
-              <a:t>Board Summary</a:t>
+              <a:t>Activity 3: Question</a:t>
             </a:r>
             <a:endParaRPr lang="en-US" sz="3600" dirty="0"/>
           </a:p>
@@ -9958,7 +10581,7 @@
               <a:buNone/>
             </a:pPr>
             <a:r>
-              <a:rPr lang="en-US" sz="4000" b="1" dirty="0">
+              <a:rPr lang="en-US" sz="4000" dirty="0">
                 <a:solidFill>
                   <a:srgbClr val="111111"/>
                 </a:solidFill>
@@ -9966,47 +10589,7 @@
                 <a:ea typeface="Times New Roman" pitchFamily="34" charset="-122"/>
                 <a:cs typeface="Times New Roman" pitchFamily="34" charset="-120"/>
               </a:rPr>
-              <a:t>Topic: The Earth as a Planet in the Solar System</a:t>
-            </a:r>
-            <a:endParaRPr lang="en-US" sz="4000" dirty="0"/>
-          </a:p>
-          <a:p>
-            <a:pPr algn="l" indent="0" marL="0">
-              <a:spcAft>
-                <a:spcPts val="800"/>
-              </a:spcAft>
-              <a:buNone/>
-            </a:pPr>
-            <a:r>
-              <a:rPr lang="en-US" sz="4000" b="1" dirty="0">
-                <a:solidFill>
-                  <a:srgbClr val="111111"/>
-                </a:solidFill>
-                <a:latin typeface="Times New Roman" pitchFamily="34" charset="0"/>
-                <a:ea typeface="Times New Roman" pitchFamily="34" charset="-122"/>
-                <a:cs typeface="Times New Roman" pitchFamily="34" charset="-120"/>
-              </a:rPr>
-              <a:t>Sub-topic: The Earth as a Planet of the Solar System</a:t>
-            </a:r>
-            <a:endParaRPr lang="en-US" sz="4000" dirty="0"/>
-          </a:p>
-          <a:p>
-            <a:pPr algn="l" indent="0" marL="0">
-              <a:spcAft>
-                <a:spcPts val="800"/>
-              </a:spcAft>
-              <a:buNone/>
-            </a:pPr>
-            <a:r>
-              <a:rPr lang="en-US" sz="4000" b="1" dirty="0">
-                <a:solidFill>
-                  <a:srgbClr val="990011"/>
-                </a:solidFill>
-                <a:latin typeface="Times New Roman" pitchFamily="34" charset="0"/>
-                <a:ea typeface="Times New Roman" pitchFamily="34" charset="-122"/>
-                <a:cs typeface="Times New Roman" pitchFamily="34" charset="-120"/>
-              </a:rPr>
-              <a:t>Lesson 1: Our Planet, the Earth: Size, Shape and Proofs</a:t>
+              <a:t>The shadow of the Earth on the Moon is always curved. What does this prove?</a:t>
             </a:r>
             <a:endParaRPr lang="en-US" sz="4000" dirty="0"/>
           </a:p>
@@ -10118,7 +10701,7 @@
                 <a:ea typeface="Calibri" pitchFamily="34" charset="-122"/>
                 <a:cs typeface="Calibri" pitchFamily="34" charset="-120"/>
               </a:rPr>
-              <a:t>BOARD SUMMARY</a:t>
+              <a:t>3. PROOFS OF THE SHAPE</a:t>
             </a:r>
             <a:endParaRPr lang="en-US" sz="1400" dirty="0"/>
           </a:p>
@@ -10141,7 +10724,7 @@
         <p:spPr>
           <a:xfrm>
             <a:off x="0" y="658368"/>
-            <a:ext cx="3840480" cy="5833872"/>
+            <a:ext cx="5120640" cy="5833872"/>
           </a:xfrm>
           <a:prstGeom prst="rect">
             <a:avLst/>
@@ -10156,8 +10739,8 @@
         </p:nvSpPr>
         <p:spPr>
           <a:xfrm>
-            <a:off x="4069080" y="1005840"/>
-            <a:ext cx="7802575" cy="731520"/>
+            <a:off x="5349240" y="1005840"/>
+            <a:ext cx="6522415" cy="731520"/>
           </a:xfrm>
           <a:prstGeom prst="rect">
             <a:avLst/>
@@ -10183,7 +10766,7 @@
                 <a:ea typeface="Times New Roman" pitchFamily="34" charset="-122"/>
                 <a:cs typeface="Times New Roman" pitchFamily="34" charset="-120"/>
               </a:rPr>
-              <a:t>DEFINITIONS</a:t>
+              <a:t>Activity 3: Answer</a:t>
             </a:r>
             <a:endParaRPr lang="en-US" sz="3600" dirty="0"/>
           </a:p>
@@ -10197,8 +10780,8 @@
         </p:nvSpPr>
         <p:spPr>
           <a:xfrm>
-            <a:off x="4069080" y="1783080"/>
-            <a:ext cx="7802575" cy="4663440"/>
+            <a:off x="5349240" y="1783080"/>
+            <a:ext cx="6522415" cy="4663440"/>
           </a:xfrm>
           <a:prstGeom prst="rect">
             <a:avLst/>
@@ -10217,7 +10800,7 @@
               <a:buNone/>
             </a:pPr>
             <a:r>
-              <a:rPr lang="en-US" sz="4000" i="1" dirty="0">
+              <a:rPr lang="en-US" sz="4000" dirty="0">
                 <a:solidFill>
                   <a:srgbClr val="111111"/>
                 </a:solidFill>
@@ -10225,81 +10808,7 @@
                 <a:ea typeface="Times New Roman" pitchFamily="34" charset="-122"/>
                 <a:cs typeface="Times New Roman" pitchFamily="34" charset="-120"/>
               </a:rPr>
-              <a:t>The key terms of this lesson are defined as follows:</a:t>
-            </a:r>
-            <a:endParaRPr lang="en-US" sz="4000" dirty="0"/>
-          </a:p>
-          <a:p>
-            <a:pPr algn="l" indent="0" marL="0">
-              <a:spcAft>
-                <a:spcPts val="800"/>
-              </a:spcAft>
-              <a:buNone/>
-            </a:pPr>
-            <a:r>
-              <a:rPr lang="en-US" sz="4000" b="1" dirty="0">
-                <a:solidFill>
-                  <a:srgbClr val="111111"/>
-                </a:solidFill>
-                <a:latin typeface="Times New Roman" pitchFamily="34" charset="0"/>
-                <a:ea typeface="Times New Roman" pitchFamily="34" charset="-122"/>
-                <a:cs typeface="Times New Roman" pitchFamily="34" charset="-120"/>
-              </a:rPr>
-              <a:t>Planet: </a:t>
-            </a:r>
-            <a:pPr algn="l" indent="0" marL="0">
-              <a:spcAft>
-                <a:spcPts val="800"/>
-              </a:spcAft>
-              <a:buNone/>
-            </a:pPr>
-            <a:r>
-              <a:rPr lang="en-US" sz="4000" dirty="0">
-                <a:solidFill>
-                  <a:srgbClr val="111111"/>
-                </a:solidFill>
-                <a:latin typeface="Times New Roman" pitchFamily="34" charset="0"/>
-                <a:ea typeface="Times New Roman" pitchFamily="34" charset="-122"/>
-                <a:cs typeface="Times New Roman" pitchFamily="34" charset="-120"/>
-              </a:rPr>
-              <a:t>It is a large body that moves around the Sun.</a:t>
-            </a:r>
-            <a:endParaRPr lang="en-US" sz="4000" dirty="0"/>
-          </a:p>
-          <a:p>
-            <a:pPr algn="l" indent="0" marL="0">
-              <a:spcAft>
-                <a:spcPts val="800"/>
-              </a:spcAft>
-              <a:buNone/>
-            </a:pPr>
-            <a:r>
-              <a:rPr lang="en-US" sz="4000" b="1" dirty="0">
-                <a:solidFill>
-                  <a:srgbClr val="111111"/>
-                </a:solidFill>
-                <a:latin typeface="Times New Roman" pitchFamily="34" charset="0"/>
-                <a:ea typeface="Times New Roman" pitchFamily="34" charset="-122"/>
-                <a:cs typeface="Times New Roman" pitchFamily="34" charset="-120"/>
-              </a:rPr>
-              <a:t>Oblate spheroid: </a:t>
-            </a:r>
-            <a:pPr algn="l" indent="0" marL="0">
-              <a:spcAft>
-                <a:spcPts val="800"/>
-              </a:spcAft>
-              <a:buNone/>
-            </a:pPr>
-            <a:r>
-              <a:rPr lang="en-US" sz="4000" dirty="0">
-                <a:solidFill>
-                  <a:srgbClr val="111111"/>
-                </a:solidFill>
-                <a:latin typeface="Times New Roman" pitchFamily="34" charset="0"/>
-                <a:ea typeface="Times New Roman" pitchFamily="34" charset="-122"/>
-                <a:cs typeface="Times New Roman" pitchFamily="34" charset="-120"/>
-              </a:rPr>
-              <a:t>It is a ball that is flat at the poles and wider at the Equator.</a:t>
+              <a:t>The Earth is round: only a round object always gives a round shadow.</a:t>
             </a:r>
             <a:endParaRPr lang="en-US" sz="4000" dirty="0"/>
           </a:p>
@@ -10476,7 +10985,7 @@
                 <a:ea typeface="Times New Roman" pitchFamily="34" charset="-122"/>
                 <a:cs typeface="Times New Roman" pitchFamily="34" charset="-120"/>
               </a:rPr>
-              <a:t>1. Size of the Earth</a:t>
+              <a:t>Board Summary</a:t>
             </a:r>
             <a:endParaRPr lang="en-US" sz="3600" dirty="0"/>
           </a:p>
@@ -10510,7 +11019,7 @@
               <a:buNone/>
             </a:pPr>
             <a:r>
-              <a:rPr lang="en-US" sz="4000" i="1" dirty="0">
+              <a:rPr lang="en-US" sz="4000" b="1" dirty="0">
                 <a:solidFill>
                   <a:srgbClr val="111111"/>
                 </a:solidFill>
@@ -10518,7 +11027,7 @@
                 <a:ea typeface="Times New Roman" pitchFamily="34" charset="-122"/>
                 <a:cs typeface="Times New Roman" pitchFamily="34" charset="-120"/>
               </a:rPr>
-              <a:t>The main measurements of the Earth are the following:</a:t>
+              <a:t>Topic: The Earth as a Planet in the Solar System</a:t>
             </a:r>
             <a:endParaRPr lang="en-US" sz="4000" dirty="0"/>
           </a:p>
@@ -10538,8 +11047,11 @@
                 <a:ea typeface="Times New Roman" pitchFamily="34" charset="-122"/>
                 <a:cs typeface="Times New Roman" pitchFamily="34" charset="-120"/>
               </a:rPr>
-              <a:t>Equatorial circumference: </a:t>
-            </a:r>
+              <a:t>Sub-topic: The Earth as a Planet of the Solar System</a:t>
+            </a:r>
+            <a:endParaRPr lang="en-US" sz="4000" dirty="0"/>
+          </a:p>
+          <a:p>
             <a:pPr algn="l" indent="0" marL="0">
               <a:spcAft>
                 <a:spcPts val="800"/>
@@ -10547,15 +11059,15 @@
               <a:buNone/>
             </a:pPr>
             <a:r>
-              <a:rPr lang="en-US" sz="4000" dirty="0">
-                <a:solidFill>
-                  <a:srgbClr val="111111"/>
+              <a:rPr lang="en-US" sz="4000" b="1" dirty="0">
+                <a:solidFill>
+                  <a:srgbClr val="990011"/>
                 </a:solidFill>
                 <a:latin typeface="Times New Roman" pitchFamily="34" charset="0"/>
                 <a:ea typeface="Times New Roman" pitchFamily="34" charset="-122"/>
                 <a:cs typeface="Times New Roman" pitchFamily="34" charset="-120"/>
               </a:rPr>
-              <a:t>It is the distance around the Equator, which is about 40,075 km.</a:t>
+              <a:t>Lesson 1: Our Planet, the Earth: Size, Shape and Proofs</a:t>
             </a:r>
             <a:endParaRPr lang="en-US" sz="4000" dirty="0"/>
           </a:p>
@@ -10690,7 +11202,7 @@
         <p:spPr>
           <a:xfrm>
             <a:off x="0" y="658368"/>
-            <a:ext cx="2468880" cy="5833872"/>
+            <a:ext cx="3840480" cy="5833872"/>
           </a:xfrm>
           <a:prstGeom prst="rect">
             <a:avLst/>
@@ -10705,8 +11217,8 @@
         </p:nvSpPr>
         <p:spPr>
           <a:xfrm>
-            <a:off x="2697480" y="1005840"/>
-            <a:ext cx="9174175" cy="731520"/>
+            <a:off x="4069080" y="1005840"/>
+            <a:ext cx="7802575" cy="731520"/>
           </a:xfrm>
           <a:prstGeom prst="rect">
             <a:avLst/>
@@ -10732,7 +11244,7 @@
                 <a:ea typeface="Times New Roman" pitchFamily="34" charset="-122"/>
                 <a:cs typeface="Times New Roman" pitchFamily="34" charset="-120"/>
               </a:rPr>
-              <a:t>1. Size of the Earth (continued)</a:t>
+              <a:t>DEFINITIONS</a:t>
             </a:r>
             <a:endParaRPr lang="en-US" sz="3600" dirty="0"/>
           </a:p>
@@ -10746,8 +11258,8 @@
         </p:nvSpPr>
         <p:spPr>
           <a:xfrm>
-            <a:off x="2697480" y="1783080"/>
-            <a:ext cx="9174175" cy="4663440"/>
+            <a:off x="4069080" y="1783080"/>
+            <a:ext cx="7802575" cy="4663440"/>
           </a:xfrm>
           <a:prstGeom prst="rect">
             <a:avLst/>
@@ -10766,7 +11278,7 @@
               <a:buNone/>
             </a:pPr>
             <a:r>
-              <a:rPr lang="en-US" sz="4000" b="1" dirty="0">
+              <a:rPr lang="en-US" sz="4000" i="1" dirty="0">
                 <a:solidFill>
                   <a:srgbClr val="111111"/>
                 </a:solidFill>
@@ -10774,8 +11286,11 @@
                 <a:ea typeface="Times New Roman" pitchFamily="34" charset="-122"/>
                 <a:cs typeface="Times New Roman" pitchFamily="34" charset="-120"/>
               </a:rPr>
-              <a:t>Polar circumference: </a:t>
-            </a:r>
+              <a:t>The key terms of this lesson are defined as follows:</a:t>
+            </a:r>
+            <a:endParaRPr lang="en-US" sz="4000" dirty="0"/>
+          </a:p>
+          <a:p>
             <a:pPr algn="l" indent="0" marL="0">
               <a:spcAft>
                 <a:spcPts val="800"/>
@@ -10783,7 +11298,7 @@
               <a:buNone/>
             </a:pPr>
             <a:r>
-              <a:rPr lang="en-US" sz="4000" dirty="0">
+              <a:rPr lang="en-US" sz="4000" b="1" dirty="0">
                 <a:solidFill>
                   <a:srgbClr val="111111"/>
                 </a:solidFill>
@@ -10791,11 +11306,8 @@
                 <a:ea typeface="Times New Roman" pitchFamily="34" charset="-122"/>
                 <a:cs typeface="Times New Roman" pitchFamily="34" charset="-120"/>
               </a:rPr>
-              <a:t>It is the distance around the Earth through the poles, which is about 40,008 km.</a:t>
-            </a:r>
-            <a:endParaRPr lang="en-US" sz="4000" dirty="0"/>
-          </a:p>
-          <a:p>
+              <a:t>Planet: </a:t>
+            </a:r>
             <a:pPr algn="l" indent="0" marL="0">
               <a:spcAft>
                 <a:spcPts val="800"/>
@@ -10803,7 +11315,7 @@
               <a:buNone/>
             </a:pPr>
             <a:r>
-              <a:rPr lang="en-US" sz="4000" b="1" dirty="0">
+              <a:rPr lang="en-US" sz="4000" dirty="0">
                 <a:solidFill>
                   <a:srgbClr val="111111"/>
                 </a:solidFill>
@@ -10811,8 +11323,11 @@
                 <a:ea typeface="Times New Roman" pitchFamily="34" charset="-122"/>
                 <a:cs typeface="Times New Roman" pitchFamily="34" charset="-120"/>
               </a:rPr>
-              <a:t>Equatorial diameter: </a:t>
-            </a:r>
+              <a:t>It is a large round body that moves around the Sun.</a:t>
+            </a:r>
+            <a:endParaRPr lang="en-US" sz="4000" dirty="0"/>
+          </a:p>
+          <a:p>
             <a:pPr algn="l" indent="0" marL="0">
               <a:spcAft>
                 <a:spcPts val="800"/>
@@ -10820,7 +11335,7 @@
               <a:buNone/>
             </a:pPr>
             <a:r>
-              <a:rPr lang="en-US" sz="4000" dirty="0">
+              <a:rPr lang="en-US" sz="4000" b="1" dirty="0">
                 <a:solidFill>
                   <a:srgbClr val="111111"/>
                 </a:solidFill>
@@ -10828,7 +11343,24 @@
                 <a:ea typeface="Times New Roman" pitchFamily="34" charset="-122"/>
                 <a:cs typeface="Times New Roman" pitchFamily="34" charset="-120"/>
               </a:rPr>
-              <a:t>It is the distance through the centre of the Earth at the Equator, which is about 12,756 km.</a:t>
+              <a:t>Circumference: </a:t>
+            </a:r>
+            <a:pPr algn="l" indent="0" marL="0">
+              <a:spcAft>
+                <a:spcPts val="800"/>
+              </a:spcAft>
+              <a:buNone/>
+            </a:pPr>
+            <a:r>
+              <a:rPr lang="en-US" sz="4000" dirty="0">
+                <a:solidFill>
+                  <a:srgbClr val="111111"/>
+                </a:solidFill>
+                <a:latin typeface="Times New Roman" pitchFamily="34" charset="0"/>
+                <a:ea typeface="Times New Roman" pitchFamily="34" charset="-122"/>
+                <a:cs typeface="Times New Roman" pitchFamily="34" charset="-120"/>
+              </a:rPr>
+              <a:t>It is the distance around a circle or a sphere.</a:t>
             </a:r>
             <a:endParaRPr lang="en-US" sz="4000" dirty="0"/>
           </a:p>
@@ -11972,7 +12504,7 @@
         <p:spPr>
           <a:xfrm>
             <a:off x="0" y="658368"/>
-            <a:ext cx="5120640" cy="5833872"/>
+            <a:ext cx="3840480" cy="5833872"/>
           </a:xfrm>
           <a:prstGeom prst="rect">
             <a:avLst/>
@@ -11987,8 +12519,8 @@
         </p:nvSpPr>
         <p:spPr>
           <a:xfrm>
-            <a:off x="5349240" y="1005840"/>
-            <a:ext cx="6522415" cy="731520"/>
+            <a:off x="4069080" y="1005840"/>
+            <a:ext cx="7802575" cy="731520"/>
           </a:xfrm>
           <a:prstGeom prst="rect">
             <a:avLst/>
@@ -12014,7 +12546,7 @@
                 <a:ea typeface="Times New Roman" pitchFamily="34" charset="-122"/>
                 <a:cs typeface="Times New Roman" pitchFamily="34" charset="-120"/>
               </a:rPr>
-              <a:t>2. Shape of the Earth</a:t>
+              <a:t>DEFINITIONS (continued)</a:t>
             </a:r>
             <a:endParaRPr lang="en-US" sz="3600" dirty="0"/>
           </a:p>
@@ -12028,8 +12560,8 @@
         </p:nvSpPr>
         <p:spPr>
           <a:xfrm>
-            <a:off x="5349240" y="1783080"/>
-            <a:ext cx="6522415" cy="4663440"/>
+            <a:off x="4069080" y="1783080"/>
+            <a:ext cx="7802575" cy="4663440"/>
           </a:xfrm>
           <a:prstGeom prst="rect">
             <a:avLst/>
@@ -12048,7 +12580,7 @@
               <a:buNone/>
             </a:pPr>
             <a:r>
-              <a:rPr lang="en-US" sz="4000" i="1" dirty="0">
+              <a:rPr lang="en-US" sz="4000" b="1" dirty="0">
                 <a:solidFill>
                   <a:srgbClr val="111111"/>
                 </a:solidFill>
@@ -12056,11 +12588,8 @@
                 <a:ea typeface="Times New Roman" pitchFamily="34" charset="-122"/>
                 <a:cs typeface="Times New Roman" pitchFamily="34" charset="-120"/>
               </a:rPr>
-              <a:t>The true shape of the Earth is described as follows:</a:t>
-            </a:r>
-            <a:endParaRPr lang="en-US" sz="4000" dirty="0"/>
-          </a:p>
-          <a:p>
+              <a:t>Diameter: </a:t>
+            </a:r>
             <a:pPr algn="l" indent="0" marL="0">
               <a:spcAft>
                 <a:spcPts val="800"/>
@@ -12068,7 +12597,7 @@
               <a:buNone/>
             </a:pPr>
             <a:r>
-              <a:rPr lang="en-US" sz="4000" b="1" dirty="0">
+              <a:rPr lang="en-US" sz="4000" dirty="0">
                 <a:solidFill>
                   <a:srgbClr val="111111"/>
                 </a:solidFill>
@@ -12076,8 +12605,11 @@
                 <a:ea typeface="Times New Roman" pitchFamily="34" charset="-122"/>
                 <a:cs typeface="Times New Roman" pitchFamily="34" charset="-120"/>
               </a:rPr>
-              <a:t>Oblate spheroid: </a:t>
-            </a:r>
+              <a:t>It is the distance from one side of a sphere to the other, through its centre.</a:t>
+            </a:r>
+            <a:endParaRPr lang="en-US" sz="4000" dirty="0"/>
+          </a:p>
+          <a:p>
             <a:pPr algn="l" indent="0" marL="0">
               <a:spcAft>
                 <a:spcPts val="800"/>
@@ -12085,7 +12617,7 @@
               <a:buNone/>
             </a:pPr>
             <a:r>
-              <a:rPr lang="en-US" sz="4000" dirty="0">
+              <a:rPr lang="en-US" sz="4000" b="1" dirty="0">
                 <a:solidFill>
                   <a:srgbClr val="111111"/>
                 </a:solidFill>
@@ -12093,7 +12625,24 @@
                 <a:ea typeface="Times New Roman" pitchFamily="34" charset="-122"/>
                 <a:cs typeface="Times New Roman" pitchFamily="34" charset="-120"/>
               </a:rPr>
-              <a:t>The Earth is round, slightly flattened at the poles and bulging at the Equator.</a:t>
+              <a:t>Oblate spheroid: </a:t>
+            </a:r>
+            <a:pPr algn="l" indent="0" marL="0">
+              <a:spcAft>
+                <a:spcPts val="800"/>
+              </a:spcAft>
+              <a:buNone/>
+            </a:pPr>
+            <a:r>
+              <a:rPr lang="en-US" sz="4000" dirty="0">
+                <a:solidFill>
+                  <a:srgbClr val="111111"/>
+                </a:solidFill>
+                <a:latin typeface="Times New Roman" pitchFamily="34" charset="0"/>
+                <a:ea typeface="Times New Roman" pitchFamily="34" charset="-122"/>
+                <a:cs typeface="Times New Roman" pitchFamily="34" charset="-120"/>
+              </a:rPr>
+              <a:t>It is a ball that is flattened at the poles and bulging at the Equator.</a:t>
             </a:r>
             <a:endParaRPr lang="en-US" sz="4000" dirty="0"/>
           </a:p>
@@ -12219,8 +12768,8 @@
         </p:nvSpPr>
         <p:spPr>
           <a:xfrm>
-            <a:off x="457200" y="1005840"/>
-            <a:ext cx="11277295" cy="731520"/>
+            <a:off x="365760" y="1005840"/>
+            <a:ext cx="11460175" cy="731520"/>
           </a:xfrm>
           <a:prstGeom prst="rect">
             <a:avLst/>
@@ -12229,7 +12778,9 @@
           <a:ln/>
         </p:spPr>
         <p:txBody>
-          <a:bodyPr wrap="square" lIns="0" tIns="0" rIns="0" bIns="0" rtlCol="0" anchor="ctr"/>
+          <a:bodyPr wrap="square" lIns="0" tIns="0" rIns="0" bIns="0" rtlCol="0" anchor="ctr">
+            <a:normAutofit/>
+          </a:bodyPr>
           <a:lstStyle/>
           <a:p>
             <a:pPr algn="ctr" indent="0" marL="0">
@@ -12244,7 +12795,86 @@
                 <a:ea typeface="Times New Roman" pitchFamily="34" charset="-122"/>
                 <a:cs typeface="Times New Roman" pitchFamily="34" charset="-120"/>
               </a:rPr>
-              <a:t>2. Shape of the Earth</a:t>
+              <a:t>1. The Size of the Earth</a:t>
+            </a:r>
+            <a:endParaRPr lang="en-US" sz="3600" dirty="0"/>
+          </a:p>
+        </p:txBody>
+      </p:sp>
+      <p:sp>
+        <p:nvSpPr>
+          <p:cNvPr id="4" name="Text 2"/>
+          <p:cNvSpPr/>
+          <p:nvPr/>
+        </p:nvSpPr>
+        <p:spPr>
+          <a:xfrm>
+            <a:off x="365760" y="1783080"/>
+            <a:ext cx="4846320" cy="4617720"/>
+          </a:xfrm>
+          <a:prstGeom prst="rect">
+            <a:avLst/>
+          </a:prstGeom>
+          <a:noFill/>
+          <a:ln/>
+        </p:spPr>
+        <p:txBody>
+          <a:bodyPr wrap="square" lIns="0" tIns="0" rIns="0" bIns="0" rtlCol="0" anchor="t"/>
+          <a:lstStyle/>
+          <a:p>
+            <a:pPr algn="l" indent="0" marL="0">
+              <a:spcAft>
+                <a:spcPts val="800"/>
+              </a:spcAft>
+              <a:buNone/>
+            </a:pPr>
+            <a:r>
+              <a:rPr lang="en-US" sz="3600" i="1" dirty="0">
+                <a:solidFill>
+                  <a:srgbClr val="111111"/>
+                </a:solidFill>
+                <a:latin typeface="Times New Roman" pitchFamily="34" charset="0"/>
+                <a:ea typeface="Times New Roman" pitchFamily="34" charset="-122"/>
+                <a:cs typeface="Times New Roman" pitchFamily="34" charset="-120"/>
+              </a:rPr>
+              <a:t>The main measurements of the Earth are the following:</a:t>
+            </a:r>
+            <a:endParaRPr lang="en-US" sz="3600" dirty="0"/>
+          </a:p>
+          <a:p>
+            <a:pPr algn="l" indent="0" marL="0">
+              <a:spcAft>
+                <a:spcPts val="800"/>
+              </a:spcAft>
+              <a:buNone/>
+            </a:pPr>
+            <a:r>
+              <a:rPr lang="en-US" sz="3600" b="1" dirty="0">
+                <a:solidFill>
+                  <a:srgbClr val="111111"/>
+                </a:solidFill>
+                <a:latin typeface="Times New Roman" pitchFamily="34" charset="0"/>
+                <a:ea typeface="Times New Roman" pitchFamily="34" charset="-122"/>
+                <a:cs typeface="Times New Roman" pitchFamily="34" charset="-120"/>
+              </a:rPr>
+              <a:t>Equatorial circumference: </a:t>
+            </a:r>
+            <a:pPr algn="l" indent="0" marL="0">
+              <a:spcAft>
+                <a:spcPts val="800"/>
+              </a:spcAft>
+              <a:buNone/>
+            </a:pPr>
+            <a:r>
+              <a:rPr lang="en-US" sz="3600" dirty="0">
+                <a:solidFill>
+                  <a:srgbClr val="111111"/>
+                </a:solidFill>
+                <a:latin typeface="Times New Roman" pitchFamily="34" charset="0"/>
+                <a:ea typeface="Times New Roman" pitchFamily="34" charset="-122"/>
+                <a:cs typeface="Times New Roman" pitchFamily="34" charset="-120"/>
+              </a:rPr>
+              <a:t>The distance around the Earth at the Equator is about 40,075 km.</a:t>
             </a:r>
             <a:endParaRPr lang="en-US" sz="3600" dirty="0"/>
           </a:p>
@@ -12252,7 +12882,7 @@
       </p:sp>
       <p:pic>
         <p:nvPicPr>
-          <p:cNvPr id="4" name="Image 0" descr="/home/claude/f4/img/v2/earth_shape_big.png">    </p:cNvPr>
+          <p:cNvPr id="5" name="Image 0" descr="/home/claude/f4/img/v2/earth_disc_big.png">    </p:cNvPr>
           <p:cNvPicPr>
             <a:picLocks noChangeAspect="1"/>
           </p:cNvPicPr>
@@ -12266,8 +12896,8 @@
         </p:blipFill>
         <p:spPr>
           <a:xfrm>
-            <a:off x="629930" y="1783080"/>
-            <a:ext cx="10931835" cy="4270248"/>
+            <a:off x="5349240" y="2617506"/>
+            <a:ext cx="6659575" cy="2601397"/>
           </a:xfrm>
           <a:prstGeom prst="rect">
             <a:avLst/>
@@ -12276,14 +12906,14 @@
       </p:pic>
       <p:sp>
         <p:nvSpPr>
-          <p:cNvPr id="5" name="Text 2"/>
+          <p:cNvPr id="6" name="Text 3"/>
           <p:cNvSpPr/>
           <p:nvPr/>
         </p:nvSpPr>
         <p:spPr>
           <a:xfrm>
-            <a:off x="457200" y="6089904"/>
-            <a:ext cx="11277295" cy="347472"/>
+            <a:off x="5349240" y="6089904"/>
+            <a:ext cx="6659575" cy="347472"/>
           </a:xfrm>
           <a:prstGeom prst="rect">
             <a:avLst/>
@@ -12299,7 +12929,7 @@
               <a:buNone/>
             </a:pPr>
             <a:r>
-              <a:rPr lang="en-US" sz="1800" i="1" dirty="0">
+              <a:rPr lang="en-US" sz="1600" i="1" dirty="0">
                 <a:solidFill>
                   <a:srgbClr val="555555"/>
                 </a:solidFill>
@@ -12307,9 +12937,9 @@
                 <a:ea typeface="Times New Roman" pitchFamily="34" charset="-122"/>
                 <a:cs typeface="Times New Roman" pitchFamily="34" charset="-120"/>
               </a:rPr>
-              <a:t>Illustration: the shape of the Earth</a:t>
-            </a:r>
-            <a:endParaRPr lang="en-US" sz="1800" dirty="0"/>
+              <a:t>Illustration: the Earth</a:t>
+            </a:r>
+            <a:endParaRPr lang="en-US" sz="1600" dirty="0"/>
           </a:p>
         </p:txBody>
       </p:sp>
@@ -12442,7 +13072,7 @@
         <p:spPr>
           <a:xfrm>
             <a:off x="0" y="658368"/>
-            <a:ext cx="2468880" cy="5833872"/>
+            <a:ext cx="1463040" cy="5833872"/>
           </a:xfrm>
           <a:prstGeom prst="rect">
             <a:avLst/>
@@ -12457,8 +13087,8 @@
         </p:nvSpPr>
         <p:spPr>
           <a:xfrm>
-            <a:off x="2697480" y="1005840"/>
-            <a:ext cx="9174175" cy="731520"/>
+            <a:off x="1691640" y="1005840"/>
+            <a:ext cx="10180015" cy="731520"/>
           </a:xfrm>
           <a:prstGeom prst="rect">
             <a:avLst/>
@@ -12484,7 +13114,7 @@
                 <a:ea typeface="Times New Roman" pitchFamily="34" charset="-122"/>
                 <a:cs typeface="Times New Roman" pitchFamily="34" charset="-120"/>
               </a:rPr>
-              <a:t>3. Proofs of the Shape of the Earth</a:t>
+              <a:t>1. The Size of the Earth</a:t>
             </a:r>
             <a:endParaRPr lang="en-US" sz="3600" dirty="0"/>
           </a:p>
@@ -12498,8 +13128,8 @@
         </p:nvSpPr>
         <p:spPr>
           <a:xfrm>
-            <a:off x="2697480" y="1783080"/>
-            <a:ext cx="9174175" cy="4663440"/>
+            <a:off x="1691640" y="1783080"/>
+            <a:ext cx="10180015" cy="4663440"/>
           </a:xfrm>
           <a:prstGeom prst="rect">
             <a:avLst/>
@@ -12518,7 +13148,7 @@
               <a:buNone/>
             </a:pPr>
             <a:r>
-              <a:rPr lang="en-US" sz="4000" i="1" dirty="0">
+              <a:rPr lang="en-US" sz="4000" b="1" dirty="0">
                 <a:solidFill>
                   <a:srgbClr val="111111"/>
                 </a:solidFill>
@@ -12526,11 +13156,8 @@
                 <a:ea typeface="Times New Roman" pitchFamily="34" charset="-122"/>
                 <a:cs typeface="Times New Roman" pitchFamily="34" charset="-120"/>
               </a:rPr>
-              <a:t>The following observations prove that the Earth is round:</a:t>
-            </a:r>
-            <a:endParaRPr lang="en-US" sz="4000" dirty="0"/>
-          </a:p>
-          <a:p>
+              <a:t>Polar circumference: </a:t>
+            </a:r>
             <a:pPr algn="l" indent="0" marL="0">
               <a:spcAft>
                 <a:spcPts val="800"/>
@@ -12538,7 +13165,7 @@
               <a:buNone/>
             </a:pPr>
             <a:r>
-              <a:rPr lang="en-US" sz="4000" b="1" dirty="0">
+              <a:rPr lang="en-US" sz="4000" dirty="0">
                 <a:solidFill>
                   <a:srgbClr val="111111"/>
                 </a:solidFill>
@@ -12546,8 +13173,11 @@
                 <a:ea typeface="Times New Roman" pitchFamily="34" charset="-122"/>
                 <a:cs typeface="Times New Roman" pitchFamily="34" charset="-120"/>
               </a:rPr>
-              <a:t>The ship at sea: </a:t>
-            </a:r>
+              <a:t>The distance around the Earth through the poles is about 40,008 km.</a:t>
+            </a:r>
+            <a:endParaRPr lang="en-US" sz="4000" dirty="0"/>
+          </a:p>
+          <a:p>
             <a:pPr algn="l" indent="0" marL="0">
               <a:spcAft>
                 <a:spcPts val="800"/>
@@ -12555,7 +13185,7 @@
               <a:buNone/>
             </a:pPr>
             <a:r>
-              <a:rPr lang="en-US" sz="4000" dirty="0">
+              <a:rPr lang="en-US" sz="4000" b="1" dirty="0">
                 <a:solidFill>
                   <a:srgbClr val="111111"/>
                 </a:solidFill>
@@ -12563,11 +13193,8 @@
                 <a:ea typeface="Times New Roman" pitchFamily="34" charset="-122"/>
                 <a:cs typeface="Times New Roman" pitchFamily="34" charset="-120"/>
               </a:rPr>
-              <a:t>When a ship sails away, its bottom disappears first and its top last.</a:t>
-            </a:r>
-            <a:endParaRPr lang="en-US" sz="4000" dirty="0"/>
-          </a:p>
-          <a:p>
+              <a:t>Equatorial diameter: </a:t>
+            </a:r>
             <a:pPr algn="l" indent="0" marL="0">
               <a:spcAft>
                 <a:spcPts val="800"/>
@@ -12575,7 +13202,7 @@
               <a:buNone/>
             </a:pPr>
             <a:r>
-              <a:rPr lang="en-US" sz="4000" b="1" dirty="0">
+              <a:rPr lang="en-US" sz="4000" dirty="0">
                 <a:solidFill>
                   <a:srgbClr val="111111"/>
                 </a:solidFill>
@@ -12583,8 +13210,11 @@
                 <a:ea typeface="Times New Roman" pitchFamily="34" charset="-122"/>
                 <a:cs typeface="Times New Roman" pitchFamily="34" charset="-120"/>
               </a:rPr>
-              <a:t>The eclipse of the Moon: </a:t>
-            </a:r>
+              <a:t>The diameter of the Earth at the Equator is about 12,756 km.</a:t>
+            </a:r>
+            <a:endParaRPr lang="en-US" sz="4000" dirty="0"/>
+          </a:p>
+          <a:p>
             <a:pPr algn="l" indent="0" marL="0">
               <a:spcAft>
                 <a:spcPts val="800"/>
@@ -12592,7 +13222,7 @@
               <a:buNone/>
             </a:pPr>
             <a:r>
-              <a:rPr lang="en-US" sz="4000" dirty="0">
+              <a:rPr lang="en-US" sz="4000" b="1" dirty="0">
                 <a:solidFill>
                   <a:srgbClr val="111111"/>
                 </a:solidFill>
@@ -12600,7 +13230,24 @@
                 <a:ea typeface="Times New Roman" pitchFamily="34" charset="-122"/>
                 <a:cs typeface="Times New Roman" pitchFamily="34" charset="-120"/>
               </a:rPr>
-              <a:t>The shadow of the Earth on the Moon is always curved.</a:t>
+              <a:t>Polar diameter: </a:t>
+            </a:r>
+            <a:pPr algn="l" indent="0" marL="0">
+              <a:spcAft>
+                <a:spcPts val="800"/>
+              </a:spcAft>
+              <a:buNone/>
+            </a:pPr>
+            <a:r>
+              <a:rPr lang="en-US" sz="4000" dirty="0">
+                <a:solidFill>
+                  <a:srgbClr val="111111"/>
+                </a:solidFill>
+                <a:latin typeface="Times New Roman" pitchFamily="34" charset="0"/>
+                <a:ea typeface="Times New Roman" pitchFamily="34" charset="-122"/>
+                <a:cs typeface="Times New Roman" pitchFamily="34" charset="-120"/>
+              </a:rPr>
+              <a:t>The diameter of the Earth from pole to pole is about 12,714 km.</a:t>
             </a:r>
             <a:endParaRPr lang="en-US" sz="4000" dirty="0"/>
           </a:p>
@@ -12777,7 +13424,7 @@
                 <a:ea typeface="Times New Roman" pitchFamily="34" charset="-122"/>
                 <a:cs typeface="Times New Roman" pitchFamily="34" charset="-120"/>
               </a:rPr>
-              <a:t>3. Proofs of the Shape of the Earth (continued)</a:t>
+              <a:t>1. The Size of the Earth (continued)</a:t>
             </a:r>
             <a:endParaRPr lang="en-US" sz="3600" dirty="0"/>
           </a:p>
@@ -12819,7 +13466,7 @@
                 <a:ea typeface="Times New Roman" pitchFamily="34" charset="-122"/>
                 <a:cs typeface="Times New Roman" pitchFamily="34" charset="-120"/>
               </a:rPr>
-              <a:t>Photos from space: </a:t>
+              <a:t>Surface area: </a:t>
             </a:r>
             <a:pPr algn="l" indent="0" marL="0">
               <a:spcAft>
@@ -12836,44 +13483,7 @@
                 <a:ea typeface="Times New Roman" pitchFamily="34" charset="-122"/>
                 <a:cs typeface="Times New Roman" pitchFamily="34" charset="-120"/>
               </a:rPr>
-              <a:t>Photos taken from space show that the Earth is round.</a:t>
-            </a:r>
-            <a:endParaRPr lang="en-US" sz="4000" dirty="0"/>
-          </a:p>
-          <a:p>
-            <a:pPr algn="l" indent="0" marL="0">
-              <a:spcAft>
-                <a:spcPts val="800"/>
-              </a:spcAft>
-              <a:buNone/>
-            </a:pPr>
-            <a:r>
-              <a:rPr lang="en-US" sz="4000" b="1" dirty="0">
-                <a:solidFill>
-                  <a:srgbClr val="111111"/>
-                </a:solidFill>
-                <a:latin typeface="Times New Roman" pitchFamily="34" charset="0"/>
-                <a:ea typeface="Times New Roman" pitchFamily="34" charset="-122"/>
-                <a:cs typeface="Times New Roman" pitchFamily="34" charset="-120"/>
-              </a:rPr>
-              <a:t>Travel around the world: </a:t>
-            </a:r>
-            <a:pPr algn="l" indent="0" marL="0">
-              <a:spcAft>
-                <a:spcPts val="800"/>
-              </a:spcAft>
-              <a:buNone/>
-            </a:pPr>
-            <a:r>
-              <a:rPr lang="en-US" sz="4000" dirty="0">
-                <a:solidFill>
-                  <a:srgbClr val="111111"/>
-                </a:solidFill>
-                <a:latin typeface="Times New Roman" pitchFamily="34" charset="0"/>
-                <a:ea typeface="Times New Roman" pitchFamily="34" charset="-122"/>
-                <a:cs typeface="Times New Roman" pitchFamily="34" charset="-120"/>
-              </a:rPr>
-              <a:t>A traveller who goes always in one direction comes back to the starting point.</a:t>
+              <a:t>The total surface of the Earth is about 510 million km².</a:t>
             </a:r>
             <a:endParaRPr lang="en-US" sz="4000" dirty="0"/>
           </a:p>
@@ -12985,15 +13595,135 @@
                 <a:ea typeface="Calibri" pitchFamily="34" charset="-122"/>
                 <a:cs typeface="Calibri" pitchFamily="34" charset="-120"/>
               </a:rPr>
-              <a:t>FORMATIVE EVALUATION</a:t>
+              <a:t>BOARD SUMMARY</a:t>
             </a:r>
             <a:endParaRPr lang="en-US" sz="1400" dirty="0"/>
+          </a:p>
+        </p:txBody>
+      </p:sp>
+      <p:sp>
+        <p:nvSpPr>
+          <p:cNvPr id="3" name="Text 1"/>
+          <p:cNvSpPr/>
+          <p:nvPr/>
+        </p:nvSpPr>
+        <p:spPr>
+          <a:xfrm>
+            <a:off x="365760" y="1005840"/>
+            <a:ext cx="11460175" cy="731520"/>
+          </a:xfrm>
+          <a:prstGeom prst="rect">
+            <a:avLst/>
+          </a:prstGeom>
+          <a:noFill/>
+          <a:ln/>
+        </p:spPr>
+        <p:txBody>
+          <a:bodyPr wrap="square" lIns="0" tIns="0" rIns="0" bIns="0" rtlCol="0" anchor="ctr">
+            <a:normAutofit/>
+          </a:bodyPr>
+          <a:lstStyle/>
+          <a:p>
+            <a:pPr algn="ctr" indent="0" marL="0">
+              <a:buNone/>
+            </a:pPr>
+            <a:r>
+              <a:rPr lang="en-US" sz="3600" b="1" dirty="0">
+                <a:solidFill>
+                  <a:srgbClr val="990011"/>
+                </a:solidFill>
+                <a:latin typeface="Times New Roman" pitchFamily="34" charset="0"/>
+                <a:ea typeface="Times New Roman" pitchFamily="34" charset="-122"/>
+                <a:cs typeface="Times New Roman" pitchFamily="34" charset="-120"/>
+              </a:rPr>
+              <a:t>2. The Shape of the Earth</a:t>
+            </a:r>
+            <a:endParaRPr lang="en-US" sz="3600" dirty="0"/>
+          </a:p>
+        </p:txBody>
+      </p:sp>
+      <p:sp>
+        <p:nvSpPr>
+          <p:cNvPr id="4" name="Text 2"/>
+          <p:cNvSpPr/>
+          <p:nvPr/>
+        </p:nvSpPr>
+        <p:spPr>
+          <a:xfrm>
+            <a:off x="365760" y="1783080"/>
+            <a:ext cx="4846320" cy="4617720"/>
+          </a:xfrm>
+          <a:prstGeom prst="rect">
+            <a:avLst/>
+          </a:prstGeom>
+          <a:noFill/>
+          <a:ln/>
+        </p:spPr>
+        <p:txBody>
+          <a:bodyPr wrap="square" lIns="0" tIns="0" rIns="0" bIns="0" rtlCol="0" anchor="t"/>
+          <a:lstStyle/>
+          <a:p>
+            <a:pPr algn="l" indent="0" marL="0">
+              <a:spcAft>
+                <a:spcPts val="800"/>
+              </a:spcAft>
+              <a:buNone/>
+            </a:pPr>
+            <a:r>
+              <a:rPr lang="en-US" sz="3600" i="1" dirty="0">
+                <a:solidFill>
+                  <a:srgbClr val="111111"/>
+                </a:solidFill>
+                <a:latin typeface="Times New Roman" pitchFamily="34" charset="0"/>
+                <a:ea typeface="Times New Roman" pitchFamily="34" charset="-122"/>
+                <a:cs typeface="Times New Roman" pitchFamily="34" charset="-120"/>
+              </a:rPr>
+              <a:t>The shape of the Earth is described as follows:</a:t>
+            </a:r>
+            <a:endParaRPr lang="en-US" sz="3600" dirty="0"/>
+          </a:p>
+          <a:p>
+            <a:pPr algn="l" indent="0" marL="0">
+              <a:spcAft>
+                <a:spcPts val="800"/>
+              </a:spcAft>
+              <a:buNone/>
+            </a:pPr>
+            <a:r>
+              <a:rPr lang="en-US" sz="3600" b="1" dirty="0">
+                <a:solidFill>
+                  <a:srgbClr val="111111"/>
+                </a:solidFill>
+                <a:latin typeface="Times New Roman" pitchFamily="34" charset="0"/>
+                <a:ea typeface="Times New Roman" pitchFamily="34" charset="-122"/>
+                <a:cs typeface="Times New Roman" pitchFamily="34" charset="-120"/>
+              </a:rPr>
+              <a:t>Oblate spheroid: </a:t>
+            </a:r>
+            <a:pPr algn="l" indent="0" marL="0">
+              <a:spcAft>
+                <a:spcPts val="800"/>
+              </a:spcAft>
+              <a:buNone/>
+            </a:pPr>
+            <a:r>
+              <a:rPr lang="en-US" sz="3600" dirty="0">
+                <a:solidFill>
+                  <a:srgbClr val="111111"/>
+                </a:solidFill>
+                <a:latin typeface="Times New Roman" pitchFamily="34" charset="0"/>
+                <a:ea typeface="Times New Roman" pitchFamily="34" charset="-122"/>
+                <a:cs typeface="Times New Roman" pitchFamily="34" charset="-120"/>
+              </a:rPr>
+              <a:t>The Earth is round, slightly flattened at the poles and bulging at the Equator.</a:t>
+            </a:r>
+            <a:endParaRPr lang="en-US" sz="3600" dirty="0"/>
           </a:p>
         </p:txBody>
       </p:sp>
       <p:pic>
         <p:nvPicPr>
-          <p:cNvPr id="3" name="Image 0" descr="/home/claude/f4/img/minesec_sheet.png">    </p:cNvPr>
+          <p:cNvPr id="5" name="Image 0" descr="/home/claude/f4/img/v2/earth_shape_big.png">    </p:cNvPr>
           <p:cNvPicPr>
             <a:picLocks noChangeAspect="1"/>
           </p:cNvPicPr>
@@ -13007,8 +13737,8 @@
         </p:blipFill>
         <p:spPr>
           <a:xfrm>
-            <a:off x="0" y="658368"/>
-            <a:ext cx="5120640" cy="5833872"/>
+            <a:off x="5349240" y="2617506"/>
+            <a:ext cx="6659575" cy="2601397"/>
           </a:xfrm>
           <a:prstGeom prst="rect">
             <a:avLst/>
@@ -13017,14 +13747,14 @@
       </p:pic>
       <p:sp>
         <p:nvSpPr>
-          <p:cNvPr id="4" name="Text 1"/>
+          <p:cNvPr id="6" name="Text 3"/>
           <p:cNvSpPr/>
           <p:nvPr/>
         </p:nvSpPr>
         <p:spPr>
           <a:xfrm>
-            <a:off x="5349240" y="1005840"/>
-            <a:ext cx="6522415" cy="731520"/>
+            <a:off x="5349240" y="6089904"/>
+            <a:ext cx="6659575" cy="347472"/>
           </a:xfrm>
           <a:prstGeom prst="rect">
             <a:avLst/>
@@ -13033,68 +13763,24 @@
           <a:ln/>
         </p:spPr>
         <p:txBody>
-          <a:bodyPr wrap="square" lIns="0" tIns="0" rIns="0" bIns="0" rtlCol="0" anchor="ctr">
-            <a:normAutofit/>
-          </a:bodyPr>
+          <a:bodyPr wrap="square" lIns="0" tIns="0" rIns="0" bIns="0" rtlCol="0" anchor="ctr"/>
           <a:lstStyle/>
           <a:p>
             <a:pPr algn="ctr" indent="0" marL="0">
               <a:buNone/>
             </a:pPr>
             <a:r>
-              <a:rPr lang="en-US" sz="3600" b="1" dirty="0">
-                <a:solidFill>
-                  <a:srgbClr val="990011"/>
+              <a:rPr lang="en-US" sz="1600" i="1" dirty="0">
+                <a:solidFill>
+                  <a:srgbClr val="555555"/>
                 </a:solidFill>
                 <a:latin typeface="Times New Roman" pitchFamily="34" charset="0"/>
                 <a:ea typeface="Times New Roman" pitchFamily="34" charset="-122"/>
                 <a:cs typeface="Times New Roman" pitchFamily="34" charset="-120"/>
               </a:rPr>
-              <a:t>Evaluation 1</a:t>
-            </a:r>
-            <a:endParaRPr lang="en-US" sz="3600" dirty="0"/>
-          </a:p>
-        </p:txBody>
-      </p:sp>
-      <p:sp>
-        <p:nvSpPr>
-          <p:cNvPr id="5" name="Text 2"/>
-          <p:cNvSpPr/>
-          <p:nvPr/>
-        </p:nvSpPr>
-        <p:spPr>
-          <a:xfrm>
-            <a:off x="5349240" y="1783080"/>
-            <a:ext cx="6522415" cy="4663440"/>
-          </a:xfrm>
-          <a:prstGeom prst="rect">
-            <a:avLst/>
-          </a:prstGeom>
-          <a:noFill/>
-          <a:ln/>
-        </p:spPr>
-        <p:txBody>
-          <a:bodyPr wrap="square" lIns="0" tIns="0" rIns="0" bIns="0" rtlCol="0" anchor="t"/>
-          <a:lstStyle/>
-          <a:p>
-            <a:pPr algn="l" indent="0" marL="0">
-              <a:spcAft>
-                <a:spcPts val="800"/>
-              </a:spcAft>
-              <a:buNone/>
-            </a:pPr>
-            <a:r>
-              <a:rPr lang="en-US" sz="4000" dirty="0">
-                <a:solidFill>
-                  <a:srgbClr val="111111"/>
-                </a:solidFill>
-                <a:latin typeface="Times New Roman" pitchFamily="34" charset="0"/>
-                <a:ea typeface="Times New Roman" pitchFamily="34" charset="-122"/>
-                <a:cs typeface="Times New Roman" pitchFamily="34" charset="-120"/>
-              </a:rPr>
-              <a:t>What is the shape of the Earth?</a:t>
-            </a:r>
-            <a:endParaRPr lang="en-US" sz="4000" dirty="0"/>
+              <a:t>Illustration: the shape of the Earth</a:t>
+            </a:r>
+            <a:endParaRPr lang="en-US" sz="1600" dirty="0"/>
           </a:p>
         </p:txBody>
       </p:sp>
@@ -13204,7 +13890,7 @@
                 <a:ea typeface="Calibri" pitchFamily="34" charset="-122"/>
                 <a:cs typeface="Calibri" pitchFamily="34" charset="-120"/>
               </a:rPr>
-              <a:t>FORMATIVE EVALUATION</a:t>
+              <a:t>BOARD SUMMARY</a:t>
             </a:r>
             <a:endParaRPr lang="en-US" sz="1400" dirty="0"/>
           </a:p>
@@ -13269,7 +13955,7 @@
                 <a:ea typeface="Times New Roman" pitchFamily="34" charset="-122"/>
                 <a:cs typeface="Times New Roman" pitchFamily="34" charset="-120"/>
               </a:rPr>
-              <a:t>Expected Answer</a:t>
+              <a:t>2. The Shape of the Earth</a:t>
             </a:r>
             <a:endParaRPr lang="en-US" sz="3600" dirty="0"/>
           </a:p>
@@ -13303,7 +13989,7 @@
               <a:buNone/>
             </a:pPr>
             <a:r>
-              <a:rPr lang="en-US" sz="4000" dirty="0">
+              <a:rPr lang="en-US" sz="4000" b="1" dirty="0">
                 <a:solidFill>
                   <a:srgbClr val="111111"/>
                 </a:solidFill>
@@ -13311,7 +13997,24 @@
                 <a:ea typeface="Times New Roman" pitchFamily="34" charset="-122"/>
                 <a:cs typeface="Times New Roman" pitchFamily="34" charset="-120"/>
               </a:rPr>
-              <a:t>It is an oblate spheroid.</a:t>
+              <a:t>Evidence from the measurements: </a:t>
+            </a:r>
+            <a:pPr algn="l" indent="0" marL="0">
+              <a:spcAft>
+                <a:spcPts val="800"/>
+              </a:spcAft>
+              <a:buNone/>
+            </a:pPr>
+            <a:r>
+              <a:rPr lang="en-US" sz="4000" dirty="0">
+                <a:solidFill>
+                  <a:srgbClr val="111111"/>
+                </a:solidFill>
+                <a:latin typeface="Times New Roman" pitchFamily="34" charset="0"/>
+                <a:ea typeface="Times New Roman" pitchFamily="34" charset="-122"/>
+                <a:cs typeface="Times New Roman" pitchFamily="34" charset="-120"/>
+              </a:rPr>
+              <a:t>The equatorial diameter is about 42 km longer than the polar diameter.</a:t>
             </a:r>
             <a:endParaRPr lang="en-US" sz="4000" dirty="0"/>
           </a:p>
@@ -13423,15 +14126,135 @@
                 <a:ea typeface="Calibri" pitchFamily="34" charset="-122"/>
                 <a:cs typeface="Calibri" pitchFamily="34" charset="-120"/>
               </a:rPr>
-              <a:t>FORMATIVE EVALUATION</a:t>
+              <a:t>BOARD SUMMARY</a:t>
             </a:r>
             <a:endParaRPr lang="en-US" sz="1400" dirty="0"/>
+          </a:p>
+        </p:txBody>
+      </p:sp>
+      <p:sp>
+        <p:nvSpPr>
+          <p:cNvPr id="3" name="Text 1"/>
+          <p:cNvSpPr/>
+          <p:nvPr/>
+        </p:nvSpPr>
+        <p:spPr>
+          <a:xfrm>
+            <a:off x="365760" y="1005840"/>
+            <a:ext cx="11460175" cy="731520"/>
+          </a:xfrm>
+          <a:prstGeom prst="rect">
+            <a:avLst/>
+          </a:prstGeom>
+          <a:noFill/>
+          <a:ln/>
+        </p:spPr>
+        <p:txBody>
+          <a:bodyPr wrap="square" lIns="0" tIns="0" rIns="0" bIns="0" rtlCol="0" anchor="ctr">
+            <a:normAutofit/>
+          </a:bodyPr>
+          <a:lstStyle/>
+          <a:p>
+            <a:pPr algn="ctr" indent="0" marL="0">
+              <a:buNone/>
+            </a:pPr>
+            <a:r>
+              <a:rPr lang="en-US" sz="3600" b="1" dirty="0">
+                <a:solidFill>
+                  <a:srgbClr val="990011"/>
+                </a:solidFill>
+                <a:latin typeface="Times New Roman" pitchFamily="34" charset="0"/>
+                <a:ea typeface="Times New Roman" pitchFamily="34" charset="-122"/>
+                <a:cs typeface="Times New Roman" pitchFamily="34" charset="-120"/>
+              </a:rPr>
+              <a:t>3. Proofs that the Earth Is Spherical</a:t>
+            </a:r>
+            <a:endParaRPr lang="en-US" sz="3600" dirty="0"/>
+          </a:p>
+        </p:txBody>
+      </p:sp>
+      <p:sp>
+        <p:nvSpPr>
+          <p:cNvPr id="4" name="Text 2"/>
+          <p:cNvSpPr/>
+          <p:nvPr/>
+        </p:nvSpPr>
+        <p:spPr>
+          <a:xfrm>
+            <a:off x="365760" y="1783080"/>
+            <a:ext cx="4846320" cy="4617720"/>
+          </a:xfrm>
+          <a:prstGeom prst="rect">
+            <a:avLst/>
+          </a:prstGeom>
+          <a:noFill/>
+          <a:ln/>
+        </p:spPr>
+        <p:txBody>
+          <a:bodyPr wrap="square" lIns="0" tIns="0" rIns="0" bIns="0" rtlCol="0" anchor="t"/>
+          <a:lstStyle/>
+          <a:p>
+            <a:pPr algn="l" indent="0" marL="0">
+              <a:spcAft>
+                <a:spcPts val="800"/>
+              </a:spcAft>
+              <a:buNone/>
+            </a:pPr>
+            <a:r>
+              <a:rPr lang="en-US" sz="3600" i="1" dirty="0">
+                <a:solidFill>
+                  <a:srgbClr val="111111"/>
+                </a:solidFill>
+                <a:latin typeface="Times New Roman" pitchFamily="34" charset="0"/>
+                <a:ea typeface="Times New Roman" pitchFamily="34" charset="-122"/>
+                <a:cs typeface="Times New Roman" pitchFamily="34" charset="-120"/>
+              </a:rPr>
+              <a:t>The following observations prove that the Earth is round:</a:t>
+            </a:r>
+            <a:endParaRPr lang="en-US" sz="3600" dirty="0"/>
+          </a:p>
+          <a:p>
+            <a:pPr algn="l" indent="0" marL="0">
+              <a:spcAft>
+                <a:spcPts val="800"/>
+              </a:spcAft>
+              <a:buNone/>
+            </a:pPr>
+            <a:r>
+              <a:rPr lang="en-US" sz="3600" b="1" dirty="0">
+                <a:solidFill>
+                  <a:srgbClr val="111111"/>
+                </a:solidFill>
+                <a:latin typeface="Times New Roman" pitchFamily="34" charset="0"/>
+                <a:ea typeface="Times New Roman" pitchFamily="34" charset="-122"/>
+                <a:cs typeface="Times New Roman" pitchFamily="34" charset="-120"/>
+              </a:rPr>
+              <a:t>The ship at sea: </a:t>
+            </a:r>
+            <a:pPr algn="l" indent="0" marL="0">
+              <a:spcAft>
+                <a:spcPts val="800"/>
+              </a:spcAft>
+              <a:buNone/>
+            </a:pPr>
+            <a:r>
+              <a:rPr lang="en-US" sz="3600" dirty="0">
+                <a:solidFill>
+                  <a:srgbClr val="111111"/>
+                </a:solidFill>
+                <a:latin typeface="Times New Roman" pitchFamily="34" charset="0"/>
+                <a:ea typeface="Times New Roman" pitchFamily="34" charset="-122"/>
+                <a:cs typeface="Times New Roman" pitchFamily="34" charset="-120"/>
+              </a:rPr>
+              <a:t>When a ship sails away, its bottom disappears first and its top last.</a:t>
+            </a:r>
+            <a:endParaRPr lang="en-US" sz="3600" dirty="0"/>
           </a:p>
         </p:txBody>
       </p:sp>
       <p:pic>
         <p:nvPicPr>
-          <p:cNvPr id="3" name="Image 0" descr="/home/claude/f4/img/minesec_sheet.png">    </p:cNvPr>
+          <p:cNvPr id="5" name="Image 0" descr="/home/claude/f4/img/v2/ship_sailing_mid.png">    </p:cNvPr>
           <p:cNvPicPr>
             <a:picLocks noChangeAspect="1"/>
           </p:cNvPicPr>
@@ -13445,8 +14268,8 @@
         </p:blipFill>
         <p:spPr>
           <a:xfrm>
-            <a:off x="0" y="658368"/>
-            <a:ext cx="5120640" cy="5833872"/>
+            <a:off x="5349240" y="2617506"/>
+            <a:ext cx="6659575" cy="2601397"/>
           </a:xfrm>
           <a:prstGeom prst="rect">
             <a:avLst/>
@@ -13455,14 +14278,14 @@
       </p:pic>
       <p:sp>
         <p:nvSpPr>
-          <p:cNvPr id="4" name="Text 1"/>
+          <p:cNvPr id="6" name="Text 3"/>
           <p:cNvSpPr/>
           <p:nvPr/>
         </p:nvSpPr>
         <p:spPr>
           <a:xfrm>
-            <a:off x="5349240" y="1005840"/>
-            <a:ext cx="6522415" cy="731520"/>
+            <a:off x="5349240" y="6089904"/>
+            <a:ext cx="6659575" cy="347472"/>
           </a:xfrm>
           <a:prstGeom prst="rect">
             <a:avLst/>
@@ -13471,68 +14294,24 @@
           <a:ln/>
         </p:spPr>
         <p:txBody>
-          <a:bodyPr wrap="square" lIns="0" tIns="0" rIns="0" bIns="0" rtlCol="0" anchor="ctr">
-            <a:normAutofit/>
-          </a:bodyPr>
+          <a:bodyPr wrap="square" lIns="0" tIns="0" rIns="0" bIns="0" rtlCol="0" anchor="ctr"/>
           <a:lstStyle/>
           <a:p>
             <a:pPr algn="ctr" indent="0" marL="0">
               <a:buNone/>
             </a:pPr>
             <a:r>
-              <a:rPr lang="en-US" sz="3600" b="1" dirty="0">
-                <a:solidFill>
-                  <a:srgbClr val="990011"/>
+              <a:rPr lang="en-US" sz="1600" i="1" dirty="0">
+                <a:solidFill>
+                  <a:srgbClr val="555555"/>
                 </a:solidFill>
                 <a:latin typeface="Times New Roman" pitchFamily="34" charset="0"/>
                 <a:ea typeface="Times New Roman" pitchFamily="34" charset="-122"/>
                 <a:cs typeface="Times New Roman" pitchFamily="34" charset="-120"/>
               </a:rPr>
-              <a:t>Evaluation 2</a:t>
-            </a:r>
-            <a:endParaRPr lang="en-US" sz="3600" dirty="0"/>
-          </a:p>
-        </p:txBody>
-      </p:sp>
-      <p:sp>
-        <p:nvSpPr>
-          <p:cNvPr id="5" name="Text 2"/>
-          <p:cNvSpPr/>
-          <p:nvPr/>
-        </p:nvSpPr>
-        <p:spPr>
-          <a:xfrm>
-            <a:off x="5349240" y="1783080"/>
-            <a:ext cx="6522415" cy="4663440"/>
-          </a:xfrm>
-          <a:prstGeom prst="rect">
-            <a:avLst/>
-          </a:prstGeom>
-          <a:noFill/>
-          <a:ln/>
-        </p:spPr>
-        <p:txBody>
-          <a:bodyPr wrap="square" lIns="0" tIns="0" rIns="0" bIns="0" rtlCol="0" anchor="t"/>
-          <a:lstStyle/>
-          <a:p>
-            <a:pPr algn="l" indent="0" marL="0">
-              <a:spcAft>
-                <a:spcPts val="800"/>
-              </a:spcAft>
-              <a:buNone/>
-            </a:pPr>
-            <a:r>
-              <a:rPr lang="en-US" sz="4000" dirty="0">
-                <a:solidFill>
-                  <a:srgbClr val="111111"/>
-                </a:solidFill>
-                <a:latin typeface="Times New Roman" pitchFamily="34" charset="0"/>
-                <a:ea typeface="Times New Roman" pitchFamily="34" charset="-122"/>
-                <a:cs typeface="Times New Roman" pitchFamily="34" charset="-120"/>
-              </a:rPr>
-              <a:t>Give two proofs that the Earth is round.</a:t>
-            </a:r>
-            <a:endParaRPr lang="en-US" sz="4000" dirty="0"/>
+              <a:t>Illustration: the ship at sea</a:t>
+            </a:r>
+            <a:endParaRPr lang="en-US" sz="1600" dirty="0"/>
           </a:p>
         </p:txBody>
       </p:sp>
@@ -13642,15 +14421,115 @@
                 <a:ea typeface="Calibri" pitchFamily="34" charset="-122"/>
                 <a:cs typeface="Calibri" pitchFamily="34" charset="-120"/>
               </a:rPr>
-              <a:t>FORMATIVE EVALUATION</a:t>
+              <a:t>BOARD SUMMARY</a:t>
             </a:r>
             <a:endParaRPr lang="en-US" sz="1400" dirty="0"/>
+          </a:p>
+        </p:txBody>
+      </p:sp>
+      <p:sp>
+        <p:nvSpPr>
+          <p:cNvPr id="3" name="Text 1"/>
+          <p:cNvSpPr/>
+          <p:nvPr/>
+        </p:nvSpPr>
+        <p:spPr>
+          <a:xfrm>
+            <a:off x="365760" y="1005840"/>
+            <a:ext cx="11460175" cy="731520"/>
+          </a:xfrm>
+          <a:prstGeom prst="rect">
+            <a:avLst/>
+          </a:prstGeom>
+          <a:noFill/>
+          <a:ln/>
+        </p:spPr>
+        <p:txBody>
+          <a:bodyPr wrap="square" lIns="0" tIns="0" rIns="0" bIns="0" rtlCol="0" anchor="ctr">
+            <a:normAutofit/>
+          </a:bodyPr>
+          <a:lstStyle/>
+          <a:p>
+            <a:pPr algn="ctr" indent="0" marL="0">
+              <a:buNone/>
+            </a:pPr>
+            <a:r>
+              <a:rPr lang="en-US" sz="3600" b="1" dirty="0">
+                <a:solidFill>
+                  <a:srgbClr val="990011"/>
+                </a:solidFill>
+                <a:latin typeface="Times New Roman" pitchFamily="34" charset="0"/>
+                <a:ea typeface="Times New Roman" pitchFamily="34" charset="-122"/>
+                <a:cs typeface="Times New Roman" pitchFamily="34" charset="-120"/>
+              </a:rPr>
+              <a:t>3. Proofs that the Earth Is Spherical</a:t>
+            </a:r>
+            <a:endParaRPr lang="en-US" sz="3600" dirty="0"/>
+          </a:p>
+        </p:txBody>
+      </p:sp>
+      <p:sp>
+        <p:nvSpPr>
+          <p:cNvPr id="4" name="Text 2"/>
+          <p:cNvSpPr/>
+          <p:nvPr/>
+        </p:nvSpPr>
+        <p:spPr>
+          <a:xfrm>
+            <a:off x="365760" y="1783080"/>
+            <a:ext cx="4846320" cy="4617720"/>
+          </a:xfrm>
+          <a:prstGeom prst="rect">
+            <a:avLst/>
+          </a:prstGeom>
+          <a:noFill/>
+          <a:ln/>
+        </p:spPr>
+        <p:txBody>
+          <a:bodyPr wrap="square" lIns="0" tIns="0" rIns="0" bIns="0" rtlCol="0" anchor="t"/>
+          <a:lstStyle/>
+          <a:p>
+            <a:pPr algn="l" indent="0" marL="0">
+              <a:spcAft>
+                <a:spcPts val="800"/>
+              </a:spcAft>
+              <a:buNone/>
+            </a:pPr>
+            <a:r>
+              <a:rPr lang="en-US" sz="3600" b="1" dirty="0">
+                <a:solidFill>
+                  <a:srgbClr val="111111"/>
+                </a:solidFill>
+                <a:latin typeface="Times New Roman" pitchFamily="34" charset="0"/>
+                <a:ea typeface="Times New Roman" pitchFamily="34" charset="-122"/>
+                <a:cs typeface="Times New Roman" pitchFamily="34" charset="-120"/>
+              </a:rPr>
+              <a:t>The eclipse of the Moon: </a:t>
+            </a:r>
+            <a:pPr algn="l" indent="0" marL="0">
+              <a:spcAft>
+                <a:spcPts val="800"/>
+              </a:spcAft>
+              <a:buNone/>
+            </a:pPr>
+            <a:r>
+              <a:rPr lang="en-US" sz="3600" dirty="0">
+                <a:solidFill>
+                  <a:srgbClr val="111111"/>
+                </a:solidFill>
+                <a:latin typeface="Times New Roman" pitchFamily="34" charset="0"/>
+                <a:ea typeface="Times New Roman" pitchFamily="34" charset="-122"/>
+                <a:cs typeface="Times New Roman" pitchFamily="34" charset="-120"/>
+              </a:rPr>
+              <a:t>The shadow of the Earth on the Moon is always curved.</a:t>
+            </a:r>
+            <a:endParaRPr lang="en-US" sz="3600" dirty="0"/>
           </a:p>
         </p:txBody>
       </p:sp>
       <p:pic>
         <p:nvPicPr>
-          <p:cNvPr id="3" name="Image 0" descr="/home/claude/f4/img/minesec_sheet.png">    </p:cNvPr>
+          <p:cNvPr id="5" name="Image 0" descr="/home/claude/f4/img/v2/eclipse_big.png">    </p:cNvPr>
           <p:cNvPicPr>
             <a:picLocks noChangeAspect="1"/>
           </p:cNvPicPr>
@@ -13664,8 +14543,8 @@
         </p:blipFill>
         <p:spPr>
           <a:xfrm>
-            <a:off x="0" y="658368"/>
-            <a:ext cx="5120640" cy="5833872"/>
+            <a:off x="5349240" y="2617506"/>
+            <a:ext cx="6659575" cy="2601397"/>
           </a:xfrm>
           <a:prstGeom prst="rect">
             <a:avLst/>
@@ -13674,14 +14553,14 @@
       </p:pic>
       <p:sp>
         <p:nvSpPr>
-          <p:cNvPr id="4" name="Text 1"/>
+          <p:cNvPr id="6" name="Text 3"/>
           <p:cNvSpPr/>
           <p:nvPr/>
         </p:nvSpPr>
         <p:spPr>
           <a:xfrm>
-            <a:off x="5349240" y="1005840"/>
-            <a:ext cx="6522415" cy="731520"/>
+            <a:off x="5349240" y="6089904"/>
+            <a:ext cx="6659575" cy="347472"/>
           </a:xfrm>
           <a:prstGeom prst="rect">
             <a:avLst/>
@@ -13690,68 +14569,24 @@
           <a:ln/>
         </p:spPr>
         <p:txBody>
-          <a:bodyPr wrap="square" lIns="0" tIns="0" rIns="0" bIns="0" rtlCol="0" anchor="ctr">
-            <a:normAutofit/>
-          </a:bodyPr>
+          <a:bodyPr wrap="square" lIns="0" tIns="0" rIns="0" bIns="0" rtlCol="0" anchor="ctr"/>
           <a:lstStyle/>
           <a:p>
             <a:pPr algn="ctr" indent="0" marL="0">
               <a:buNone/>
             </a:pPr>
             <a:r>
-              <a:rPr lang="en-US" sz="3600" b="1" dirty="0">
-                <a:solidFill>
-                  <a:srgbClr val="990011"/>
+              <a:rPr lang="en-US" sz="1600" i="1" dirty="0">
+                <a:solidFill>
+                  <a:srgbClr val="555555"/>
                 </a:solidFill>
                 <a:latin typeface="Times New Roman" pitchFamily="34" charset="0"/>
                 <a:ea typeface="Times New Roman" pitchFamily="34" charset="-122"/>
                 <a:cs typeface="Times New Roman" pitchFamily="34" charset="-120"/>
               </a:rPr>
-              <a:t>Expected Answer</a:t>
-            </a:r>
-            <a:endParaRPr lang="en-US" sz="3600" dirty="0"/>
-          </a:p>
-        </p:txBody>
-      </p:sp>
-      <p:sp>
-        <p:nvSpPr>
-          <p:cNvPr id="5" name="Text 2"/>
-          <p:cNvSpPr/>
-          <p:nvPr/>
-        </p:nvSpPr>
-        <p:spPr>
-          <a:xfrm>
-            <a:off x="5349240" y="1783080"/>
-            <a:ext cx="6522415" cy="4663440"/>
-          </a:xfrm>
-          <a:prstGeom prst="rect">
-            <a:avLst/>
-          </a:prstGeom>
-          <a:noFill/>
-          <a:ln/>
-        </p:spPr>
-        <p:txBody>
-          <a:bodyPr wrap="square" lIns="0" tIns="0" rIns="0" bIns="0" rtlCol="0" anchor="t"/>
-          <a:lstStyle/>
-          <a:p>
-            <a:pPr algn="l" indent="0" marL="0">
-              <a:spcAft>
-                <a:spcPts val="800"/>
-              </a:spcAft>
-              <a:buNone/>
-            </a:pPr>
-            <a:r>
-              <a:rPr lang="en-US" sz="4000" dirty="0">
-                <a:solidFill>
-                  <a:srgbClr val="111111"/>
-                </a:solidFill>
-                <a:latin typeface="Times New Roman" pitchFamily="34" charset="0"/>
-                <a:ea typeface="Times New Roman" pitchFamily="34" charset="-122"/>
-                <a:cs typeface="Times New Roman" pitchFamily="34" charset="-120"/>
-              </a:rPr>
-              <a:t>The ship at sea and the round shadow of the Earth on the Moon.</a:t>
-            </a:r>
-            <a:endParaRPr lang="en-US" sz="4000" dirty="0"/>
+              <a:t>Illustration: an eclipse of the Moon</a:t>
+            </a:r>
+            <a:endParaRPr lang="en-US" sz="1600" dirty="0"/>
           </a:p>
         </p:txBody>
       </p:sp>
@@ -13861,15 +14696,115 @@
                 <a:ea typeface="Calibri" pitchFamily="34" charset="-122"/>
                 <a:cs typeface="Calibri" pitchFamily="34" charset="-120"/>
               </a:rPr>
-              <a:t>REMEDIATION</a:t>
+              <a:t>BOARD SUMMARY</a:t>
             </a:r>
             <a:endParaRPr lang="en-US" sz="1400" dirty="0"/>
+          </a:p>
+        </p:txBody>
+      </p:sp>
+      <p:sp>
+        <p:nvSpPr>
+          <p:cNvPr id="3" name="Text 1"/>
+          <p:cNvSpPr/>
+          <p:nvPr/>
+        </p:nvSpPr>
+        <p:spPr>
+          <a:xfrm>
+            <a:off x="365760" y="1005840"/>
+            <a:ext cx="11460175" cy="731520"/>
+          </a:xfrm>
+          <a:prstGeom prst="rect">
+            <a:avLst/>
+          </a:prstGeom>
+          <a:noFill/>
+          <a:ln/>
+        </p:spPr>
+        <p:txBody>
+          <a:bodyPr wrap="square" lIns="0" tIns="0" rIns="0" bIns="0" rtlCol="0" anchor="ctr">
+            <a:normAutofit/>
+          </a:bodyPr>
+          <a:lstStyle/>
+          <a:p>
+            <a:pPr algn="ctr" indent="0" marL="0">
+              <a:buNone/>
+            </a:pPr>
+            <a:r>
+              <a:rPr lang="en-US" sz="3600" b="1" dirty="0">
+                <a:solidFill>
+                  <a:srgbClr val="990011"/>
+                </a:solidFill>
+                <a:latin typeface="Times New Roman" pitchFamily="34" charset="0"/>
+                <a:ea typeface="Times New Roman" pitchFamily="34" charset="-122"/>
+                <a:cs typeface="Times New Roman" pitchFamily="34" charset="-120"/>
+              </a:rPr>
+              <a:t>3. Proofs that the Earth Is Spherical</a:t>
+            </a:r>
+            <a:endParaRPr lang="en-US" sz="3600" dirty="0"/>
+          </a:p>
+        </p:txBody>
+      </p:sp>
+      <p:sp>
+        <p:nvSpPr>
+          <p:cNvPr id="4" name="Text 2"/>
+          <p:cNvSpPr/>
+          <p:nvPr/>
+        </p:nvSpPr>
+        <p:spPr>
+          <a:xfrm>
+            <a:off x="365760" y="1783080"/>
+            <a:ext cx="4846320" cy="4617720"/>
+          </a:xfrm>
+          <a:prstGeom prst="rect">
+            <a:avLst/>
+          </a:prstGeom>
+          <a:noFill/>
+          <a:ln/>
+        </p:spPr>
+        <p:txBody>
+          <a:bodyPr wrap="square" lIns="0" tIns="0" rIns="0" bIns="0" rtlCol="0" anchor="t"/>
+          <a:lstStyle/>
+          <a:p>
+            <a:pPr algn="l" indent="0" marL="0">
+              <a:spcAft>
+                <a:spcPts val="800"/>
+              </a:spcAft>
+              <a:buNone/>
+            </a:pPr>
+            <a:r>
+              <a:rPr lang="en-US" sz="3600" b="1" dirty="0">
+                <a:solidFill>
+                  <a:srgbClr val="111111"/>
+                </a:solidFill>
+                <a:latin typeface="Times New Roman" pitchFamily="34" charset="0"/>
+                <a:ea typeface="Times New Roman" pitchFamily="34" charset="-122"/>
+                <a:cs typeface="Times New Roman" pitchFamily="34" charset="-120"/>
+              </a:rPr>
+              <a:t>Photos from space: </a:t>
+            </a:r>
+            <a:pPr algn="l" indent="0" marL="0">
+              <a:spcAft>
+                <a:spcPts val="800"/>
+              </a:spcAft>
+              <a:buNone/>
+            </a:pPr>
+            <a:r>
+              <a:rPr lang="en-US" sz="3600" dirty="0">
+                <a:solidFill>
+                  <a:srgbClr val="111111"/>
+                </a:solidFill>
+                <a:latin typeface="Times New Roman" pitchFamily="34" charset="0"/>
+                <a:ea typeface="Times New Roman" pitchFamily="34" charset="-122"/>
+                <a:cs typeface="Times New Roman" pitchFamily="34" charset="-120"/>
+              </a:rPr>
+              <a:t>Photos taken from satellites and spacecraft show a round Earth.</a:t>
+            </a:r>
+            <a:endParaRPr lang="en-US" sz="3600" dirty="0"/>
           </a:p>
         </p:txBody>
       </p:sp>
       <p:pic>
         <p:nvPicPr>
-          <p:cNvPr id="3" name="Image 0" descr="/home/claude/f4/img/minesec_sheet.png">    </p:cNvPr>
+          <p:cNvPr id="5" name="Image 0" descr="/home/claude/f4/img/v2/f4_earth_space.jpg">    </p:cNvPr>
           <p:cNvPicPr>
             <a:picLocks noChangeAspect="1"/>
           </p:cNvPicPr>
@@ -13883,8 +14818,8 @@
         </p:blipFill>
         <p:spPr>
           <a:xfrm>
-            <a:off x="0" y="658368"/>
-            <a:ext cx="3840480" cy="5833872"/>
+            <a:off x="5349240" y="2045198"/>
+            <a:ext cx="6659575" cy="3746011"/>
           </a:xfrm>
           <a:prstGeom prst="rect">
             <a:avLst/>
@@ -13893,14 +14828,14 @@
       </p:pic>
       <p:sp>
         <p:nvSpPr>
-          <p:cNvPr id="4" name="Text 1"/>
+          <p:cNvPr id="6" name="Text 3"/>
           <p:cNvSpPr/>
           <p:nvPr/>
         </p:nvSpPr>
         <p:spPr>
           <a:xfrm>
-            <a:off x="4069080" y="1005840"/>
-            <a:ext cx="7802575" cy="731520"/>
+            <a:off x="5349240" y="6089904"/>
+            <a:ext cx="6659575" cy="347472"/>
           </a:xfrm>
           <a:prstGeom prst="rect">
             <a:avLst/>
@@ -13909,134 +14844,24 @@
           <a:ln/>
         </p:spPr>
         <p:txBody>
-          <a:bodyPr wrap="square" lIns="0" tIns="0" rIns="0" bIns="0" rtlCol="0" anchor="ctr">
-            <a:normAutofit/>
-          </a:bodyPr>
+          <a:bodyPr wrap="square" lIns="0" tIns="0" rIns="0" bIns="0" rtlCol="0" anchor="ctr"/>
           <a:lstStyle/>
           <a:p>
             <a:pPr algn="ctr" indent="0" marL="0">
               <a:buNone/>
             </a:pPr>
             <a:r>
-              <a:rPr lang="en-US" sz="3600" b="1" dirty="0">
-                <a:solidFill>
-                  <a:srgbClr val="990011"/>
+              <a:rPr lang="en-US" sz="1600" i="1" dirty="0">
+                <a:solidFill>
+                  <a:srgbClr val="555555"/>
                 </a:solidFill>
                 <a:latin typeface="Times New Roman" pitchFamily="34" charset="0"/>
                 <a:ea typeface="Times New Roman" pitchFamily="34" charset="-122"/>
                 <a:cs typeface="Times New Roman" pitchFamily="34" charset="-120"/>
               </a:rPr>
-              <a:t>Remediation</a:t>
-            </a:r>
-            <a:endParaRPr lang="en-US" sz="3600" dirty="0"/>
-          </a:p>
-        </p:txBody>
-      </p:sp>
-      <p:sp>
-        <p:nvSpPr>
-          <p:cNvPr id="5" name="Text 2"/>
-          <p:cNvSpPr/>
-          <p:nvPr/>
-        </p:nvSpPr>
-        <p:spPr>
-          <a:xfrm>
-            <a:off x="4069080" y="1783080"/>
-            <a:ext cx="7802575" cy="4663440"/>
-          </a:xfrm>
-          <a:prstGeom prst="rect">
-            <a:avLst/>
-          </a:prstGeom>
-          <a:noFill/>
-          <a:ln/>
-        </p:spPr>
-        <p:txBody>
-          <a:bodyPr wrap="square" lIns="0" tIns="0" rIns="0" bIns="0" rtlCol="0" anchor="t"/>
-          <a:lstStyle/>
-          <a:p>
-            <a:pPr algn="l" indent="0" marL="0">
-              <a:spcAft>
-                <a:spcPts val="800"/>
-              </a:spcAft>
-              <a:buNone/>
-            </a:pPr>
-            <a:r>
-              <a:rPr lang="en-US" sz="4000" b="1" dirty="0">
-                <a:solidFill>
-                  <a:srgbClr val="111111"/>
-                </a:solidFill>
-                <a:latin typeface="Times New Roman" pitchFamily="34" charset="0"/>
-                <a:ea typeface="Times New Roman" pitchFamily="34" charset="-122"/>
-                <a:cs typeface="Times New Roman" pitchFamily="34" charset="-120"/>
-              </a:rPr>
-              <a:t>Fill in the blanks:</a:t>
-            </a:r>
-            <a:endParaRPr lang="en-US" sz="4000" dirty="0"/>
-          </a:p>
-          <a:p>
-            <a:pPr algn="l" marL="342900" indent="-342900">
-              <a:spcAft>
-                <a:spcPts val="800"/>
-              </a:spcAft>
-              <a:buSzPct val="100000"/>
-              <a:buFont typeface="+mj-lt"/>
-              <a:buAutoNum type="arabicPeriod" startAt="1"/>
-            </a:pPr>
-            <a:r>
-              <a:rPr lang="en-US" sz="4000" dirty="0">
-                <a:solidFill>
-                  <a:srgbClr val="111111"/>
-                </a:solidFill>
-                <a:latin typeface="Times New Roman" pitchFamily="34" charset="0"/>
-                <a:ea typeface="Times New Roman" pitchFamily="34" charset="-122"/>
-                <a:cs typeface="Times New Roman" pitchFamily="34" charset="-120"/>
-              </a:rPr>
-              <a:t>The Earth is flat at the ______.</a:t>
-            </a:r>
-            <a:endParaRPr lang="en-US" sz="4000" dirty="0"/>
-          </a:p>
-          <a:p>
-            <a:pPr algn="l" marL="342900" indent="-342900">
-              <a:spcAft>
-                <a:spcPts val="800"/>
-              </a:spcAft>
-              <a:buSzPct val="100000"/>
-              <a:buFont typeface="+mj-lt"/>
-              <a:buAutoNum type="arabicPeriod" startAt="1"/>
-            </a:pPr>
-            <a:r>
-              <a:rPr lang="en-US" sz="4000" dirty="0">
-                <a:solidFill>
-                  <a:srgbClr val="111111"/>
-                </a:solidFill>
-                <a:latin typeface="Times New Roman" pitchFamily="34" charset="0"/>
-                <a:ea typeface="Times New Roman" pitchFamily="34" charset="-122"/>
-                <a:cs typeface="Times New Roman" pitchFamily="34" charset="-120"/>
-              </a:rPr>
-              <a:t>The Earth is wider at the ______.</a:t>
-            </a:r>
-            <a:endParaRPr lang="en-US" sz="4000" dirty="0"/>
-          </a:p>
-          <a:p>
-            <a:pPr algn="l" marL="342900" indent="-342900">
-              <a:spcAft>
-                <a:spcPts val="800"/>
-              </a:spcAft>
-              <a:buSzPct val="100000"/>
-              <a:buFont typeface="+mj-lt"/>
-              <a:buAutoNum type="arabicPeriod" startAt="1"/>
-            </a:pPr>
-            <a:r>
-              <a:rPr lang="en-US" sz="4000" dirty="0">
-                <a:solidFill>
-                  <a:srgbClr val="111111"/>
-                </a:solidFill>
-                <a:latin typeface="Times New Roman" pitchFamily="34" charset="0"/>
-                <a:ea typeface="Times New Roman" pitchFamily="34" charset="-122"/>
-                <a:cs typeface="Times New Roman" pitchFamily="34" charset="-120"/>
-              </a:rPr>
-              <a:t>The shadow of the Earth on the Moon is ______.</a:t>
-            </a:r>
-            <a:endParaRPr lang="en-US" sz="4000" dirty="0"/>
+              <a:t>Illustration: the Earth seen from space</a:t>
+            </a:r>
+            <a:endParaRPr lang="en-US" sz="1600" dirty="0"/>
           </a:p>
         </p:txBody>
       </p:sp>
@@ -14146,7 +14971,7 @@
                 <a:ea typeface="Calibri" pitchFamily="34" charset="-122"/>
                 <a:cs typeface="Calibri" pitchFamily="34" charset="-120"/>
               </a:rPr>
-              <a:t>HOMEWORK</a:t>
+              <a:t>BOARD SUMMARY</a:t>
             </a:r>
             <a:endParaRPr lang="en-US" sz="1400" dirty="0"/>
           </a:p>
@@ -14169,7 +14994,7 @@
         <p:spPr>
           <a:xfrm>
             <a:off x="0" y="658368"/>
-            <a:ext cx="5120640" cy="5833872"/>
+            <a:ext cx="2468880" cy="5833872"/>
           </a:xfrm>
           <a:prstGeom prst="rect">
             <a:avLst/>
@@ -14184,8 +15009,8 @@
         </p:nvSpPr>
         <p:spPr>
           <a:xfrm>
-            <a:off x="5349240" y="1005840"/>
-            <a:ext cx="6522415" cy="731520"/>
+            <a:off x="2697480" y="1005840"/>
+            <a:ext cx="9174175" cy="731520"/>
           </a:xfrm>
           <a:prstGeom prst="rect">
             <a:avLst/>
@@ -14211,7 +15036,7 @@
                 <a:ea typeface="Times New Roman" pitchFamily="34" charset="-122"/>
                 <a:cs typeface="Times New Roman" pitchFamily="34" charset="-120"/>
               </a:rPr>
-              <a:t>Homework</a:t>
+              <a:t>3. Proofs that the Earth Is Spherical</a:t>
             </a:r>
             <a:endParaRPr lang="en-US" sz="3600" dirty="0"/>
           </a:p>
@@ -14225,8 +15050,8 @@
         </p:nvSpPr>
         <p:spPr>
           <a:xfrm>
-            <a:off x="5349240" y="1783080"/>
-            <a:ext cx="6522415" cy="4663440"/>
+            <a:off x="2697480" y="1783080"/>
+            <a:ext cx="9174175" cy="4663440"/>
           </a:xfrm>
           <a:prstGeom prst="rect">
             <a:avLst/>
@@ -14245,7 +15070,7 @@
               <a:buNone/>
             </a:pPr>
             <a:r>
-              <a:rPr lang="en-US" sz="4000" dirty="0">
+              <a:rPr lang="en-US" sz="4000" b="1" dirty="0">
                 <a:solidFill>
                   <a:srgbClr val="111111"/>
                 </a:solidFill>
@@ -14253,7 +15078,61 @@
                 <a:ea typeface="Times New Roman" pitchFamily="34" charset="-122"/>
                 <a:cs typeface="Times New Roman" pitchFamily="34" charset="-120"/>
               </a:rPr>
-              <a:t>Look at the Moon on three different evenings this week. Draw its shape each time and write the date under each drawing.</a:t>
+              <a:t>Travel around the world: </a:t>
+            </a:r>
+            <a:pPr algn="l" indent="0" marL="0">
+              <a:spcAft>
+                <a:spcPts val="800"/>
+              </a:spcAft>
+              <a:buNone/>
+            </a:pPr>
+            <a:r>
+              <a:rPr lang="en-US" sz="4000" dirty="0">
+                <a:solidFill>
+                  <a:srgbClr val="111111"/>
+                </a:solidFill>
+                <a:latin typeface="Times New Roman" pitchFamily="34" charset="0"/>
+                <a:ea typeface="Times New Roman" pitchFamily="34" charset="-122"/>
+                <a:cs typeface="Times New Roman" pitchFamily="34" charset="-120"/>
+              </a:rPr>
+              <a:t>A traveller who goes always in one direction comes back to the starting point.</a:t>
+            </a:r>
+            <a:endParaRPr lang="en-US" sz="4000" dirty="0"/>
+          </a:p>
+          <a:p>
+            <a:pPr algn="l" indent="0" marL="0">
+              <a:spcAft>
+                <a:spcPts val="800"/>
+              </a:spcAft>
+              <a:buNone/>
+            </a:pPr>
+            <a:r>
+              <a:rPr lang="en-US" sz="4000" b="1" dirty="0">
+                <a:solidFill>
+                  <a:srgbClr val="111111"/>
+                </a:solidFill>
+                <a:latin typeface="Times New Roman" pitchFamily="34" charset="0"/>
+                <a:ea typeface="Times New Roman" pitchFamily="34" charset="-122"/>
+                <a:cs typeface="Times New Roman" pitchFamily="34" charset="-120"/>
+              </a:rPr>
+              <a:t>The circular horizon: </a:t>
+            </a:r>
+            <a:pPr algn="l" indent="0" marL="0">
+              <a:spcAft>
+                <a:spcPts val="800"/>
+              </a:spcAft>
+              <a:buNone/>
+            </a:pPr>
+            <a:r>
+              <a:rPr lang="en-US" sz="4000" dirty="0">
+                <a:solidFill>
+                  <a:srgbClr val="111111"/>
+                </a:solidFill>
+                <a:latin typeface="Times New Roman" pitchFamily="34" charset="0"/>
+                <a:ea typeface="Times New Roman" pitchFamily="34" charset="-122"/>
+                <a:cs typeface="Times New Roman" pitchFamily="34" charset="-120"/>
+              </a:rPr>
+              <a:t>From a high place, the horizon is always a circle, and it widens as we go higher.</a:t>
             </a:r>
             <a:endParaRPr lang="en-US" sz="4000" dirty="0"/>
           </a:p>
@@ -14674,7 +15553,7 @@
                 <a:ea typeface="Calibri" pitchFamily="34" charset="-122"/>
                 <a:cs typeface="Calibri" pitchFamily="34" charset="-120"/>
               </a:rPr>
-              <a:t>NEXT LESSON</a:t>
+              <a:t>BOARD SUMMARY</a:t>
             </a:r>
             <a:endParaRPr lang="en-US" sz="1400" dirty="0"/>
           </a:p>
@@ -14739,7 +15618,7 @@
                 <a:ea typeface="Times New Roman" pitchFamily="34" charset="-122"/>
                 <a:cs typeface="Times New Roman" pitchFamily="34" charset="-120"/>
               </a:rPr>
-              <a:t>Next Lesson</a:t>
+              <a:t>3. Proofs that the Earth Is Spherical (continued)</a:t>
             </a:r>
             <a:endParaRPr lang="en-US" sz="3600" dirty="0"/>
           </a:p>
@@ -14763,10 +15642,10 @@
           <a:ln/>
         </p:spPr>
         <p:txBody>
-          <a:bodyPr wrap="square" lIns="0" tIns="0" rIns="0" bIns="0" rtlCol="0" anchor="ctr"/>
-          <a:lstStyle/>
-          <a:p>
-            <a:pPr algn="ctr" indent="0" marL="0">
+          <a:bodyPr wrap="square" lIns="0" tIns="0" rIns="0" bIns="0" rtlCol="0" anchor="t"/>
+          <a:lstStyle/>
+          <a:p>
+            <a:pPr algn="l" indent="0" marL="0">
               <a:spcAft>
                 <a:spcPts val="800"/>
               </a:spcAft>
@@ -14781,27 +15660,24 @@
                 <a:ea typeface="Times New Roman" pitchFamily="34" charset="-122"/>
                 <a:cs typeface="Times New Roman" pitchFamily="34" charset="-120"/>
               </a:rPr>
-              <a:t>Our next lesson will be on:</a:t>
-            </a:r>
-            <a:endParaRPr lang="en-US" sz="4000" dirty="0"/>
-          </a:p>
-          <a:p>
-            <a:pPr algn="ctr" indent="0" marL="0">
+              <a:t>Sunrise at different times: </a:t>
+            </a:r>
+            <a:pPr algn="l" indent="0" marL="0">
               <a:spcAft>
                 <a:spcPts val="800"/>
               </a:spcAft>
               <a:buNone/>
             </a:pPr>
             <a:r>
-              <a:rPr lang="en-US" sz="4000" b="1" dirty="0">
-                <a:solidFill>
-                  <a:srgbClr val="990011"/>
+              <a:rPr lang="en-US" sz="4000" dirty="0">
+                <a:solidFill>
+                  <a:srgbClr val="111111"/>
                 </a:solidFill>
                 <a:latin typeface="Times New Roman" pitchFamily="34" charset="0"/>
                 <a:ea typeface="Times New Roman" pitchFamily="34" charset="-122"/>
                 <a:cs typeface="Times New Roman" pitchFamily="34" charset="-120"/>
               </a:rPr>
-              <a:t>Further Study 1: The Universe and the Moon</a:t>
+              <a:t>The Sun rises earlier in the east than in the west, because the surface is curved.</a:t>
             </a:r>
             <a:endParaRPr lang="en-US" sz="4000" dirty="0"/>
           </a:p>
@@ -14913,6 +15789,1625 @@
                 <a:ea typeface="Calibri" pitchFamily="34" charset="-122"/>
                 <a:cs typeface="Calibri" pitchFamily="34" charset="-120"/>
               </a:rPr>
+              <a:t>FORMATIVE EVALUATION</a:t>
+            </a:r>
+            <a:endParaRPr lang="en-US" sz="1400" dirty="0"/>
+          </a:p>
+        </p:txBody>
+      </p:sp>
+      <p:pic>
+        <p:nvPicPr>
+          <p:cNvPr id="3" name="Image 0" descr="/home/claude/f4/img/minesec_sheet.png">    </p:cNvPr>
+          <p:cNvPicPr>
+            <a:picLocks noChangeAspect="1"/>
+          </p:cNvPicPr>
+          <p:nvPr/>
+        </p:nvPicPr>
+        <p:blipFill>
+          <a:blip r:embed="rId1"/>
+          <a:stretch>
+            <a:fillRect/>
+          </a:stretch>
+        </p:blipFill>
+        <p:spPr>
+          <a:xfrm>
+            <a:off x="0" y="658368"/>
+            <a:ext cx="5120640" cy="5833872"/>
+          </a:xfrm>
+          <a:prstGeom prst="rect">
+            <a:avLst/>
+          </a:prstGeom>
+        </p:spPr>
+      </p:pic>
+      <p:sp>
+        <p:nvSpPr>
+          <p:cNvPr id="4" name="Text 1"/>
+          <p:cNvSpPr/>
+          <p:nvPr/>
+        </p:nvSpPr>
+        <p:spPr>
+          <a:xfrm>
+            <a:off x="5349240" y="1005840"/>
+            <a:ext cx="6522415" cy="731520"/>
+          </a:xfrm>
+          <a:prstGeom prst="rect">
+            <a:avLst/>
+          </a:prstGeom>
+          <a:noFill/>
+          <a:ln/>
+        </p:spPr>
+        <p:txBody>
+          <a:bodyPr wrap="square" lIns="0" tIns="0" rIns="0" bIns="0" rtlCol="0" anchor="ctr">
+            <a:normAutofit/>
+          </a:bodyPr>
+          <a:lstStyle/>
+          <a:p>
+            <a:pPr algn="ctr" indent="0" marL="0">
+              <a:buNone/>
+            </a:pPr>
+            <a:r>
+              <a:rPr lang="en-US" sz="3600" b="1" dirty="0">
+                <a:solidFill>
+                  <a:srgbClr val="990011"/>
+                </a:solidFill>
+                <a:latin typeface="Times New Roman" pitchFamily="34" charset="0"/>
+                <a:ea typeface="Times New Roman" pitchFamily="34" charset="-122"/>
+                <a:cs typeface="Times New Roman" pitchFamily="34" charset="-120"/>
+              </a:rPr>
+              <a:t>Evaluation 1</a:t>
+            </a:r>
+            <a:endParaRPr lang="en-US" sz="3600" dirty="0"/>
+          </a:p>
+        </p:txBody>
+      </p:sp>
+      <p:sp>
+        <p:nvSpPr>
+          <p:cNvPr id="5" name="Text 2"/>
+          <p:cNvSpPr/>
+          <p:nvPr/>
+        </p:nvSpPr>
+        <p:spPr>
+          <a:xfrm>
+            <a:off x="5349240" y="1783080"/>
+            <a:ext cx="6522415" cy="4663440"/>
+          </a:xfrm>
+          <a:prstGeom prst="rect">
+            <a:avLst/>
+          </a:prstGeom>
+          <a:noFill/>
+          <a:ln/>
+        </p:spPr>
+        <p:txBody>
+          <a:bodyPr wrap="square" lIns="0" tIns="0" rIns="0" bIns="0" rtlCol="0" anchor="t"/>
+          <a:lstStyle/>
+          <a:p>
+            <a:pPr algn="l" indent="0" marL="0">
+              <a:spcAft>
+                <a:spcPts val="800"/>
+              </a:spcAft>
+              <a:buNone/>
+            </a:pPr>
+            <a:r>
+              <a:rPr lang="en-US" sz="4000" dirty="0">
+                <a:solidFill>
+                  <a:srgbClr val="111111"/>
+                </a:solidFill>
+                <a:latin typeface="Times New Roman" pitchFamily="34" charset="0"/>
+                <a:ea typeface="Times New Roman" pitchFamily="34" charset="-122"/>
+                <a:cs typeface="Times New Roman" pitchFamily="34" charset="-120"/>
+              </a:rPr>
+              <a:t>What is the shape of the Earth?</a:t>
+            </a:r>
+            <a:endParaRPr lang="en-US" sz="4000" dirty="0"/>
+          </a:p>
+        </p:txBody>
+      </p:sp>
+      <p:sp>
+        <p:nvSpPr>
+          <p:cNvPr id="25" name="Slide Number Placeholder 0"/>
+          <p:cNvSpPr>
+            <a:spLocks noGrp="1"/>
+          </p:cNvSpPr>
+          <p:nvPr>
+            <p:ph type="sldNum" sz="quarter" idx="4294967295"/>
+          </p:nvPr>
+        </p:nvSpPr>
+        <p:spPr>
+          <a:xfrm>
+            <a:off x="27432" y="91440"/>
+            <a:ext cx="585216" cy="475488"/>
+          </a:xfrm>
+          <a:prstGeom prst="rect">
+            <a:avLst/>
+          </a:prstGeom>
+          <a:extLst>
+            <a:ext uri="{C572A759-6A51-4108-AA02-DFA0A04FC94B}">
+              <ma14:wrappingTextBoxFlag xmlns:ma14="http://schemas.microsoft.com/office/mac/drawingml/2011/main" val="0"/>
+            </a:ext>
+          </a:extLst>
+        </p:spPr>
+        <p:txBody>
+          <a:bodyPr/>
+          <a:lstStyle>
+            <a:lvl1pPr>
+              <a:defRPr sz="2000">
+                <a:solidFill>
+                  <a:srgbClr val="FFFFFF"/>
+                </a:solidFill>
+                <a:latin typeface="Calibri"/>
+                <a:ea typeface="Calibri"/>
+                <a:cs typeface="Calibri"/>
+              </a:defRPr>
+            </a:lvl1pPr>
+          </a:lstStyle>
+          <a:p>
+            <a:pPr algn="ctr"/>
+            <a:fld id="{F7021451-1387-4CA6-816F-3879F97B5CBC}" type="slidenum">
+              <a:rPr b="1" lang="en-US"/>
+              <a:t>41</a:t>
+            </a:fld>
+            <a:endParaRPr lang="en-US"/>
+          </a:p>
+        </p:txBody>
+      </p:sp>
+    </p:spTree>
+  </p:cSld>
+  <p:clrMapOvr>
+    <a:masterClrMapping/>
+  </p:clrMapOvr>
+</p:sld>
+</file>
+
+<file path=ppt/slides/slide42.xml><?xml version="1.0" encoding="utf-8"?>
+<p:sld xmlns:a="http://schemas.openxmlformats.org/drawingml/2006/main" xmlns:r="http://schemas.openxmlformats.org/officeDocument/2006/relationships" xmlns:p="http://schemas.openxmlformats.org/presentationml/2006/main">
+  <p:cSld name="Slide 42">
+    <p:spTree>
+      <p:nvGrpSpPr>
+        <p:cNvPr id="1" name=""/>
+        <p:cNvGrpSpPr/>
+        <p:nvPr/>
+      </p:nvGrpSpPr>
+      <p:grpSpPr>
+        <a:xfrm>
+          <a:off x="0" y="0"/>
+          <a:ext cx="0" cy="0"/>
+          <a:chOff x="0" y="0"/>
+          <a:chExt cx="0" cy="0"/>
+        </a:xfrm>
+      </p:grpSpPr>
+      <p:sp>
+        <p:nvSpPr>
+          <p:cNvPr id="2" name="Text 0"/>
+          <p:cNvSpPr/>
+          <p:nvPr/>
+        </p:nvSpPr>
+        <p:spPr>
+          <a:xfrm>
+            <a:off x="457200" y="713232"/>
+            <a:ext cx="11368735" cy="274320"/>
+          </a:xfrm>
+          <a:prstGeom prst="rect">
+            <a:avLst/>
+          </a:prstGeom>
+          <a:noFill/>
+          <a:ln/>
+        </p:spPr>
+        <p:txBody>
+          <a:bodyPr wrap="square" lIns="0" tIns="0" rIns="0" bIns="0" rtlCol="0" anchor="ctr"/>
+          <a:lstStyle/>
+          <a:p>
+            <a:pPr algn="r" indent="0" marL="0">
+              <a:buNone/>
+            </a:pPr>
+            <a:r>
+              <a:rPr lang="en-US" sz="1400" b="1" dirty="0">
+                <a:solidFill>
+                  <a:srgbClr val="1C3F6E"/>
+                </a:solidFill>
+                <a:latin typeface="Calibri" pitchFamily="34" charset="0"/>
+                <a:ea typeface="Calibri" pitchFamily="34" charset="-122"/>
+                <a:cs typeface="Calibri" pitchFamily="34" charset="-120"/>
+              </a:rPr>
+              <a:t>FORMATIVE EVALUATION</a:t>
+            </a:r>
+            <a:endParaRPr lang="en-US" sz="1400" dirty="0"/>
+          </a:p>
+        </p:txBody>
+      </p:sp>
+      <p:pic>
+        <p:nvPicPr>
+          <p:cNvPr id="3" name="Image 0" descr="/home/claude/f4/img/minesec_sheet.png">    </p:cNvPr>
+          <p:cNvPicPr>
+            <a:picLocks noChangeAspect="1"/>
+          </p:cNvPicPr>
+          <p:nvPr/>
+        </p:nvPicPr>
+        <p:blipFill>
+          <a:blip r:embed="rId1"/>
+          <a:stretch>
+            <a:fillRect/>
+          </a:stretch>
+        </p:blipFill>
+        <p:spPr>
+          <a:xfrm>
+            <a:off x="0" y="658368"/>
+            <a:ext cx="5120640" cy="5833872"/>
+          </a:xfrm>
+          <a:prstGeom prst="rect">
+            <a:avLst/>
+          </a:prstGeom>
+        </p:spPr>
+      </p:pic>
+      <p:sp>
+        <p:nvSpPr>
+          <p:cNvPr id="4" name="Text 1"/>
+          <p:cNvSpPr/>
+          <p:nvPr/>
+        </p:nvSpPr>
+        <p:spPr>
+          <a:xfrm>
+            <a:off x="5349240" y="1005840"/>
+            <a:ext cx="6522415" cy="731520"/>
+          </a:xfrm>
+          <a:prstGeom prst="rect">
+            <a:avLst/>
+          </a:prstGeom>
+          <a:noFill/>
+          <a:ln/>
+        </p:spPr>
+        <p:txBody>
+          <a:bodyPr wrap="square" lIns="0" tIns="0" rIns="0" bIns="0" rtlCol="0" anchor="ctr">
+            <a:normAutofit/>
+          </a:bodyPr>
+          <a:lstStyle/>
+          <a:p>
+            <a:pPr algn="ctr" indent="0" marL="0">
+              <a:buNone/>
+            </a:pPr>
+            <a:r>
+              <a:rPr lang="en-US" sz="3600" b="1" dirty="0">
+                <a:solidFill>
+                  <a:srgbClr val="990011"/>
+                </a:solidFill>
+                <a:latin typeface="Times New Roman" pitchFamily="34" charset="0"/>
+                <a:ea typeface="Times New Roman" pitchFamily="34" charset="-122"/>
+                <a:cs typeface="Times New Roman" pitchFamily="34" charset="-120"/>
+              </a:rPr>
+              <a:t>Expected Answer</a:t>
+            </a:r>
+            <a:endParaRPr lang="en-US" sz="3600" dirty="0"/>
+          </a:p>
+        </p:txBody>
+      </p:sp>
+      <p:sp>
+        <p:nvSpPr>
+          <p:cNvPr id="5" name="Text 2"/>
+          <p:cNvSpPr/>
+          <p:nvPr/>
+        </p:nvSpPr>
+        <p:spPr>
+          <a:xfrm>
+            <a:off x="5349240" y="1783080"/>
+            <a:ext cx="6522415" cy="4663440"/>
+          </a:xfrm>
+          <a:prstGeom prst="rect">
+            <a:avLst/>
+          </a:prstGeom>
+          <a:noFill/>
+          <a:ln/>
+        </p:spPr>
+        <p:txBody>
+          <a:bodyPr wrap="square" lIns="0" tIns="0" rIns="0" bIns="0" rtlCol="0" anchor="t"/>
+          <a:lstStyle/>
+          <a:p>
+            <a:pPr algn="l" indent="0" marL="0">
+              <a:spcAft>
+                <a:spcPts val="800"/>
+              </a:spcAft>
+              <a:buNone/>
+            </a:pPr>
+            <a:r>
+              <a:rPr lang="en-US" sz="4000" dirty="0">
+                <a:solidFill>
+                  <a:srgbClr val="111111"/>
+                </a:solidFill>
+                <a:latin typeface="Times New Roman" pitchFamily="34" charset="0"/>
+                <a:ea typeface="Times New Roman" pitchFamily="34" charset="-122"/>
+                <a:cs typeface="Times New Roman" pitchFamily="34" charset="-120"/>
+              </a:rPr>
+              <a:t>It is an oblate spheroid.</a:t>
+            </a:r>
+            <a:endParaRPr lang="en-US" sz="4000" dirty="0"/>
+          </a:p>
+        </p:txBody>
+      </p:sp>
+      <p:sp>
+        <p:nvSpPr>
+          <p:cNvPr id="25" name="Slide Number Placeholder 0"/>
+          <p:cNvSpPr>
+            <a:spLocks noGrp="1"/>
+          </p:cNvSpPr>
+          <p:nvPr>
+            <p:ph type="sldNum" sz="quarter" idx="4294967295"/>
+          </p:nvPr>
+        </p:nvSpPr>
+        <p:spPr>
+          <a:xfrm>
+            <a:off x="27432" y="91440"/>
+            <a:ext cx="585216" cy="475488"/>
+          </a:xfrm>
+          <a:prstGeom prst="rect">
+            <a:avLst/>
+          </a:prstGeom>
+          <a:extLst>
+            <a:ext uri="{C572A759-6A51-4108-AA02-DFA0A04FC94B}">
+              <ma14:wrappingTextBoxFlag xmlns:ma14="http://schemas.microsoft.com/office/mac/drawingml/2011/main" val="0"/>
+            </a:ext>
+          </a:extLst>
+        </p:spPr>
+        <p:txBody>
+          <a:bodyPr/>
+          <a:lstStyle>
+            <a:lvl1pPr>
+              <a:defRPr sz="2000">
+                <a:solidFill>
+                  <a:srgbClr val="FFFFFF"/>
+                </a:solidFill>
+                <a:latin typeface="Calibri"/>
+                <a:ea typeface="Calibri"/>
+                <a:cs typeface="Calibri"/>
+              </a:defRPr>
+            </a:lvl1pPr>
+          </a:lstStyle>
+          <a:p>
+            <a:pPr algn="ctr"/>
+            <a:fld id="{F7021451-1387-4CA6-816F-3879F97B5CBC}" type="slidenum">
+              <a:rPr b="1" lang="en-US"/>
+              <a:t>42</a:t>
+            </a:fld>
+            <a:endParaRPr lang="en-US"/>
+          </a:p>
+        </p:txBody>
+      </p:sp>
+    </p:spTree>
+  </p:cSld>
+  <p:clrMapOvr>
+    <a:masterClrMapping/>
+  </p:clrMapOvr>
+</p:sld>
+</file>
+
+<file path=ppt/slides/slide43.xml><?xml version="1.0" encoding="utf-8"?>
+<p:sld xmlns:a="http://schemas.openxmlformats.org/drawingml/2006/main" xmlns:r="http://schemas.openxmlformats.org/officeDocument/2006/relationships" xmlns:p="http://schemas.openxmlformats.org/presentationml/2006/main">
+  <p:cSld name="Slide 43">
+    <p:spTree>
+      <p:nvGrpSpPr>
+        <p:cNvPr id="1" name=""/>
+        <p:cNvGrpSpPr/>
+        <p:nvPr/>
+      </p:nvGrpSpPr>
+      <p:grpSpPr>
+        <a:xfrm>
+          <a:off x="0" y="0"/>
+          <a:ext cx="0" cy="0"/>
+          <a:chOff x="0" y="0"/>
+          <a:chExt cx="0" cy="0"/>
+        </a:xfrm>
+      </p:grpSpPr>
+      <p:sp>
+        <p:nvSpPr>
+          <p:cNvPr id="2" name="Text 0"/>
+          <p:cNvSpPr/>
+          <p:nvPr/>
+        </p:nvSpPr>
+        <p:spPr>
+          <a:xfrm>
+            <a:off x="457200" y="713232"/>
+            <a:ext cx="11368735" cy="274320"/>
+          </a:xfrm>
+          <a:prstGeom prst="rect">
+            <a:avLst/>
+          </a:prstGeom>
+          <a:noFill/>
+          <a:ln/>
+        </p:spPr>
+        <p:txBody>
+          <a:bodyPr wrap="square" lIns="0" tIns="0" rIns="0" bIns="0" rtlCol="0" anchor="ctr"/>
+          <a:lstStyle/>
+          <a:p>
+            <a:pPr algn="r" indent="0" marL="0">
+              <a:buNone/>
+            </a:pPr>
+            <a:r>
+              <a:rPr lang="en-US" sz="1400" b="1" dirty="0">
+                <a:solidFill>
+                  <a:srgbClr val="1C3F6E"/>
+                </a:solidFill>
+                <a:latin typeface="Calibri" pitchFamily="34" charset="0"/>
+                <a:ea typeface="Calibri" pitchFamily="34" charset="-122"/>
+                <a:cs typeface="Calibri" pitchFamily="34" charset="-120"/>
+              </a:rPr>
+              <a:t>FORMATIVE EVALUATION</a:t>
+            </a:r>
+            <a:endParaRPr lang="en-US" sz="1400" dirty="0"/>
+          </a:p>
+        </p:txBody>
+      </p:sp>
+      <p:pic>
+        <p:nvPicPr>
+          <p:cNvPr id="3" name="Image 0" descr="/home/claude/f4/img/minesec_sheet.png">    </p:cNvPr>
+          <p:cNvPicPr>
+            <a:picLocks noChangeAspect="1"/>
+          </p:cNvPicPr>
+          <p:nvPr/>
+        </p:nvPicPr>
+        <p:blipFill>
+          <a:blip r:embed="rId1"/>
+          <a:stretch>
+            <a:fillRect/>
+          </a:stretch>
+        </p:blipFill>
+        <p:spPr>
+          <a:xfrm>
+            <a:off x="0" y="658368"/>
+            <a:ext cx="5120640" cy="5833872"/>
+          </a:xfrm>
+          <a:prstGeom prst="rect">
+            <a:avLst/>
+          </a:prstGeom>
+        </p:spPr>
+      </p:pic>
+      <p:sp>
+        <p:nvSpPr>
+          <p:cNvPr id="4" name="Text 1"/>
+          <p:cNvSpPr/>
+          <p:nvPr/>
+        </p:nvSpPr>
+        <p:spPr>
+          <a:xfrm>
+            <a:off x="5349240" y="1005840"/>
+            <a:ext cx="6522415" cy="731520"/>
+          </a:xfrm>
+          <a:prstGeom prst="rect">
+            <a:avLst/>
+          </a:prstGeom>
+          <a:noFill/>
+          <a:ln/>
+        </p:spPr>
+        <p:txBody>
+          <a:bodyPr wrap="square" lIns="0" tIns="0" rIns="0" bIns="0" rtlCol="0" anchor="ctr">
+            <a:normAutofit/>
+          </a:bodyPr>
+          <a:lstStyle/>
+          <a:p>
+            <a:pPr algn="ctr" indent="0" marL="0">
+              <a:buNone/>
+            </a:pPr>
+            <a:r>
+              <a:rPr lang="en-US" sz="3600" b="1" dirty="0">
+                <a:solidFill>
+                  <a:srgbClr val="990011"/>
+                </a:solidFill>
+                <a:latin typeface="Times New Roman" pitchFamily="34" charset="0"/>
+                <a:ea typeface="Times New Roman" pitchFamily="34" charset="-122"/>
+                <a:cs typeface="Times New Roman" pitchFamily="34" charset="-120"/>
+              </a:rPr>
+              <a:t>Evaluation 2</a:t>
+            </a:r>
+            <a:endParaRPr lang="en-US" sz="3600" dirty="0"/>
+          </a:p>
+        </p:txBody>
+      </p:sp>
+      <p:sp>
+        <p:nvSpPr>
+          <p:cNvPr id="5" name="Text 2"/>
+          <p:cNvSpPr/>
+          <p:nvPr/>
+        </p:nvSpPr>
+        <p:spPr>
+          <a:xfrm>
+            <a:off x="5349240" y="1783080"/>
+            <a:ext cx="6522415" cy="4663440"/>
+          </a:xfrm>
+          <a:prstGeom prst="rect">
+            <a:avLst/>
+          </a:prstGeom>
+          <a:noFill/>
+          <a:ln/>
+        </p:spPr>
+        <p:txBody>
+          <a:bodyPr wrap="square" lIns="0" tIns="0" rIns="0" bIns="0" rtlCol="0" anchor="t"/>
+          <a:lstStyle/>
+          <a:p>
+            <a:pPr algn="l" indent="0" marL="0">
+              <a:spcAft>
+                <a:spcPts val="800"/>
+              </a:spcAft>
+              <a:buNone/>
+            </a:pPr>
+            <a:r>
+              <a:rPr lang="en-US" sz="4000" dirty="0">
+                <a:solidFill>
+                  <a:srgbClr val="111111"/>
+                </a:solidFill>
+                <a:latin typeface="Times New Roman" pitchFamily="34" charset="0"/>
+                <a:ea typeface="Times New Roman" pitchFamily="34" charset="-122"/>
+                <a:cs typeface="Times New Roman" pitchFamily="34" charset="-120"/>
+              </a:rPr>
+              <a:t>Give two proofs that the Earth is round.</a:t>
+            </a:r>
+            <a:endParaRPr lang="en-US" sz="4000" dirty="0"/>
+          </a:p>
+        </p:txBody>
+      </p:sp>
+      <p:sp>
+        <p:nvSpPr>
+          <p:cNvPr id="25" name="Slide Number Placeholder 0"/>
+          <p:cNvSpPr>
+            <a:spLocks noGrp="1"/>
+          </p:cNvSpPr>
+          <p:nvPr>
+            <p:ph type="sldNum" sz="quarter" idx="4294967295"/>
+          </p:nvPr>
+        </p:nvSpPr>
+        <p:spPr>
+          <a:xfrm>
+            <a:off x="27432" y="91440"/>
+            <a:ext cx="585216" cy="475488"/>
+          </a:xfrm>
+          <a:prstGeom prst="rect">
+            <a:avLst/>
+          </a:prstGeom>
+          <a:extLst>
+            <a:ext uri="{C572A759-6A51-4108-AA02-DFA0A04FC94B}">
+              <ma14:wrappingTextBoxFlag xmlns:ma14="http://schemas.microsoft.com/office/mac/drawingml/2011/main" val="0"/>
+            </a:ext>
+          </a:extLst>
+        </p:spPr>
+        <p:txBody>
+          <a:bodyPr/>
+          <a:lstStyle>
+            <a:lvl1pPr>
+              <a:defRPr sz="2000">
+                <a:solidFill>
+                  <a:srgbClr val="FFFFFF"/>
+                </a:solidFill>
+                <a:latin typeface="Calibri"/>
+                <a:ea typeface="Calibri"/>
+                <a:cs typeface="Calibri"/>
+              </a:defRPr>
+            </a:lvl1pPr>
+          </a:lstStyle>
+          <a:p>
+            <a:pPr algn="ctr"/>
+            <a:fld id="{F7021451-1387-4CA6-816F-3879F97B5CBC}" type="slidenum">
+              <a:rPr b="1" lang="en-US"/>
+              <a:t>43</a:t>
+            </a:fld>
+            <a:endParaRPr lang="en-US"/>
+          </a:p>
+        </p:txBody>
+      </p:sp>
+    </p:spTree>
+  </p:cSld>
+  <p:clrMapOvr>
+    <a:masterClrMapping/>
+  </p:clrMapOvr>
+</p:sld>
+</file>
+
+<file path=ppt/slides/slide44.xml><?xml version="1.0" encoding="utf-8"?>
+<p:sld xmlns:a="http://schemas.openxmlformats.org/drawingml/2006/main" xmlns:r="http://schemas.openxmlformats.org/officeDocument/2006/relationships" xmlns:p="http://schemas.openxmlformats.org/presentationml/2006/main">
+  <p:cSld name="Slide 44">
+    <p:spTree>
+      <p:nvGrpSpPr>
+        <p:cNvPr id="1" name=""/>
+        <p:cNvGrpSpPr/>
+        <p:nvPr/>
+      </p:nvGrpSpPr>
+      <p:grpSpPr>
+        <a:xfrm>
+          <a:off x="0" y="0"/>
+          <a:ext cx="0" cy="0"/>
+          <a:chOff x="0" y="0"/>
+          <a:chExt cx="0" cy="0"/>
+        </a:xfrm>
+      </p:grpSpPr>
+      <p:sp>
+        <p:nvSpPr>
+          <p:cNvPr id="2" name="Text 0"/>
+          <p:cNvSpPr/>
+          <p:nvPr/>
+        </p:nvSpPr>
+        <p:spPr>
+          <a:xfrm>
+            <a:off x="457200" y="713232"/>
+            <a:ext cx="11368735" cy="274320"/>
+          </a:xfrm>
+          <a:prstGeom prst="rect">
+            <a:avLst/>
+          </a:prstGeom>
+          <a:noFill/>
+          <a:ln/>
+        </p:spPr>
+        <p:txBody>
+          <a:bodyPr wrap="square" lIns="0" tIns="0" rIns="0" bIns="0" rtlCol="0" anchor="ctr"/>
+          <a:lstStyle/>
+          <a:p>
+            <a:pPr algn="r" indent="0" marL="0">
+              <a:buNone/>
+            </a:pPr>
+            <a:r>
+              <a:rPr lang="en-US" sz="1400" b="1" dirty="0">
+                <a:solidFill>
+                  <a:srgbClr val="1C3F6E"/>
+                </a:solidFill>
+                <a:latin typeface="Calibri" pitchFamily="34" charset="0"/>
+                <a:ea typeface="Calibri" pitchFamily="34" charset="-122"/>
+                <a:cs typeface="Calibri" pitchFamily="34" charset="-120"/>
+              </a:rPr>
+              <a:t>FORMATIVE EVALUATION</a:t>
+            </a:r>
+            <a:endParaRPr lang="en-US" sz="1400" dirty="0"/>
+          </a:p>
+        </p:txBody>
+      </p:sp>
+      <p:pic>
+        <p:nvPicPr>
+          <p:cNvPr id="3" name="Image 0" descr="/home/claude/f4/img/minesec_sheet.png">    </p:cNvPr>
+          <p:cNvPicPr>
+            <a:picLocks noChangeAspect="1"/>
+          </p:cNvPicPr>
+          <p:nvPr/>
+        </p:nvPicPr>
+        <p:blipFill>
+          <a:blip r:embed="rId1"/>
+          <a:stretch>
+            <a:fillRect/>
+          </a:stretch>
+        </p:blipFill>
+        <p:spPr>
+          <a:xfrm>
+            <a:off x="0" y="658368"/>
+            <a:ext cx="5120640" cy="5833872"/>
+          </a:xfrm>
+          <a:prstGeom prst="rect">
+            <a:avLst/>
+          </a:prstGeom>
+        </p:spPr>
+      </p:pic>
+      <p:sp>
+        <p:nvSpPr>
+          <p:cNvPr id="4" name="Text 1"/>
+          <p:cNvSpPr/>
+          <p:nvPr/>
+        </p:nvSpPr>
+        <p:spPr>
+          <a:xfrm>
+            <a:off x="5349240" y="1005840"/>
+            <a:ext cx="6522415" cy="731520"/>
+          </a:xfrm>
+          <a:prstGeom prst="rect">
+            <a:avLst/>
+          </a:prstGeom>
+          <a:noFill/>
+          <a:ln/>
+        </p:spPr>
+        <p:txBody>
+          <a:bodyPr wrap="square" lIns="0" tIns="0" rIns="0" bIns="0" rtlCol="0" anchor="ctr">
+            <a:normAutofit/>
+          </a:bodyPr>
+          <a:lstStyle/>
+          <a:p>
+            <a:pPr algn="ctr" indent="0" marL="0">
+              <a:buNone/>
+            </a:pPr>
+            <a:r>
+              <a:rPr lang="en-US" sz="3600" b="1" dirty="0">
+                <a:solidFill>
+                  <a:srgbClr val="990011"/>
+                </a:solidFill>
+                <a:latin typeface="Times New Roman" pitchFamily="34" charset="0"/>
+                <a:ea typeface="Times New Roman" pitchFamily="34" charset="-122"/>
+                <a:cs typeface="Times New Roman" pitchFamily="34" charset="-120"/>
+              </a:rPr>
+              <a:t>Expected Answer</a:t>
+            </a:r>
+            <a:endParaRPr lang="en-US" sz="3600" dirty="0"/>
+          </a:p>
+        </p:txBody>
+      </p:sp>
+      <p:sp>
+        <p:nvSpPr>
+          <p:cNvPr id="5" name="Text 2"/>
+          <p:cNvSpPr/>
+          <p:nvPr/>
+        </p:nvSpPr>
+        <p:spPr>
+          <a:xfrm>
+            <a:off x="5349240" y="1783080"/>
+            <a:ext cx="6522415" cy="4663440"/>
+          </a:xfrm>
+          <a:prstGeom prst="rect">
+            <a:avLst/>
+          </a:prstGeom>
+          <a:noFill/>
+          <a:ln/>
+        </p:spPr>
+        <p:txBody>
+          <a:bodyPr wrap="square" lIns="0" tIns="0" rIns="0" bIns="0" rtlCol="0" anchor="t"/>
+          <a:lstStyle/>
+          <a:p>
+            <a:pPr algn="l" indent="0" marL="0">
+              <a:spcAft>
+                <a:spcPts val="800"/>
+              </a:spcAft>
+              <a:buNone/>
+            </a:pPr>
+            <a:r>
+              <a:rPr lang="en-US" sz="4000" dirty="0">
+                <a:solidFill>
+                  <a:srgbClr val="111111"/>
+                </a:solidFill>
+                <a:latin typeface="Times New Roman" pitchFamily="34" charset="0"/>
+                <a:ea typeface="Times New Roman" pitchFamily="34" charset="-122"/>
+                <a:cs typeface="Times New Roman" pitchFamily="34" charset="-120"/>
+              </a:rPr>
+              <a:t>The ship at sea and the round shadow of the Earth on the Moon.</a:t>
+            </a:r>
+            <a:endParaRPr lang="en-US" sz="4000" dirty="0"/>
+          </a:p>
+        </p:txBody>
+      </p:sp>
+      <p:sp>
+        <p:nvSpPr>
+          <p:cNvPr id="25" name="Slide Number Placeholder 0"/>
+          <p:cNvSpPr>
+            <a:spLocks noGrp="1"/>
+          </p:cNvSpPr>
+          <p:nvPr>
+            <p:ph type="sldNum" sz="quarter" idx="4294967295"/>
+          </p:nvPr>
+        </p:nvSpPr>
+        <p:spPr>
+          <a:xfrm>
+            <a:off x="27432" y="91440"/>
+            <a:ext cx="585216" cy="475488"/>
+          </a:xfrm>
+          <a:prstGeom prst="rect">
+            <a:avLst/>
+          </a:prstGeom>
+          <a:extLst>
+            <a:ext uri="{C572A759-6A51-4108-AA02-DFA0A04FC94B}">
+              <ma14:wrappingTextBoxFlag xmlns:ma14="http://schemas.microsoft.com/office/mac/drawingml/2011/main" val="0"/>
+            </a:ext>
+          </a:extLst>
+        </p:spPr>
+        <p:txBody>
+          <a:bodyPr/>
+          <a:lstStyle>
+            <a:lvl1pPr>
+              <a:defRPr sz="2000">
+                <a:solidFill>
+                  <a:srgbClr val="FFFFFF"/>
+                </a:solidFill>
+                <a:latin typeface="Calibri"/>
+                <a:ea typeface="Calibri"/>
+                <a:cs typeface="Calibri"/>
+              </a:defRPr>
+            </a:lvl1pPr>
+          </a:lstStyle>
+          <a:p>
+            <a:pPr algn="ctr"/>
+            <a:fld id="{F7021451-1387-4CA6-816F-3879F97B5CBC}" type="slidenum">
+              <a:rPr b="1" lang="en-US"/>
+              <a:t>44</a:t>
+            </a:fld>
+            <a:endParaRPr lang="en-US"/>
+          </a:p>
+        </p:txBody>
+      </p:sp>
+    </p:spTree>
+  </p:cSld>
+  <p:clrMapOvr>
+    <a:masterClrMapping/>
+  </p:clrMapOvr>
+</p:sld>
+</file>
+
+<file path=ppt/slides/slide45.xml><?xml version="1.0" encoding="utf-8"?>
+<p:sld xmlns:a="http://schemas.openxmlformats.org/drawingml/2006/main" xmlns:r="http://schemas.openxmlformats.org/officeDocument/2006/relationships" xmlns:p="http://schemas.openxmlformats.org/presentationml/2006/main">
+  <p:cSld name="Slide 45">
+    <p:spTree>
+      <p:nvGrpSpPr>
+        <p:cNvPr id="1" name=""/>
+        <p:cNvGrpSpPr/>
+        <p:nvPr/>
+      </p:nvGrpSpPr>
+      <p:grpSpPr>
+        <a:xfrm>
+          <a:off x="0" y="0"/>
+          <a:ext cx="0" cy="0"/>
+          <a:chOff x="0" y="0"/>
+          <a:chExt cx="0" cy="0"/>
+        </a:xfrm>
+      </p:grpSpPr>
+      <p:sp>
+        <p:nvSpPr>
+          <p:cNvPr id="2" name="Text 0"/>
+          <p:cNvSpPr/>
+          <p:nvPr/>
+        </p:nvSpPr>
+        <p:spPr>
+          <a:xfrm>
+            <a:off x="457200" y="713232"/>
+            <a:ext cx="11368735" cy="274320"/>
+          </a:xfrm>
+          <a:prstGeom prst="rect">
+            <a:avLst/>
+          </a:prstGeom>
+          <a:noFill/>
+          <a:ln/>
+        </p:spPr>
+        <p:txBody>
+          <a:bodyPr wrap="square" lIns="0" tIns="0" rIns="0" bIns="0" rtlCol="0" anchor="ctr"/>
+          <a:lstStyle/>
+          <a:p>
+            <a:pPr algn="r" indent="0" marL="0">
+              <a:buNone/>
+            </a:pPr>
+            <a:r>
+              <a:rPr lang="en-US" sz="1400" b="1" dirty="0">
+                <a:solidFill>
+                  <a:srgbClr val="1C3F6E"/>
+                </a:solidFill>
+                <a:latin typeface="Calibri" pitchFamily="34" charset="0"/>
+                <a:ea typeface="Calibri" pitchFamily="34" charset="-122"/>
+                <a:cs typeface="Calibri" pitchFamily="34" charset="-120"/>
+              </a:rPr>
+              <a:t>REMEDIATION</a:t>
+            </a:r>
+            <a:endParaRPr lang="en-US" sz="1400" dirty="0"/>
+          </a:p>
+        </p:txBody>
+      </p:sp>
+      <p:pic>
+        <p:nvPicPr>
+          <p:cNvPr id="3" name="Image 0" descr="/home/claude/f4/img/minesec_sheet.png">    </p:cNvPr>
+          <p:cNvPicPr>
+            <a:picLocks noChangeAspect="1"/>
+          </p:cNvPicPr>
+          <p:nvPr/>
+        </p:nvPicPr>
+        <p:blipFill>
+          <a:blip r:embed="rId1"/>
+          <a:stretch>
+            <a:fillRect/>
+          </a:stretch>
+        </p:blipFill>
+        <p:spPr>
+          <a:xfrm>
+            <a:off x="0" y="658368"/>
+            <a:ext cx="3840480" cy="5833872"/>
+          </a:xfrm>
+          <a:prstGeom prst="rect">
+            <a:avLst/>
+          </a:prstGeom>
+        </p:spPr>
+      </p:pic>
+      <p:sp>
+        <p:nvSpPr>
+          <p:cNvPr id="4" name="Text 1"/>
+          <p:cNvSpPr/>
+          <p:nvPr/>
+        </p:nvSpPr>
+        <p:spPr>
+          <a:xfrm>
+            <a:off x="4069080" y="1005840"/>
+            <a:ext cx="7802575" cy="731520"/>
+          </a:xfrm>
+          <a:prstGeom prst="rect">
+            <a:avLst/>
+          </a:prstGeom>
+          <a:noFill/>
+          <a:ln/>
+        </p:spPr>
+        <p:txBody>
+          <a:bodyPr wrap="square" lIns="0" tIns="0" rIns="0" bIns="0" rtlCol="0" anchor="ctr">
+            <a:normAutofit/>
+          </a:bodyPr>
+          <a:lstStyle/>
+          <a:p>
+            <a:pPr algn="ctr" indent="0" marL="0">
+              <a:buNone/>
+            </a:pPr>
+            <a:r>
+              <a:rPr lang="en-US" sz="3600" b="1" dirty="0">
+                <a:solidFill>
+                  <a:srgbClr val="990011"/>
+                </a:solidFill>
+                <a:latin typeface="Times New Roman" pitchFamily="34" charset="0"/>
+                <a:ea typeface="Times New Roman" pitchFamily="34" charset="-122"/>
+                <a:cs typeface="Times New Roman" pitchFamily="34" charset="-120"/>
+              </a:rPr>
+              <a:t>Remediation</a:t>
+            </a:r>
+            <a:endParaRPr lang="en-US" sz="3600" dirty="0"/>
+          </a:p>
+        </p:txBody>
+      </p:sp>
+      <p:sp>
+        <p:nvSpPr>
+          <p:cNvPr id="5" name="Text 2"/>
+          <p:cNvSpPr/>
+          <p:nvPr/>
+        </p:nvSpPr>
+        <p:spPr>
+          <a:xfrm>
+            <a:off x="4069080" y="1783080"/>
+            <a:ext cx="7802575" cy="4663440"/>
+          </a:xfrm>
+          <a:prstGeom prst="rect">
+            <a:avLst/>
+          </a:prstGeom>
+          <a:noFill/>
+          <a:ln/>
+        </p:spPr>
+        <p:txBody>
+          <a:bodyPr wrap="square" lIns="0" tIns="0" rIns="0" bIns="0" rtlCol="0" anchor="t"/>
+          <a:lstStyle/>
+          <a:p>
+            <a:pPr algn="l" indent="0" marL="0">
+              <a:spcAft>
+                <a:spcPts val="800"/>
+              </a:spcAft>
+              <a:buNone/>
+            </a:pPr>
+            <a:r>
+              <a:rPr lang="en-US" sz="4000" b="1" dirty="0">
+                <a:solidFill>
+                  <a:srgbClr val="111111"/>
+                </a:solidFill>
+                <a:latin typeface="Times New Roman" pitchFamily="34" charset="0"/>
+                <a:ea typeface="Times New Roman" pitchFamily="34" charset="-122"/>
+                <a:cs typeface="Times New Roman" pitchFamily="34" charset="-120"/>
+              </a:rPr>
+              <a:t>Fill in the blanks:</a:t>
+            </a:r>
+            <a:endParaRPr lang="en-US" sz="4000" dirty="0"/>
+          </a:p>
+          <a:p>
+            <a:pPr algn="l" marL="342900" indent="-342900">
+              <a:spcAft>
+                <a:spcPts val="800"/>
+              </a:spcAft>
+              <a:buSzPct val="100000"/>
+              <a:buFont typeface="+mj-lt"/>
+              <a:buAutoNum type="arabicPeriod" startAt="1"/>
+            </a:pPr>
+            <a:r>
+              <a:rPr lang="en-US" sz="4000" dirty="0">
+                <a:solidFill>
+                  <a:srgbClr val="111111"/>
+                </a:solidFill>
+                <a:latin typeface="Times New Roman" pitchFamily="34" charset="0"/>
+                <a:ea typeface="Times New Roman" pitchFamily="34" charset="-122"/>
+                <a:cs typeface="Times New Roman" pitchFamily="34" charset="-120"/>
+              </a:rPr>
+              <a:t>The Earth is flat at the ______.</a:t>
+            </a:r>
+            <a:endParaRPr lang="en-US" sz="4000" dirty="0"/>
+          </a:p>
+          <a:p>
+            <a:pPr algn="l" marL="342900" indent="-342900">
+              <a:spcAft>
+                <a:spcPts val="800"/>
+              </a:spcAft>
+              <a:buSzPct val="100000"/>
+              <a:buFont typeface="+mj-lt"/>
+              <a:buAutoNum type="arabicPeriod" startAt="1"/>
+            </a:pPr>
+            <a:r>
+              <a:rPr lang="en-US" sz="4000" dirty="0">
+                <a:solidFill>
+                  <a:srgbClr val="111111"/>
+                </a:solidFill>
+                <a:latin typeface="Times New Roman" pitchFamily="34" charset="0"/>
+                <a:ea typeface="Times New Roman" pitchFamily="34" charset="-122"/>
+                <a:cs typeface="Times New Roman" pitchFamily="34" charset="-120"/>
+              </a:rPr>
+              <a:t>The Earth is wider at the ______.</a:t>
+            </a:r>
+            <a:endParaRPr lang="en-US" sz="4000" dirty="0"/>
+          </a:p>
+          <a:p>
+            <a:pPr algn="l" marL="342900" indent="-342900">
+              <a:spcAft>
+                <a:spcPts val="800"/>
+              </a:spcAft>
+              <a:buSzPct val="100000"/>
+              <a:buFont typeface="+mj-lt"/>
+              <a:buAutoNum type="arabicPeriod" startAt="1"/>
+            </a:pPr>
+            <a:r>
+              <a:rPr lang="en-US" sz="4000" dirty="0">
+                <a:solidFill>
+                  <a:srgbClr val="111111"/>
+                </a:solidFill>
+                <a:latin typeface="Times New Roman" pitchFamily="34" charset="0"/>
+                <a:ea typeface="Times New Roman" pitchFamily="34" charset="-122"/>
+                <a:cs typeface="Times New Roman" pitchFamily="34" charset="-120"/>
+              </a:rPr>
+              <a:t>The shadow of the Earth on the Moon is ______.</a:t>
+            </a:r>
+            <a:endParaRPr lang="en-US" sz="4000" dirty="0"/>
+          </a:p>
+        </p:txBody>
+      </p:sp>
+      <p:sp>
+        <p:nvSpPr>
+          <p:cNvPr id="25" name="Slide Number Placeholder 0"/>
+          <p:cNvSpPr>
+            <a:spLocks noGrp="1"/>
+          </p:cNvSpPr>
+          <p:nvPr>
+            <p:ph type="sldNum" sz="quarter" idx="4294967295"/>
+          </p:nvPr>
+        </p:nvSpPr>
+        <p:spPr>
+          <a:xfrm>
+            <a:off x="27432" y="91440"/>
+            <a:ext cx="585216" cy="475488"/>
+          </a:xfrm>
+          <a:prstGeom prst="rect">
+            <a:avLst/>
+          </a:prstGeom>
+          <a:extLst>
+            <a:ext uri="{C572A759-6A51-4108-AA02-DFA0A04FC94B}">
+              <ma14:wrappingTextBoxFlag xmlns:ma14="http://schemas.microsoft.com/office/mac/drawingml/2011/main" val="0"/>
+            </a:ext>
+          </a:extLst>
+        </p:spPr>
+        <p:txBody>
+          <a:bodyPr/>
+          <a:lstStyle>
+            <a:lvl1pPr>
+              <a:defRPr sz="2000">
+                <a:solidFill>
+                  <a:srgbClr val="FFFFFF"/>
+                </a:solidFill>
+                <a:latin typeface="Calibri"/>
+                <a:ea typeface="Calibri"/>
+                <a:cs typeface="Calibri"/>
+              </a:defRPr>
+            </a:lvl1pPr>
+          </a:lstStyle>
+          <a:p>
+            <a:pPr algn="ctr"/>
+            <a:fld id="{F7021451-1387-4CA6-816F-3879F97B5CBC}" type="slidenum">
+              <a:rPr b="1" lang="en-US"/>
+              <a:t>45</a:t>
+            </a:fld>
+            <a:endParaRPr lang="en-US"/>
+          </a:p>
+        </p:txBody>
+      </p:sp>
+    </p:spTree>
+  </p:cSld>
+  <p:clrMapOvr>
+    <a:masterClrMapping/>
+  </p:clrMapOvr>
+</p:sld>
+</file>
+
+<file path=ppt/slides/slide46.xml><?xml version="1.0" encoding="utf-8"?>
+<p:sld xmlns:a="http://schemas.openxmlformats.org/drawingml/2006/main" xmlns:r="http://schemas.openxmlformats.org/officeDocument/2006/relationships" xmlns:p="http://schemas.openxmlformats.org/presentationml/2006/main">
+  <p:cSld name="Slide 46">
+    <p:spTree>
+      <p:nvGrpSpPr>
+        <p:cNvPr id="1" name=""/>
+        <p:cNvGrpSpPr/>
+        <p:nvPr/>
+      </p:nvGrpSpPr>
+      <p:grpSpPr>
+        <a:xfrm>
+          <a:off x="0" y="0"/>
+          <a:ext cx="0" cy="0"/>
+          <a:chOff x="0" y="0"/>
+          <a:chExt cx="0" cy="0"/>
+        </a:xfrm>
+      </p:grpSpPr>
+      <p:sp>
+        <p:nvSpPr>
+          <p:cNvPr id="2" name="Text 0"/>
+          <p:cNvSpPr/>
+          <p:nvPr/>
+        </p:nvSpPr>
+        <p:spPr>
+          <a:xfrm>
+            <a:off x="457200" y="713232"/>
+            <a:ext cx="11368735" cy="274320"/>
+          </a:xfrm>
+          <a:prstGeom prst="rect">
+            <a:avLst/>
+          </a:prstGeom>
+          <a:noFill/>
+          <a:ln/>
+        </p:spPr>
+        <p:txBody>
+          <a:bodyPr wrap="square" lIns="0" tIns="0" rIns="0" bIns="0" rtlCol="0" anchor="ctr"/>
+          <a:lstStyle/>
+          <a:p>
+            <a:pPr algn="r" indent="0" marL="0">
+              <a:buNone/>
+            </a:pPr>
+            <a:r>
+              <a:rPr lang="en-US" sz="1400" b="1" dirty="0">
+                <a:solidFill>
+                  <a:srgbClr val="1C3F6E"/>
+                </a:solidFill>
+                <a:latin typeface="Calibri" pitchFamily="34" charset="0"/>
+                <a:ea typeface="Calibri" pitchFamily="34" charset="-122"/>
+                <a:cs typeface="Calibri" pitchFamily="34" charset="-120"/>
+              </a:rPr>
+              <a:t>HOMEWORK</a:t>
+            </a:r>
+            <a:endParaRPr lang="en-US" sz="1400" dirty="0"/>
+          </a:p>
+        </p:txBody>
+      </p:sp>
+      <p:pic>
+        <p:nvPicPr>
+          <p:cNvPr id="3" name="Image 0" descr="/home/claude/f4/img/minesec_sheet.png">    </p:cNvPr>
+          <p:cNvPicPr>
+            <a:picLocks noChangeAspect="1"/>
+          </p:cNvPicPr>
+          <p:nvPr/>
+        </p:nvPicPr>
+        <p:blipFill>
+          <a:blip r:embed="rId1"/>
+          <a:stretch>
+            <a:fillRect/>
+          </a:stretch>
+        </p:blipFill>
+        <p:spPr>
+          <a:xfrm>
+            <a:off x="0" y="658368"/>
+            <a:ext cx="5120640" cy="5833872"/>
+          </a:xfrm>
+          <a:prstGeom prst="rect">
+            <a:avLst/>
+          </a:prstGeom>
+        </p:spPr>
+      </p:pic>
+      <p:sp>
+        <p:nvSpPr>
+          <p:cNvPr id="4" name="Text 1"/>
+          <p:cNvSpPr/>
+          <p:nvPr/>
+        </p:nvSpPr>
+        <p:spPr>
+          <a:xfrm>
+            <a:off x="5349240" y="1005840"/>
+            <a:ext cx="6522415" cy="731520"/>
+          </a:xfrm>
+          <a:prstGeom prst="rect">
+            <a:avLst/>
+          </a:prstGeom>
+          <a:noFill/>
+          <a:ln/>
+        </p:spPr>
+        <p:txBody>
+          <a:bodyPr wrap="square" lIns="0" tIns="0" rIns="0" bIns="0" rtlCol="0" anchor="ctr">
+            <a:normAutofit/>
+          </a:bodyPr>
+          <a:lstStyle/>
+          <a:p>
+            <a:pPr algn="ctr" indent="0" marL="0">
+              <a:buNone/>
+            </a:pPr>
+            <a:r>
+              <a:rPr lang="en-US" sz="3600" b="1" dirty="0">
+                <a:solidFill>
+                  <a:srgbClr val="990011"/>
+                </a:solidFill>
+                <a:latin typeface="Times New Roman" pitchFamily="34" charset="0"/>
+                <a:ea typeface="Times New Roman" pitchFamily="34" charset="-122"/>
+                <a:cs typeface="Times New Roman" pitchFamily="34" charset="-120"/>
+              </a:rPr>
+              <a:t>Homework</a:t>
+            </a:r>
+            <a:endParaRPr lang="en-US" sz="3600" dirty="0"/>
+          </a:p>
+        </p:txBody>
+      </p:sp>
+      <p:sp>
+        <p:nvSpPr>
+          <p:cNvPr id="5" name="Text 2"/>
+          <p:cNvSpPr/>
+          <p:nvPr/>
+        </p:nvSpPr>
+        <p:spPr>
+          <a:xfrm>
+            <a:off x="5349240" y="1783080"/>
+            <a:ext cx="6522415" cy="4663440"/>
+          </a:xfrm>
+          <a:prstGeom prst="rect">
+            <a:avLst/>
+          </a:prstGeom>
+          <a:noFill/>
+          <a:ln/>
+        </p:spPr>
+        <p:txBody>
+          <a:bodyPr wrap="square" lIns="0" tIns="0" rIns="0" bIns="0" rtlCol="0" anchor="t"/>
+          <a:lstStyle/>
+          <a:p>
+            <a:pPr algn="l" indent="0" marL="0">
+              <a:spcAft>
+                <a:spcPts val="800"/>
+              </a:spcAft>
+              <a:buNone/>
+            </a:pPr>
+            <a:r>
+              <a:rPr lang="en-US" sz="4000" dirty="0">
+                <a:solidFill>
+                  <a:srgbClr val="111111"/>
+                </a:solidFill>
+                <a:latin typeface="Times New Roman" pitchFamily="34" charset="0"/>
+                <a:ea typeface="Times New Roman" pitchFamily="34" charset="-122"/>
+                <a:cs typeface="Times New Roman" pitchFamily="34" charset="-120"/>
+              </a:rPr>
+              <a:t>Look at the Moon on three different evenings this week. Draw its shape each time and write the date under each drawing.</a:t>
+            </a:r>
+            <a:endParaRPr lang="en-US" sz="4000" dirty="0"/>
+          </a:p>
+        </p:txBody>
+      </p:sp>
+      <p:sp>
+        <p:nvSpPr>
+          <p:cNvPr id="25" name="Slide Number Placeholder 0"/>
+          <p:cNvSpPr>
+            <a:spLocks noGrp="1"/>
+          </p:cNvSpPr>
+          <p:nvPr>
+            <p:ph type="sldNum" sz="quarter" idx="4294967295"/>
+          </p:nvPr>
+        </p:nvSpPr>
+        <p:spPr>
+          <a:xfrm>
+            <a:off x="27432" y="91440"/>
+            <a:ext cx="585216" cy="475488"/>
+          </a:xfrm>
+          <a:prstGeom prst="rect">
+            <a:avLst/>
+          </a:prstGeom>
+          <a:extLst>
+            <a:ext uri="{C572A759-6A51-4108-AA02-DFA0A04FC94B}">
+              <ma14:wrappingTextBoxFlag xmlns:ma14="http://schemas.microsoft.com/office/mac/drawingml/2011/main" val="0"/>
+            </a:ext>
+          </a:extLst>
+        </p:spPr>
+        <p:txBody>
+          <a:bodyPr/>
+          <a:lstStyle>
+            <a:lvl1pPr>
+              <a:defRPr sz="2000">
+                <a:solidFill>
+                  <a:srgbClr val="FFFFFF"/>
+                </a:solidFill>
+                <a:latin typeface="Calibri"/>
+                <a:ea typeface="Calibri"/>
+                <a:cs typeface="Calibri"/>
+              </a:defRPr>
+            </a:lvl1pPr>
+          </a:lstStyle>
+          <a:p>
+            <a:pPr algn="ctr"/>
+            <a:fld id="{F7021451-1387-4CA6-816F-3879F97B5CBC}" type="slidenum">
+              <a:rPr b="1" lang="en-US"/>
+              <a:t>46</a:t>
+            </a:fld>
+            <a:endParaRPr lang="en-US"/>
+          </a:p>
+        </p:txBody>
+      </p:sp>
+    </p:spTree>
+  </p:cSld>
+  <p:clrMapOvr>
+    <a:masterClrMapping/>
+  </p:clrMapOvr>
+</p:sld>
+</file>
+
+<file path=ppt/slides/slide47.xml><?xml version="1.0" encoding="utf-8"?>
+<p:sld xmlns:a="http://schemas.openxmlformats.org/drawingml/2006/main" xmlns:r="http://schemas.openxmlformats.org/officeDocument/2006/relationships" xmlns:p="http://schemas.openxmlformats.org/presentationml/2006/main">
+  <p:cSld name="Slide 47">
+    <p:spTree>
+      <p:nvGrpSpPr>
+        <p:cNvPr id="1" name=""/>
+        <p:cNvGrpSpPr/>
+        <p:nvPr/>
+      </p:nvGrpSpPr>
+      <p:grpSpPr>
+        <a:xfrm>
+          <a:off x="0" y="0"/>
+          <a:ext cx="0" cy="0"/>
+          <a:chOff x="0" y="0"/>
+          <a:chExt cx="0" cy="0"/>
+        </a:xfrm>
+      </p:grpSpPr>
+      <p:sp>
+        <p:nvSpPr>
+          <p:cNvPr id="2" name="Text 0"/>
+          <p:cNvSpPr/>
+          <p:nvPr/>
+        </p:nvSpPr>
+        <p:spPr>
+          <a:xfrm>
+            <a:off x="457200" y="713232"/>
+            <a:ext cx="11368735" cy="274320"/>
+          </a:xfrm>
+          <a:prstGeom prst="rect">
+            <a:avLst/>
+          </a:prstGeom>
+          <a:noFill/>
+          <a:ln/>
+        </p:spPr>
+        <p:txBody>
+          <a:bodyPr wrap="square" lIns="0" tIns="0" rIns="0" bIns="0" rtlCol="0" anchor="ctr"/>
+          <a:lstStyle/>
+          <a:p>
+            <a:pPr algn="r" indent="0" marL="0">
+              <a:buNone/>
+            </a:pPr>
+            <a:r>
+              <a:rPr lang="en-US" sz="1400" b="1" dirty="0">
+                <a:solidFill>
+                  <a:srgbClr val="1C3F6E"/>
+                </a:solidFill>
+                <a:latin typeface="Calibri" pitchFamily="34" charset="0"/>
+                <a:ea typeface="Calibri" pitchFamily="34" charset="-122"/>
+                <a:cs typeface="Calibri" pitchFamily="34" charset="-120"/>
+              </a:rPr>
+              <a:t>NEXT LESSON</a:t>
+            </a:r>
+            <a:endParaRPr lang="en-US" sz="1400" dirty="0"/>
+          </a:p>
+        </p:txBody>
+      </p:sp>
+      <p:pic>
+        <p:nvPicPr>
+          <p:cNvPr id="3" name="Image 0" descr="/home/claude/f4/img/minesec_sheet.png">    </p:cNvPr>
+          <p:cNvPicPr>
+            <a:picLocks noChangeAspect="1"/>
+          </p:cNvPicPr>
+          <p:nvPr/>
+        </p:nvPicPr>
+        <p:blipFill>
+          <a:blip r:embed="rId1"/>
+          <a:stretch>
+            <a:fillRect/>
+          </a:stretch>
+        </p:blipFill>
+        <p:spPr>
+          <a:xfrm>
+            <a:off x="0" y="658368"/>
+            <a:ext cx="5120640" cy="5833872"/>
+          </a:xfrm>
+          <a:prstGeom prst="rect">
+            <a:avLst/>
+          </a:prstGeom>
+        </p:spPr>
+      </p:pic>
+      <p:sp>
+        <p:nvSpPr>
+          <p:cNvPr id="4" name="Text 1"/>
+          <p:cNvSpPr/>
+          <p:nvPr/>
+        </p:nvSpPr>
+        <p:spPr>
+          <a:xfrm>
+            <a:off x="5349240" y="1005840"/>
+            <a:ext cx="6522415" cy="731520"/>
+          </a:xfrm>
+          <a:prstGeom prst="rect">
+            <a:avLst/>
+          </a:prstGeom>
+          <a:noFill/>
+          <a:ln/>
+        </p:spPr>
+        <p:txBody>
+          <a:bodyPr wrap="square" lIns="0" tIns="0" rIns="0" bIns="0" rtlCol="0" anchor="ctr">
+            <a:normAutofit/>
+          </a:bodyPr>
+          <a:lstStyle/>
+          <a:p>
+            <a:pPr algn="ctr" indent="0" marL="0">
+              <a:buNone/>
+            </a:pPr>
+            <a:r>
+              <a:rPr lang="en-US" sz="3600" b="1" dirty="0">
+                <a:solidFill>
+                  <a:srgbClr val="990011"/>
+                </a:solidFill>
+                <a:latin typeface="Times New Roman" pitchFamily="34" charset="0"/>
+                <a:ea typeface="Times New Roman" pitchFamily="34" charset="-122"/>
+                <a:cs typeface="Times New Roman" pitchFamily="34" charset="-120"/>
+              </a:rPr>
+              <a:t>Next Lesson</a:t>
+            </a:r>
+            <a:endParaRPr lang="en-US" sz="3600" dirty="0"/>
+          </a:p>
+        </p:txBody>
+      </p:sp>
+      <p:sp>
+        <p:nvSpPr>
+          <p:cNvPr id="5" name="Text 2"/>
+          <p:cNvSpPr/>
+          <p:nvPr/>
+        </p:nvSpPr>
+        <p:spPr>
+          <a:xfrm>
+            <a:off x="5349240" y="1783080"/>
+            <a:ext cx="6522415" cy="4663440"/>
+          </a:xfrm>
+          <a:prstGeom prst="rect">
+            <a:avLst/>
+          </a:prstGeom>
+          <a:noFill/>
+          <a:ln/>
+        </p:spPr>
+        <p:txBody>
+          <a:bodyPr wrap="square" lIns="0" tIns="0" rIns="0" bIns="0" rtlCol="0" anchor="ctr"/>
+          <a:lstStyle/>
+          <a:p>
+            <a:pPr algn="ctr" indent="0" marL="0">
+              <a:spcAft>
+                <a:spcPts val="800"/>
+              </a:spcAft>
+              <a:buNone/>
+            </a:pPr>
+            <a:r>
+              <a:rPr lang="en-US" sz="4000" b="1" dirty="0">
+                <a:solidFill>
+                  <a:srgbClr val="111111"/>
+                </a:solidFill>
+                <a:latin typeface="Times New Roman" pitchFamily="34" charset="0"/>
+                <a:ea typeface="Times New Roman" pitchFamily="34" charset="-122"/>
+                <a:cs typeface="Times New Roman" pitchFamily="34" charset="-120"/>
+              </a:rPr>
+              <a:t>Our next lesson will be on:</a:t>
+            </a:r>
+            <a:endParaRPr lang="en-US" sz="4000" dirty="0"/>
+          </a:p>
+          <a:p>
+            <a:pPr algn="ctr" indent="0" marL="0">
+              <a:spcAft>
+                <a:spcPts val="800"/>
+              </a:spcAft>
+              <a:buNone/>
+            </a:pPr>
+            <a:r>
+              <a:rPr lang="en-US" sz="4000" b="1" dirty="0">
+                <a:solidFill>
+                  <a:srgbClr val="990011"/>
+                </a:solidFill>
+                <a:latin typeface="Times New Roman" pitchFamily="34" charset="0"/>
+                <a:ea typeface="Times New Roman" pitchFamily="34" charset="-122"/>
+                <a:cs typeface="Times New Roman" pitchFamily="34" charset="-120"/>
+              </a:rPr>
+              <a:t>Further Study 1: The Universe and the Moon</a:t>
+            </a:r>
+            <a:endParaRPr lang="en-US" sz="4000" dirty="0"/>
+          </a:p>
+        </p:txBody>
+      </p:sp>
+      <p:sp>
+        <p:nvSpPr>
+          <p:cNvPr id="25" name="Slide Number Placeholder 0"/>
+          <p:cNvSpPr>
+            <a:spLocks noGrp="1"/>
+          </p:cNvSpPr>
+          <p:nvPr>
+            <p:ph type="sldNum" sz="quarter" idx="4294967295"/>
+          </p:nvPr>
+        </p:nvSpPr>
+        <p:spPr>
+          <a:xfrm>
+            <a:off x="27432" y="91440"/>
+            <a:ext cx="585216" cy="475488"/>
+          </a:xfrm>
+          <a:prstGeom prst="rect">
+            <a:avLst/>
+          </a:prstGeom>
+          <a:extLst>
+            <a:ext uri="{C572A759-6A51-4108-AA02-DFA0A04FC94B}">
+              <ma14:wrappingTextBoxFlag xmlns:ma14="http://schemas.microsoft.com/office/mac/drawingml/2011/main" val="0"/>
+            </a:ext>
+          </a:extLst>
+        </p:spPr>
+        <p:txBody>
+          <a:bodyPr/>
+          <a:lstStyle>
+            <a:lvl1pPr>
+              <a:defRPr sz="2000">
+                <a:solidFill>
+                  <a:srgbClr val="FFFFFF"/>
+                </a:solidFill>
+                <a:latin typeface="Calibri"/>
+                <a:ea typeface="Calibri"/>
+                <a:cs typeface="Calibri"/>
+              </a:defRPr>
+            </a:lvl1pPr>
+          </a:lstStyle>
+          <a:p>
+            <a:pPr algn="ctr"/>
+            <a:fld id="{F7021451-1387-4CA6-816F-3879F97B5CBC}" type="slidenum">
+              <a:rPr b="1" lang="en-US"/>
+              <a:t>47</a:t>
+            </a:fld>
+            <a:endParaRPr lang="en-US"/>
+          </a:p>
+        </p:txBody>
+      </p:sp>
+    </p:spTree>
+  </p:cSld>
+  <p:clrMapOvr>
+    <a:masterClrMapping/>
+  </p:clrMapOvr>
+</p:sld>
+</file>
+
+<file path=ppt/slides/slide48.xml><?xml version="1.0" encoding="utf-8"?>
+<p:sld xmlns:a="http://schemas.openxmlformats.org/drawingml/2006/main" xmlns:r="http://schemas.openxmlformats.org/officeDocument/2006/relationships" xmlns:p="http://schemas.openxmlformats.org/presentationml/2006/main">
+  <p:cSld name="Slide 48">
+    <p:spTree>
+      <p:nvGrpSpPr>
+        <p:cNvPr id="1" name=""/>
+        <p:cNvGrpSpPr/>
+        <p:nvPr/>
+      </p:nvGrpSpPr>
+      <p:grpSpPr>
+        <a:xfrm>
+          <a:off x="0" y="0"/>
+          <a:ext cx="0" cy="0"/>
+          <a:chOff x="0" y="0"/>
+          <a:chExt cx="0" cy="0"/>
+        </a:xfrm>
+      </p:grpSpPr>
+      <p:sp>
+        <p:nvSpPr>
+          <p:cNvPr id="2" name="Text 0"/>
+          <p:cNvSpPr/>
+          <p:nvPr/>
+        </p:nvSpPr>
+        <p:spPr>
+          <a:xfrm>
+            <a:off x="457200" y="713232"/>
+            <a:ext cx="11368735" cy="274320"/>
+          </a:xfrm>
+          <a:prstGeom prst="rect">
+            <a:avLst/>
+          </a:prstGeom>
+          <a:noFill/>
+          <a:ln/>
+        </p:spPr>
+        <p:txBody>
+          <a:bodyPr wrap="square" lIns="0" tIns="0" rIns="0" bIns="0" rtlCol="0" anchor="ctr"/>
+          <a:lstStyle/>
+          <a:p>
+            <a:pPr algn="r" indent="0" marL="0">
+              <a:buNone/>
+            </a:pPr>
+            <a:r>
+              <a:rPr lang="en-US" sz="1400" b="1" dirty="0">
+                <a:solidFill>
+                  <a:srgbClr val="1C3F6E"/>
+                </a:solidFill>
+                <a:latin typeface="Calibri" pitchFamily="34" charset="0"/>
+                <a:ea typeface="Calibri" pitchFamily="34" charset="-122"/>
+                <a:cs typeface="Calibri" pitchFamily="34" charset="-120"/>
+              </a:rPr>
               <a:t>BILINGUAL GAME</a:t>
             </a:r>
             <a:endParaRPr lang="en-US" sz="1400" dirty="0"/>
@@ -14960,7 +17455,7 @@
       </p:sp>
       <p:graphicFrame>
         <p:nvGraphicFramePr>
-          <p:cNvPr id="42" name="Table 0"/>
+          <p:cNvPr id="49" name="Table 0"/>
           <p:cNvGraphicFramePr>
             <a:graphicFrameLocks noGrp="1"/>
           </p:cNvGraphicFramePr>
@@ -16272,7 +18767,7 @@
             <a:pPr algn="ctr"/>
             <a:fld id="{F7021451-1387-4CA6-816F-3879F97B5CBC}" type="slidenum">
               <a:rPr b="1" lang="en-US"/>
-              <a:t>41</a:t>
+              <a:t>48</a:t>
             </a:fld>
             <a:endParaRPr lang="en-US"/>
           </a:p>
@@ -16286,9 +18781,9 @@
 </p:sld>
 </file>
 
-<file path=ppt/slides/slide42.xml><?xml version="1.0" encoding="utf-8"?>
+<file path=ppt/slides/slide49.xml><?xml version="1.0" encoding="utf-8"?>
 <p:sld xmlns:a="http://schemas.openxmlformats.org/drawingml/2006/main" xmlns:r="http://schemas.openxmlformats.org/officeDocument/2006/relationships" xmlns:p="http://schemas.openxmlformats.org/presentationml/2006/main">
-  <p:cSld name="Slide 42">
+  <p:cSld name="Slide 49">
     <p:spTree>
       <p:nvGrpSpPr>
         <p:cNvPr id="1" name=""/>
@@ -16383,7 +18878,7 @@
       </p:sp>
       <p:graphicFrame>
         <p:nvGraphicFramePr>
-          <p:cNvPr id="43" name="Table 0"/>
+          <p:cNvPr id="50" name="Table 0"/>
           <p:cNvGraphicFramePr>
             <a:graphicFrameLocks noGrp="1"/>
           </p:cNvGraphicFramePr>
@@ -17005,7 +19500,7 @@
             <a:pPr algn="ctr"/>
             <a:fld id="{F7021451-1387-4CA6-816F-3879F97B5CBC}" type="slidenum">
               <a:rPr b="1" lang="en-US"/>
-              <a:t>42</a:t>
+              <a:t>49</a:t>
             </a:fld>
             <a:endParaRPr lang="en-US"/>
           </a:p>
@@ -17019,9 +19514,9 @@
 </p:sld>
 </file>
 
-<file path=ppt/slides/slide43.xml><?xml version="1.0" encoding="utf-8"?>
+<file path=ppt/slides/slide5.xml><?xml version="1.0" encoding="utf-8"?>
 <p:sld xmlns:a="http://schemas.openxmlformats.org/drawingml/2006/main" xmlns:r="http://schemas.openxmlformats.org/officeDocument/2006/relationships" xmlns:p="http://schemas.openxmlformats.org/presentationml/2006/main">
-  <p:cSld name="Slide 43">
+  <p:cSld name="Slide 5">
     <p:spTree>
       <p:nvGrpSpPr>
         <p:cNvPr id="1" name=""/>
@@ -17069,6 +19564,269 @@
                 <a:ea typeface="Calibri" pitchFamily="34" charset="-122"/>
                 <a:cs typeface="Calibri" pitchFamily="34" charset="-120"/>
               </a:rPr>
+              <a:t>OBJECTIVES</a:t>
+            </a:r>
+            <a:endParaRPr lang="en-US" sz="1400" dirty="0"/>
+          </a:p>
+        </p:txBody>
+      </p:sp>
+      <p:pic>
+        <p:nvPicPr>
+          <p:cNvPr id="3" name="Image 0" descr="/home/claude/f4/img/minesec_sheet.png">    </p:cNvPr>
+          <p:cNvPicPr>
+            <a:picLocks noChangeAspect="1"/>
+          </p:cNvPicPr>
+          <p:nvPr/>
+        </p:nvPicPr>
+        <p:blipFill>
+          <a:blip r:embed="rId1"/>
+          <a:stretch>
+            <a:fillRect/>
+          </a:stretch>
+        </p:blipFill>
+        <p:spPr>
+          <a:xfrm>
+            <a:off x="0" y="658368"/>
+            <a:ext cx="3840480" cy="5833872"/>
+          </a:xfrm>
+          <a:prstGeom prst="rect">
+            <a:avLst/>
+          </a:prstGeom>
+        </p:spPr>
+      </p:pic>
+      <p:sp>
+        <p:nvSpPr>
+          <p:cNvPr id="4" name="Text 1"/>
+          <p:cNvSpPr/>
+          <p:nvPr/>
+        </p:nvSpPr>
+        <p:spPr>
+          <a:xfrm>
+            <a:off x="4069080" y="1005840"/>
+            <a:ext cx="7802575" cy="731520"/>
+          </a:xfrm>
+          <a:prstGeom prst="rect">
+            <a:avLst/>
+          </a:prstGeom>
+          <a:noFill/>
+          <a:ln/>
+        </p:spPr>
+        <p:txBody>
+          <a:bodyPr wrap="square" lIns="0" tIns="0" rIns="0" bIns="0" rtlCol="0" anchor="ctr">
+            <a:normAutofit/>
+          </a:bodyPr>
+          <a:lstStyle/>
+          <a:p>
+            <a:pPr algn="ctr" indent="0" marL="0">
+              <a:buNone/>
+            </a:pPr>
+            <a:r>
+              <a:rPr lang="en-US" sz="3600" b="1" dirty="0">
+                <a:solidFill>
+                  <a:srgbClr val="990011"/>
+                </a:solidFill>
+                <a:latin typeface="Times New Roman" pitchFamily="34" charset="0"/>
+                <a:ea typeface="Times New Roman" pitchFamily="34" charset="-122"/>
+                <a:cs typeface="Times New Roman" pitchFamily="34" charset="-120"/>
+              </a:rPr>
+              <a:t>Objectives</a:t>
+            </a:r>
+            <a:endParaRPr lang="en-US" sz="3600" dirty="0"/>
+          </a:p>
+        </p:txBody>
+      </p:sp>
+      <p:sp>
+        <p:nvSpPr>
+          <p:cNvPr id="5" name="Text 2"/>
+          <p:cNvSpPr/>
+          <p:nvPr/>
+        </p:nvSpPr>
+        <p:spPr>
+          <a:xfrm>
+            <a:off x="4069080" y="1783080"/>
+            <a:ext cx="7802575" cy="4663440"/>
+          </a:xfrm>
+          <a:prstGeom prst="rect">
+            <a:avLst/>
+          </a:prstGeom>
+          <a:noFill/>
+          <a:ln/>
+        </p:spPr>
+        <p:txBody>
+          <a:bodyPr wrap="square" lIns="0" tIns="0" rIns="0" bIns="0" rtlCol="0" anchor="t"/>
+          <a:lstStyle/>
+          <a:p>
+            <a:pPr algn="l" indent="0" marL="0">
+              <a:spcAft>
+                <a:spcPts val="800"/>
+              </a:spcAft>
+              <a:buNone/>
+            </a:pPr>
+            <a:r>
+              <a:rPr lang="en-US" sz="4000" b="1" dirty="0">
+                <a:solidFill>
+                  <a:srgbClr val="111111"/>
+                </a:solidFill>
+                <a:latin typeface="Times New Roman" pitchFamily="34" charset="0"/>
+                <a:ea typeface="Times New Roman" pitchFamily="34" charset="-122"/>
+                <a:cs typeface="Times New Roman" pitchFamily="34" charset="-120"/>
+              </a:rPr>
+              <a:t>By the end of this lesson, you should be able to:</a:t>
+            </a:r>
+            <a:endParaRPr lang="en-US" sz="4000" dirty="0"/>
+          </a:p>
+          <a:p>
+            <a:pPr algn="l" marL="342900" indent="-342900">
+              <a:spcAft>
+                <a:spcPts val="800"/>
+              </a:spcAft>
+              <a:buSzPct val="100000"/>
+              <a:buFont typeface="+mj-lt"/>
+              <a:buAutoNum type="arabicPeriod" startAt="1"/>
+            </a:pPr>
+            <a:r>
+              <a:rPr lang="en-US" sz="4000" dirty="0">
+                <a:solidFill>
+                  <a:srgbClr val="111111"/>
+                </a:solidFill>
+                <a:latin typeface="Times New Roman" pitchFamily="34" charset="0"/>
+                <a:ea typeface="Times New Roman" pitchFamily="34" charset="-122"/>
+                <a:cs typeface="Times New Roman" pitchFamily="34" charset="-120"/>
+              </a:rPr>
+              <a:t>Give the size of the Earth: its circumferences and diameters.</a:t>
+            </a:r>
+            <a:endParaRPr lang="en-US" sz="4000" dirty="0"/>
+          </a:p>
+          <a:p>
+            <a:pPr algn="l" marL="342900" indent="-342900">
+              <a:spcAft>
+                <a:spcPts val="800"/>
+              </a:spcAft>
+              <a:buSzPct val="100000"/>
+              <a:buFont typeface="+mj-lt"/>
+              <a:buAutoNum type="arabicPeriod" startAt="1"/>
+            </a:pPr>
+            <a:r>
+              <a:rPr lang="en-US" sz="4000" dirty="0">
+                <a:solidFill>
+                  <a:srgbClr val="111111"/>
+                </a:solidFill>
+                <a:latin typeface="Times New Roman" pitchFamily="34" charset="0"/>
+                <a:ea typeface="Times New Roman" pitchFamily="34" charset="-122"/>
+                <a:cs typeface="Times New Roman" pitchFamily="34" charset="-120"/>
+              </a:rPr>
+              <a:t>Describe the true shape of the Earth (an oblate spheroid).</a:t>
+            </a:r>
+            <a:endParaRPr lang="en-US" sz="4000" dirty="0"/>
+          </a:p>
+        </p:txBody>
+      </p:sp>
+      <p:sp>
+        <p:nvSpPr>
+          <p:cNvPr id="25" name="Slide Number Placeholder 0"/>
+          <p:cNvSpPr>
+            <a:spLocks noGrp="1"/>
+          </p:cNvSpPr>
+          <p:nvPr>
+            <p:ph type="sldNum" sz="quarter" idx="4294967295"/>
+          </p:nvPr>
+        </p:nvSpPr>
+        <p:spPr>
+          <a:xfrm>
+            <a:off x="27432" y="91440"/>
+            <a:ext cx="585216" cy="475488"/>
+          </a:xfrm>
+          <a:prstGeom prst="rect">
+            <a:avLst/>
+          </a:prstGeom>
+          <a:extLst>
+            <a:ext uri="{C572A759-6A51-4108-AA02-DFA0A04FC94B}">
+              <ma14:wrappingTextBoxFlag xmlns:ma14="http://schemas.microsoft.com/office/mac/drawingml/2011/main" val="0"/>
+            </a:ext>
+          </a:extLst>
+        </p:spPr>
+        <p:txBody>
+          <a:bodyPr/>
+          <a:lstStyle>
+            <a:lvl1pPr>
+              <a:defRPr sz="2000">
+                <a:solidFill>
+                  <a:srgbClr val="FFFFFF"/>
+                </a:solidFill>
+                <a:latin typeface="Calibri"/>
+                <a:ea typeface="Calibri"/>
+                <a:cs typeface="Calibri"/>
+              </a:defRPr>
+            </a:lvl1pPr>
+          </a:lstStyle>
+          <a:p>
+            <a:pPr algn="ctr"/>
+            <a:fld id="{F7021451-1387-4CA6-816F-3879F97B5CBC}" type="slidenum">
+              <a:rPr b="1" lang="en-US"/>
+              <a:t>5</a:t>
+            </a:fld>
+            <a:endParaRPr lang="en-US"/>
+          </a:p>
+        </p:txBody>
+      </p:sp>
+    </p:spTree>
+  </p:cSld>
+  <p:clrMapOvr>
+    <a:masterClrMapping/>
+  </p:clrMapOvr>
+</p:sld>
+</file>
+
+<file path=ppt/slides/slide50.xml><?xml version="1.0" encoding="utf-8"?>
+<p:sld xmlns:a="http://schemas.openxmlformats.org/drawingml/2006/main" xmlns:r="http://schemas.openxmlformats.org/officeDocument/2006/relationships" xmlns:p="http://schemas.openxmlformats.org/presentationml/2006/main">
+  <p:cSld name="Slide 50">
+    <p:spTree>
+      <p:nvGrpSpPr>
+        <p:cNvPr id="1" name=""/>
+        <p:cNvGrpSpPr/>
+        <p:nvPr/>
+      </p:nvGrpSpPr>
+      <p:grpSpPr>
+        <a:xfrm>
+          <a:off x="0" y="0"/>
+          <a:ext cx="0" cy="0"/>
+          <a:chOff x="0" y="0"/>
+          <a:chExt cx="0" cy="0"/>
+        </a:xfrm>
+      </p:grpSpPr>
+      <p:sp>
+        <p:nvSpPr>
+          <p:cNvPr id="2" name="Text 0"/>
+          <p:cNvSpPr/>
+          <p:nvPr/>
+        </p:nvSpPr>
+        <p:spPr>
+          <a:xfrm>
+            <a:off x="457200" y="713232"/>
+            <a:ext cx="11368735" cy="274320"/>
+          </a:xfrm>
+          <a:prstGeom prst="rect">
+            <a:avLst/>
+          </a:prstGeom>
+          <a:noFill/>
+          <a:ln/>
+        </p:spPr>
+        <p:txBody>
+          <a:bodyPr wrap="square" lIns="0" tIns="0" rIns="0" bIns="0" rtlCol="0" anchor="ctr"/>
+          <a:lstStyle/>
+          <a:p>
+            <a:pPr algn="r" indent="0" marL="0">
+              <a:buNone/>
+            </a:pPr>
+            <a:r>
+              <a:rPr lang="en-US" sz="1400" b="1" dirty="0">
+                <a:solidFill>
+                  <a:srgbClr val="1C3F6E"/>
+                </a:solidFill>
+                <a:latin typeface="Calibri" pitchFamily="34" charset="0"/>
+                <a:ea typeface="Calibri" pitchFamily="34" charset="-122"/>
+                <a:cs typeface="Calibri" pitchFamily="34" charset="-120"/>
+              </a:rPr>
               <a:t>LOGBOOK</a:t>
             </a:r>
             <a:endParaRPr lang="en-US" sz="1400" dirty="0"/>
@@ -17116,7 +19874,7 @@
       </p:sp>
       <p:graphicFrame>
         <p:nvGraphicFramePr>
-          <p:cNvPr id="44" name="Table 0"/>
+          <p:cNvPr id="51" name="Table 0"/>
           <p:cNvGraphicFramePr>
             <a:graphicFrameLocks noGrp="1"/>
           </p:cNvGraphicFramePr>
@@ -17226,7 +19984,7 @@
                           <a:ea typeface="Calibri" pitchFamily="34" charset="-122"/>
                           <a:cs typeface="Calibri" pitchFamily="34" charset="-120"/>
                         </a:rPr>
-                        <a:t>DEFINITIONS; Size of the Earth; Shape of the Earth; Proofs of the Shape of the Earth.</a:t>
+                        <a:t>DEFINITIONS; The Size of the Earth; The Shape of the Earth; Proofs that the Earth Is Spherical.</a:t>
                       </a:r>
                       <a:endParaRPr lang="en-US" sz="1600" dirty="0">
                         <a:latin typeface="Calibri" charset="0"/>
@@ -17876,7 +20634,7 @@
             <a:pPr algn="ctr"/>
             <a:fld id="{F7021451-1387-4CA6-816F-3879F97B5CBC}" type="slidenum">
               <a:rPr b="1" lang="en-US"/>
-              <a:t>43</a:t>
+              <a:t>50</a:t>
             </a:fld>
             <a:endParaRPr lang="en-US"/>
           </a:p>
@@ -17890,9 +20648,9 @@
 </p:sld>
 </file>
 
-<file path=ppt/slides/slide44.xml><?xml version="1.0" encoding="utf-8"?>
+<file path=ppt/slides/slide51.xml><?xml version="1.0" encoding="utf-8"?>
 <p:sld xmlns:a="http://schemas.openxmlformats.org/drawingml/2006/main" xmlns:r="http://schemas.openxmlformats.org/officeDocument/2006/relationships" xmlns:p="http://schemas.openxmlformats.org/presentationml/2006/main">
-  <p:cSld name="Slide 44">
+  <p:cSld name="Slide 51">
     <p:spTree>
       <p:nvGrpSpPr>
         <p:cNvPr id="1" name=""/>
@@ -18132,7 +20890,7 @@
                 <a:ea typeface="Calibri" pitchFamily="34" charset="-122"/>
                 <a:cs typeface="Calibri" pitchFamily="34" charset="-120"/>
               </a:rPr>
-              <a:t>Without the projector (Activity 2): draw three ships going down behind a curved line and ask the question.</a:t>
+              <a:t>Without the projector (Activity 2): draw three ships going down behind a curved line.</a:t>
             </a:r>
             <a:endParaRPr lang="en-US" sz="2000" dirty="0"/>
           </a:p>
@@ -18201,7 +20959,7 @@
             <a:pPr algn="ctr"/>
             <a:fld id="{F7021451-1387-4CA6-816F-3879F97B5CBC}" type="slidenum">
               <a:rPr b="1" lang="en-US"/>
-              <a:t>44</a:t>
+              <a:t>51</a:t>
             </a:fld>
             <a:endParaRPr lang="en-US"/>
           </a:p>
@@ -18215,9 +20973,9 @@
 </p:sld>
 </file>
 
-<file path=ppt/slides/slide45.xml><?xml version="1.0" encoding="utf-8"?>
+<file path=ppt/slides/slide52.xml><?xml version="1.0" encoding="utf-8"?>
 <p:sld xmlns:a="http://schemas.openxmlformats.org/drawingml/2006/main" xmlns:r="http://schemas.openxmlformats.org/officeDocument/2006/relationships" xmlns:p="http://schemas.openxmlformats.org/presentationml/2006/main">
-  <p:cSld name="Slide 45">
+  <p:cSld name="Slide 52">
     <p:spTree>
       <p:nvGrpSpPr>
         <p:cNvPr id="1" name=""/>
@@ -18505,270 +21263,7 @@
             <a:pPr algn="ctr"/>
             <a:fld id="{F7021451-1387-4CA6-816F-3879F97B5CBC}" type="slidenum">
               <a:rPr b="1" lang="en-US"/>
-              <a:t>45</a:t>
-            </a:fld>
-            <a:endParaRPr lang="en-US"/>
-          </a:p>
-        </p:txBody>
-      </p:sp>
-    </p:spTree>
-  </p:cSld>
-  <p:clrMapOvr>
-    <a:masterClrMapping/>
-  </p:clrMapOvr>
-</p:sld>
-</file>
-
-<file path=ppt/slides/slide5.xml><?xml version="1.0" encoding="utf-8"?>
-<p:sld xmlns:a="http://schemas.openxmlformats.org/drawingml/2006/main" xmlns:r="http://schemas.openxmlformats.org/officeDocument/2006/relationships" xmlns:p="http://schemas.openxmlformats.org/presentationml/2006/main">
-  <p:cSld name="Slide 5">
-    <p:spTree>
-      <p:nvGrpSpPr>
-        <p:cNvPr id="1" name=""/>
-        <p:cNvGrpSpPr/>
-        <p:nvPr/>
-      </p:nvGrpSpPr>
-      <p:grpSpPr>
-        <a:xfrm>
-          <a:off x="0" y="0"/>
-          <a:ext cx="0" cy="0"/>
-          <a:chOff x="0" y="0"/>
-          <a:chExt cx="0" cy="0"/>
-        </a:xfrm>
-      </p:grpSpPr>
-      <p:sp>
-        <p:nvSpPr>
-          <p:cNvPr id="2" name="Text 0"/>
-          <p:cNvSpPr/>
-          <p:nvPr/>
-        </p:nvSpPr>
-        <p:spPr>
-          <a:xfrm>
-            <a:off x="457200" y="713232"/>
-            <a:ext cx="11368735" cy="274320"/>
-          </a:xfrm>
-          <a:prstGeom prst="rect">
-            <a:avLst/>
-          </a:prstGeom>
-          <a:noFill/>
-          <a:ln/>
-        </p:spPr>
-        <p:txBody>
-          <a:bodyPr wrap="square" lIns="0" tIns="0" rIns="0" bIns="0" rtlCol="0" anchor="ctr"/>
-          <a:lstStyle/>
-          <a:p>
-            <a:pPr algn="r" indent="0" marL="0">
-              <a:buNone/>
-            </a:pPr>
-            <a:r>
-              <a:rPr lang="en-US" sz="1400" b="1" dirty="0">
-                <a:solidFill>
-                  <a:srgbClr val="1C3F6E"/>
-                </a:solidFill>
-                <a:latin typeface="Calibri" pitchFamily="34" charset="0"/>
-                <a:ea typeface="Calibri" pitchFamily="34" charset="-122"/>
-                <a:cs typeface="Calibri" pitchFamily="34" charset="-120"/>
-              </a:rPr>
-              <a:t>OBJECTIVES</a:t>
-            </a:r>
-            <a:endParaRPr lang="en-US" sz="1400" dirty="0"/>
-          </a:p>
-        </p:txBody>
-      </p:sp>
-      <p:pic>
-        <p:nvPicPr>
-          <p:cNvPr id="3" name="Image 0" descr="/home/claude/f4/img/minesec_sheet.png">    </p:cNvPr>
-          <p:cNvPicPr>
-            <a:picLocks noChangeAspect="1"/>
-          </p:cNvPicPr>
-          <p:nvPr/>
-        </p:nvPicPr>
-        <p:blipFill>
-          <a:blip r:embed="rId1"/>
-          <a:stretch>
-            <a:fillRect/>
-          </a:stretch>
-        </p:blipFill>
-        <p:spPr>
-          <a:xfrm>
-            <a:off x="0" y="658368"/>
-            <a:ext cx="3840480" cy="5833872"/>
-          </a:xfrm>
-          <a:prstGeom prst="rect">
-            <a:avLst/>
-          </a:prstGeom>
-        </p:spPr>
-      </p:pic>
-      <p:sp>
-        <p:nvSpPr>
-          <p:cNvPr id="4" name="Text 1"/>
-          <p:cNvSpPr/>
-          <p:nvPr/>
-        </p:nvSpPr>
-        <p:spPr>
-          <a:xfrm>
-            <a:off x="4069080" y="1005840"/>
-            <a:ext cx="7802575" cy="731520"/>
-          </a:xfrm>
-          <a:prstGeom prst="rect">
-            <a:avLst/>
-          </a:prstGeom>
-          <a:noFill/>
-          <a:ln/>
-        </p:spPr>
-        <p:txBody>
-          <a:bodyPr wrap="square" lIns="0" tIns="0" rIns="0" bIns="0" rtlCol="0" anchor="ctr">
-            <a:normAutofit/>
-          </a:bodyPr>
-          <a:lstStyle/>
-          <a:p>
-            <a:pPr algn="ctr" indent="0" marL="0">
-              <a:buNone/>
-            </a:pPr>
-            <a:r>
-              <a:rPr lang="en-US" sz="3600" b="1" dirty="0">
-                <a:solidFill>
-                  <a:srgbClr val="990011"/>
-                </a:solidFill>
-                <a:latin typeface="Times New Roman" pitchFamily="34" charset="0"/>
-                <a:ea typeface="Times New Roman" pitchFamily="34" charset="-122"/>
-                <a:cs typeface="Times New Roman" pitchFamily="34" charset="-120"/>
-              </a:rPr>
-              <a:t>Objectives</a:t>
-            </a:r>
-            <a:endParaRPr lang="en-US" sz="3600" dirty="0"/>
-          </a:p>
-        </p:txBody>
-      </p:sp>
-      <p:sp>
-        <p:nvSpPr>
-          <p:cNvPr id="5" name="Text 2"/>
-          <p:cNvSpPr/>
-          <p:nvPr/>
-        </p:nvSpPr>
-        <p:spPr>
-          <a:xfrm>
-            <a:off x="4069080" y="1783080"/>
-            <a:ext cx="7802575" cy="4663440"/>
-          </a:xfrm>
-          <a:prstGeom prst="rect">
-            <a:avLst/>
-          </a:prstGeom>
-          <a:noFill/>
-          <a:ln/>
-        </p:spPr>
-        <p:txBody>
-          <a:bodyPr wrap="square" lIns="0" tIns="0" rIns="0" bIns="0" rtlCol="0" anchor="t"/>
-          <a:lstStyle/>
-          <a:p>
-            <a:pPr algn="l" indent="0" marL="0">
-              <a:spcAft>
-                <a:spcPts val="800"/>
-              </a:spcAft>
-              <a:buNone/>
-            </a:pPr>
-            <a:r>
-              <a:rPr lang="en-US" sz="4000" b="1" dirty="0">
-                <a:solidFill>
-                  <a:srgbClr val="111111"/>
-                </a:solidFill>
-                <a:latin typeface="Times New Roman" pitchFamily="34" charset="0"/>
-                <a:ea typeface="Times New Roman" pitchFamily="34" charset="-122"/>
-                <a:cs typeface="Times New Roman" pitchFamily="34" charset="-120"/>
-              </a:rPr>
-              <a:t>By the end of this lesson, you should be able to:</a:t>
-            </a:r>
-            <a:endParaRPr lang="en-US" sz="4000" dirty="0"/>
-          </a:p>
-          <a:p>
-            <a:pPr algn="l" marL="342900" indent="-342900">
-              <a:spcAft>
-                <a:spcPts val="800"/>
-              </a:spcAft>
-              <a:buSzPct val="100000"/>
-              <a:buFont typeface="+mj-lt"/>
-              <a:buAutoNum type="arabicPeriod" startAt="1"/>
-            </a:pPr>
-            <a:r>
-              <a:rPr lang="en-US" sz="4000" dirty="0">
-                <a:solidFill>
-                  <a:srgbClr val="111111"/>
-                </a:solidFill>
-                <a:latin typeface="Times New Roman" pitchFamily="34" charset="0"/>
-                <a:ea typeface="Times New Roman" pitchFamily="34" charset="-122"/>
-                <a:cs typeface="Times New Roman" pitchFamily="34" charset="-120"/>
-              </a:rPr>
-              <a:t>Give the size of the Earth: its circumferences and diameters.</a:t>
-            </a:r>
-            <a:endParaRPr lang="en-US" sz="4000" dirty="0"/>
-          </a:p>
-          <a:p>
-            <a:pPr algn="l" marL="342900" indent="-342900">
-              <a:spcAft>
-                <a:spcPts val="800"/>
-              </a:spcAft>
-              <a:buSzPct val="100000"/>
-              <a:buFont typeface="+mj-lt"/>
-              <a:buAutoNum type="arabicPeriod" startAt="1"/>
-            </a:pPr>
-            <a:r>
-              <a:rPr lang="en-US" sz="4000" dirty="0">
-                <a:solidFill>
-                  <a:srgbClr val="111111"/>
-                </a:solidFill>
-                <a:latin typeface="Times New Roman" pitchFamily="34" charset="0"/>
-                <a:ea typeface="Times New Roman" pitchFamily="34" charset="-122"/>
-                <a:cs typeface="Times New Roman" pitchFamily="34" charset="-120"/>
-              </a:rPr>
-              <a:t>Describe the true shape of the Earth (an oblate spheroid).</a:t>
-            </a:r>
-            <a:endParaRPr lang="en-US" sz="4000" dirty="0"/>
-          </a:p>
-        </p:txBody>
-      </p:sp>
-      <p:sp>
-        <p:nvSpPr>
-          <p:cNvPr id="25" name="Slide Number Placeholder 0"/>
-          <p:cNvSpPr>
-            <a:spLocks noGrp="1"/>
-          </p:cNvSpPr>
-          <p:nvPr>
-            <p:ph type="sldNum" sz="quarter" idx="4294967295"/>
-          </p:nvPr>
-        </p:nvSpPr>
-        <p:spPr>
-          <a:xfrm>
-            <a:off x="27432" y="91440"/>
-            <a:ext cx="585216" cy="475488"/>
-          </a:xfrm>
-          <a:prstGeom prst="rect">
-            <a:avLst/>
-          </a:prstGeom>
-          <a:extLst>
-            <a:ext uri="{C572A759-6A51-4108-AA02-DFA0A04FC94B}">
-              <ma14:wrappingTextBoxFlag xmlns:ma14="http://schemas.microsoft.com/office/mac/drawingml/2011/main" val="0"/>
-            </a:ext>
-          </a:extLst>
-        </p:spPr>
-        <p:txBody>
-          <a:bodyPr/>
-          <a:lstStyle>
-            <a:lvl1pPr>
-              <a:defRPr sz="2000">
-                <a:solidFill>
-                  <a:srgbClr val="FFFFFF"/>
-                </a:solidFill>
-                <a:latin typeface="Calibri"/>
-                <a:ea typeface="Calibri"/>
-                <a:cs typeface="Calibri"/>
-              </a:defRPr>
-            </a:lvl1pPr>
-          </a:lstStyle>
-          <a:p>
-            <a:pPr algn="ctr"/>
-            <a:fld id="{F7021451-1387-4CA6-816F-3879F97B5CBC}" type="slidenum">
-              <a:rPr b="1" lang="en-US"/>
-              <a:t>5</a:t>
+              <a:t>52</a:t>
             </a:fld>
             <a:endParaRPr lang="en-US"/>
           </a:p>
@@ -19338,7 +21833,7 @@
         <p:spPr>
           <a:xfrm>
             <a:off x="0" y="658368"/>
-            <a:ext cx="5120640" cy="5833872"/>
+            <a:ext cx="2468880" cy="5833872"/>
           </a:xfrm>
           <a:prstGeom prst="rect">
             <a:avLst/>
@@ -19353,8 +21848,8 @@
         </p:nvSpPr>
         <p:spPr>
           <a:xfrm>
-            <a:off x="5349240" y="1005840"/>
-            <a:ext cx="6522415" cy="731520"/>
+            <a:off x="2697480" y="1005840"/>
+            <a:ext cx="9174175" cy="731520"/>
           </a:xfrm>
           <a:prstGeom prst="rect">
             <a:avLst/>
@@ -19394,8 +21889,8 @@
         </p:nvSpPr>
         <p:spPr>
           <a:xfrm>
-            <a:off x="5349240" y="1783080"/>
-            <a:ext cx="6522415" cy="4663440"/>
+            <a:off x="2697480" y="1783080"/>
+            <a:ext cx="9174175" cy="4663440"/>
           </a:xfrm>
           <a:prstGeom prst="rect">
             <a:avLst/>
@@ -19422,7 +21917,7 @@
                 <a:ea typeface="Times New Roman" pitchFamily="34" charset="-122"/>
                 <a:cs typeface="Times New Roman" pitchFamily="34" charset="-120"/>
               </a:rPr>
-              <a:t>On a long, straight road, Aïcha sees a lorry coming from far away. First, she sees only the top of the lorry. Then she sees the whole lorry. Her brother says, "The Earth is flat."</a:t>
+              <a:t>On a long, straight road, Aïcha sees a lorry coming from far away: first she sees only its top, then the whole lorry. Her brother says that the Earth is flat. Aïcha asks: "If the Earth is flat, why did I see the top of the lorry first?"</a:t>
             </a:r>
             <a:endParaRPr lang="en-US" sz="4000" dirty="0"/>
           </a:p>

--- a/lecons/F3/01_FORM4_LESSON01_Our_Planet_the_Earth.pptx
+++ b/lecons/F3/01_FORM4_LESSON01_Our_Planet_the_Earth.pptx
@@ -11019,7 +11019,7 @@
               <a:buNone/>
             </a:pPr>
             <a:r>
-              <a:rPr lang="en-US" sz="4000" b="1" dirty="0">
+              <a:rPr lang="en-US" sz="3200" b="1" dirty="0">
                 <a:solidFill>
                   <a:srgbClr val="111111"/>
                 </a:solidFill>
@@ -11029,7 +11029,7 @@
               </a:rPr>
               <a:t>Topic: The Earth as a Planet in the Solar System</a:t>
             </a:r>
-            <a:endParaRPr lang="en-US" sz="4000" dirty="0"/>
+            <a:endParaRPr lang="en-US" sz="3200" dirty="0"/>
           </a:p>
           <a:p>
             <a:pPr algn="l" indent="0" marL="0">
@@ -11039,7 +11039,7 @@
               <a:buNone/>
             </a:pPr>
             <a:r>
-              <a:rPr lang="en-US" sz="4000" b="1" dirty="0">
+              <a:rPr lang="en-US" sz="3200" b="1" dirty="0">
                 <a:solidFill>
                   <a:srgbClr val="111111"/>
                 </a:solidFill>
@@ -11049,7 +11049,7 @@
               </a:rPr>
               <a:t>Sub-topic: The Earth as a Planet of the Solar System</a:t>
             </a:r>
-            <a:endParaRPr lang="en-US" sz="4000" dirty="0"/>
+            <a:endParaRPr lang="en-US" sz="3200" dirty="0"/>
           </a:p>
           <a:p>
             <a:pPr algn="l" indent="0" marL="0">
@@ -11059,7 +11059,7 @@
               <a:buNone/>
             </a:pPr>
             <a:r>
-              <a:rPr lang="en-US" sz="4000" b="1" dirty="0">
+              <a:rPr lang="en-US" sz="3200" b="1" dirty="0">
                 <a:solidFill>
                   <a:srgbClr val="990011"/>
                 </a:solidFill>
@@ -11069,7 +11069,7 @@
               </a:rPr>
               <a:t>Lesson 1: Our Planet, the Earth: Size, Shape and Proofs</a:t>
             </a:r>
-            <a:endParaRPr lang="en-US" sz="4000" dirty="0"/>
+            <a:endParaRPr lang="en-US" sz="3200" dirty="0"/>
           </a:p>
         </p:txBody>
       </p:sp>

--- a/lecons/F3/01_FORM4_LESSON01_Our_Planet_the_Earth.pptx
+++ b/lecons/F3/01_FORM4_LESSON01_Our_Planet_the_Earth.pptx
@@ -4073,7 +4073,7 @@
           <a:p>
             <a:r>
               <a:rPr lang="en-US" dirty="0"/>
-              <a:t>For your homework: Look at the Moon on three different evenings this week. Draw its shape each time and write the date under each drawing. We shall correct it at the beginning of our next lesson.</a:t>
+              <a:t>For your homework: Name the four main phases of the Moon. We shall correct it at the beginning of our next lesson.</a:t>
             </a:r>
             <a:endParaRPr lang="en-US" dirty="0"/>
           </a:p>
@@ -17057,7 +17057,7 @@
                 <a:ea typeface="Times New Roman" pitchFamily="34" charset="-122"/>
                 <a:cs typeface="Times New Roman" pitchFamily="34" charset="-120"/>
               </a:rPr>
-              <a:t>Look at the Moon on three different evenings this week. Draw its shape each time and write the date under each drawing.</a:t>
+              <a:t>Name the four main phases of the Moon.</a:t>
             </a:r>
             <a:endParaRPr lang="en-US" sz="4000" dirty="0"/>
           </a:p>
@@ -20260,7 +20260,7 @@
                           <a:ea typeface="Calibri" pitchFamily="34" charset="-122"/>
                           <a:cs typeface="Calibri" pitchFamily="34" charset="-120"/>
                         </a:rPr>
-                        <a:t>Look at the Moon on three different evenings this week. Draw its shape each time and write the date under each drawing.</a:t>
+                        <a:t>Name the four main phases of the Moon.</a:t>
                       </a:r>
                       <a:endParaRPr lang="en-US" sz="1600" dirty="0">
                         <a:latin typeface="Calibri" charset="0"/>
